--- a/pitch/Inibsa_Alert_Marker.pptx
+++ b/pitch/Inibsa_Alert_Marker.pptx
@@ -9,6 +9,10 @@
     <p:sldId id="257" r:id="rId8"/>
     <p:sldId id="258" r:id="rId9"/>
     <p:sldId id="259" r:id="rId10"/>
+    <p:sldId id="260" r:id="rId11"/>
+    <p:sldId id="261" r:id="rId12"/>
+    <p:sldId id="262" r:id="rId13"/>
+    <p:sldId id="263" r:id="rId14"/>
   </p:sldIdLst>
   <p:sldSz cx="12191695" cy="6858000" type="screen4x3"/>
   <p:notesSz cx="6858000" cy="9144000"/>
@@ -3716,14 +3720,92 @@
       <p:grpSpPr/>
       <p:sp>
         <p:nvSpPr>
-          <p:cNvPr id="2" name="TextBox 1"/>
-          <p:cNvSpPr txBox="1"/>
-          <p:nvPr/>
-        </p:nvSpPr>
-        <p:spPr>
-          <a:xfrm>
-            <a:off x="640080" y="411480"/>
-            <a:ext cx="10972800" cy="640080"/>
+          <p:cNvPr id="2" name="Oval 1"/>
+          <p:cNvSpPr/>
+          <p:nvPr/>
+        </p:nvSpPr>
+        <p:spPr>
+          <a:xfrm>
+            <a:off x="548640" y="457200"/>
+            <a:ext cx="640080" cy="640080"/>
+          </a:xfrm>
+          <a:prstGeom prst="ellipse">
+            <a:avLst/>
+          </a:prstGeom>
+          <a:solidFill>
+            <a:srgbClr val="2E6FA8"/>
+          </a:solidFill>
+          <a:ln>
+            <a:noFill/>
+          </a:ln>
+        </p:spPr>
+        <p:style>
+          <a:lnRef idx="1">
+            <a:schemeClr val="accent1"/>
+          </a:lnRef>
+          <a:fillRef idx="3">
+            <a:schemeClr val="accent1"/>
+          </a:fillRef>
+          <a:effectRef idx="2">
+            <a:schemeClr val="accent1"/>
+          </a:effectRef>
+          <a:fontRef idx="minor">
+            <a:schemeClr val="lt1"/>
+          </a:fontRef>
+        </p:style>
+        <p:txBody>
+          <a:bodyPr rtlCol="0" anchor="ctr"/>
+          <a:lstStyle/>
+          <a:p>
+            <a:pPr algn="ctr"/>
+          </a:p>
+        </p:txBody>
+      </p:sp>
+      <p:sp>
+        <p:nvSpPr>
+          <p:cNvPr id="3" name="TextBox 2"/>
+          <p:cNvSpPr txBox="1"/>
+          <p:nvPr/>
+        </p:nvSpPr>
+        <p:spPr>
+          <a:xfrm>
+            <a:off x="548640" y="502920"/>
+            <a:ext cx="640080" cy="548640"/>
+          </a:xfrm>
+          <a:prstGeom prst="rect">
+            <a:avLst/>
+          </a:prstGeom>
+          <a:noFill/>
+        </p:spPr>
+        <p:txBody>
+          <a:bodyPr wrap="square" lIns="0" rIns="0" tIns="0" bIns="0" anchor="t">
+            <a:spAutoFit/>
+          </a:bodyPr>
+          <a:lstStyle/>
+          <a:p>
+            <a:pPr algn="ctr"/>
+            <a:r>
+              <a:rPr sz="2000" b="1">
+                <a:solidFill>
+                  <a:srgbClr val="FFFFFF"/>
+                </a:solidFill>
+                <a:latin typeface="Calibri"/>
+              </a:rPr>
+              <a:t>01</a:t>
+            </a:r>
+          </a:p>
+        </p:txBody>
+      </p:sp>
+      <p:sp>
+        <p:nvSpPr>
+          <p:cNvPr id="4" name="TextBox 3"/>
+          <p:cNvSpPr txBox="1"/>
+          <p:nvPr/>
+        </p:nvSpPr>
+        <p:spPr>
+          <a:xfrm>
+            <a:off x="1371600" y="411480"/>
+            <a:ext cx="10332720" cy="640080"/>
           </a:xfrm>
           <a:prstGeom prst="rect">
             <a:avLst/>
@@ -3738,27 +3820,27 @@
           <a:p>
             <a:pPr algn="l"/>
             <a:r>
-              <a:rPr sz="3000" b="1">
+              <a:rPr sz="2800" b="1">
                 <a:solidFill>
                   <a:srgbClr val="1B2A4A"/>
                 </a:solidFill>
                 <a:latin typeface="Calibri"/>
               </a:rPr>
-              <a:t>Every morning, a 6,000-clinic question</a:t>
-            </a:r>
-          </a:p>
-        </p:txBody>
-      </p:sp>
-      <p:sp>
-        <p:nvSpPr>
-          <p:cNvPr id="3" name="TextBox 2"/>
-          <p:cNvSpPr txBox="1"/>
-          <p:nvPr/>
-        </p:nvSpPr>
-        <p:spPr>
-          <a:xfrm>
-            <a:off x="640080" y="1005840"/>
-            <a:ext cx="10972800" cy="457200"/>
+              <a:t>Our approach</a:t>
+            </a:r>
+          </a:p>
+        </p:txBody>
+      </p:sp>
+      <p:sp>
+        <p:nvSpPr>
+          <p:cNvPr id="5" name="TextBox 4"/>
+          <p:cNvSpPr txBox="1"/>
+          <p:nvPr/>
+        </p:nvSpPr>
+        <p:spPr>
+          <a:xfrm>
+            <a:off x="1371600" y="960120"/>
+            <a:ext cx="10332720" cy="365760"/>
           </a:xfrm>
           <a:prstGeom prst="rect">
             <a:avLst/>
@@ -3773,27 +3855,140 @@
           <a:p>
             <a:pPr algn="l"/>
             <a:r>
-              <a:rPr sz="1500" b="0">
+              <a:rPr sz="1400" b="0">
                 <a:solidFill>
                   <a:srgbClr val="6B6B6B"/>
                 </a:solidFill>
                 <a:latin typeface="Calibri"/>
               </a:rPr>
-              <a:t>Which clinics do we contact today, and why? We turn 5 years of sales history into a daily ranked call list.</a:t>
-            </a:r>
-          </a:p>
-        </p:txBody>
-      </p:sp>
-      <p:sp>
-        <p:nvSpPr>
-          <p:cNvPr id="4" name="Rounded Rectangle 3"/>
+              <a:t>Central idea, why this method, and the advantage over alternatives</a:t>
+            </a:r>
+          </a:p>
+        </p:txBody>
+      </p:sp>
+      <p:sp>
+        <p:nvSpPr>
+          <p:cNvPr id="6" name="Rounded Rectangle 5"/>
           <p:cNvSpPr/>
           <p:nvPr/>
         </p:nvSpPr>
         <p:spPr>
           <a:xfrm>
-            <a:off x="640080" y="1828800"/>
-            <a:ext cx="5486400" cy="4297680"/>
+            <a:off x="548640" y="1508760"/>
+            <a:ext cx="11091672" cy="1463040"/>
+          </a:xfrm>
+          <a:prstGeom prst="roundRect">
+            <a:avLst/>
+          </a:prstGeom>
+          <a:solidFill>
+            <a:srgbClr val="1B2A4A"/>
+          </a:solidFill>
+          <a:ln>
+            <a:noFill/>
+          </a:ln>
+        </p:spPr>
+        <p:style>
+          <a:lnRef idx="1">
+            <a:schemeClr val="accent1"/>
+          </a:lnRef>
+          <a:fillRef idx="3">
+            <a:schemeClr val="accent1"/>
+          </a:fillRef>
+          <a:effectRef idx="2">
+            <a:schemeClr val="accent1"/>
+          </a:effectRef>
+          <a:fontRef idx="minor">
+            <a:schemeClr val="lt1"/>
+          </a:fontRef>
+        </p:style>
+        <p:txBody>
+          <a:bodyPr rtlCol="0" anchor="ctr"/>
+          <a:lstStyle/>
+          <a:p>
+            <a:pPr algn="ctr"/>
+          </a:p>
+        </p:txBody>
+      </p:sp>
+      <p:sp>
+        <p:nvSpPr>
+          <p:cNvPr id="7" name="TextBox 6"/>
+          <p:cNvSpPr txBox="1"/>
+          <p:nvPr/>
+        </p:nvSpPr>
+        <p:spPr>
+          <a:xfrm>
+            <a:off x="822960" y="1691640"/>
+            <a:ext cx="10607040" cy="365760"/>
+          </a:xfrm>
+          <a:prstGeom prst="rect">
+            <a:avLst/>
+          </a:prstGeom>
+          <a:noFill/>
+        </p:spPr>
+        <p:txBody>
+          <a:bodyPr wrap="square" lIns="0" rIns="0" tIns="0" bIns="0" anchor="t">
+            <a:spAutoFit/>
+          </a:bodyPr>
+          <a:lstStyle/>
+          <a:p>
+            <a:pPr algn="l"/>
+            <a:r>
+              <a:rPr sz="1100" b="1">
+                <a:solidFill>
+                  <a:srgbClr val="C9D4E3"/>
+                </a:solidFill>
+                <a:latin typeface="Calibri"/>
+              </a:rPr>
+              <a:t>CENTRAL IDEA</a:t>
+            </a:r>
+          </a:p>
+        </p:txBody>
+      </p:sp>
+      <p:sp>
+        <p:nvSpPr>
+          <p:cNvPr id="8" name="TextBox 7"/>
+          <p:cNvSpPr txBox="1"/>
+          <p:nvPr/>
+        </p:nvSpPr>
+        <p:spPr>
+          <a:xfrm>
+            <a:off x="822960" y="2011680"/>
+            <a:ext cx="10607040" cy="914400"/>
+          </a:xfrm>
+          <a:prstGeom prst="rect">
+            <a:avLst/>
+          </a:prstGeom>
+          <a:noFill/>
+        </p:spPr>
+        <p:txBody>
+          <a:bodyPr wrap="square" lIns="0" rIns="0" tIns="0" bIns="0" anchor="t">
+            <a:spAutoFit/>
+          </a:bodyPr>
+          <a:lstStyle/>
+          <a:p>
+            <a:pPr algn="l"/>
+            <a:r>
+              <a:rPr sz="1800" b="1">
+                <a:solidFill>
+                  <a:srgbClr val="FFFFFF"/>
+                </a:solidFill>
+                <a:latin typeface="Calibri"/>
+              </a:rPr>
+              <a:t>Turn 5 years of Inibsa's sales history into a daily ranked call list — every clinic that needs attention today, with a clear reason and a recommended action.</a:t>
+            </a:r>
+          </a:p>
+        </p:txBody>
+      </p:sp>
+      <p:sp>
+        <p:nvSpPr>
+          <p:cNvPr id="9" name="Rounded Rectangle 8"/>
+          <p:cNvSpPr/>
+          <p:nvPr/>
+        </p:nvSpPr>
+        <p:spPr>
+          <a:xfrm>
+            <a:off x="548640" y="3246120"/>
+            <a:ext cx="5440680" cy="3108960"/>
           </a:xfrm>
           <a:prstGeom prst="roundRect">
             <a:avLst/>
@@ -3829,13 +4024,13 @@
       </p:sp>
       <p:sp>
         <p:nvSpPr>
-          <p:cNvPr id="5" name="TextBox 4"/>
-          <p:cNvSpPr txBox="1"/>
-          <p:nvPr/>
-        </p:nvSpPr>
-        <p:spPr>
-          <a:xfrm>
-            <a:off x="914400" y="2011680"/>
+          <p:cNvPr id="10" name="TextBox 9"/>
+          <p:cNvSpPr txBox="1"/>
+          <p:nvPr/>
+        </p:nvSpPr>
+        <p:spPr>
+          <a:xfrm>
+            <a:off x="822960" y="3429000"/>
             <a:ext cx="5029200" cy="365760"/>
           </a:xfrm>
           <a:prstGeom prst="rect">
@@ -3857,91 +4052,21 @@
                 </a:solidFill>
                 <a:latin typeface="Calibri"/>
               </a:rPr>
-              <a:t>COMMODITIES</a:t>
-            </a:r>
-          </a:p>
-        </p:txBody>
-      </p:sp>
-      <p:sp>
-        <p:nvSpPr>
-          <p:cNvPr id="6" name="TextBox 5"/>
-          <p:cNvSpPr txBox="1"/>
-          <p:nvPr/>
-        </p:nvSpPr>
-        <p:spPr>
-          <a:xfrm>
-            <a:off x="914400" y="2331720"/>
-            <a:ext cx="5029200" cy="548640"/>
-          </a:xfrm>
-          <a:prstGeom prst="rect">
-            <a:avLst/>
-          </a:prstGeom>
-          <a:noFill/>
-        </p:spPr>
-        <p:txBody>
-          <a:bodyPr wrap="square" lIns="0" rIns="0" tIns="0" bIns="0" anchor="t">
-            <a:spAutoFit/>
-          </a:bodyPr>
-          <a:lstStyle/>
-          <a:p>
-            <a:pPr algn="l"/>
-            <a:r>
-              <a:rPr sz="2200" b="1">
-                <a:solidFill>
-                  <a:srgbClr val="1B2A4A"/>
-                </a:solidFill>
-                <a:latin typeface="Calibri"/>
-              </a:rPr>
-              <a:t>Anaesthesia · Biosecurity</a:t>
-            </a:r>
-          </a:p>
-        </p:txBody>
-      </p:sp>
-      <p:sp>
-        <p:nvSpPr>
-          <p:cNvPr id="7" name="TextBox 6"/>
-          <p:cNvSpPr txBox="1"/>
-          <p:nvPr/>
-        </p:nvSpPr>
-        <p:spPr>
-          <a:xfrm>
-            <a:off x="914400" y="2926080"/>
-            <a:ext cx="5029200" cy="365760"/>
-          </a:xfrm>
-          <a:prstGeom prst="rect">
-            <a:avLst/>
-          </a:prstGeom>
-          <a:noFill/>
-        </p:spPr>
-        <p:txBody>
-          <a:bodyPr wrap="square" lIns="0" rIns="0" tIns="0" bIns="0" anchor="t">
-            <a:spAutoFit/>
-          </a:bodyPr>
-          <a:lstStyle/>
-          <a:p>
-            <a:pPr algn="l"/>
-            <a:r>
-              <a:rPr sz="1300" b="0">
-                <a:solidFill>
-                  <a:srgbClr val="1A1A1A"/>
-                </a:solidFill>
-                <a:latin typeface="Calibri"/>
-              </a:rPr>
-              <a:t>Recurring purchases. Predictable consumption.</a:t>
-            </a:r>
-          </a:p>
-        </p:txBody>
-      </p:sp>
-      <p:sp>
-        <p:nvSpPr>
-          <p:cNvPr id="8" name="TextBox 7"/>
-          <p:cNvSpPr txBox="1"/>
-          <p:nvPr/>
-        </p:nvSpPr>
-        <p:spPr>
-          <a:xfrm>
-            <a:off x="914400" y="3383280"/>
-            <a:ext cx="5029200" cy="2468880"/>
+              <a:t>WHY HEURISTICS, NOT ML</a:t>
+            </a:r>
+          </a:p>
+        </p:txBody>
+      </p:sp>
+      <p:sp>
+        <p:nvSpPr>
+          <p:cNvPr id="11" name="TextBox 10"/>
+          <p:cNvSpPr txBox="1"/>
+          <p:nvPr/>
+        </p:nvSpPr>
+        <p:spPr>
+          <a:xfrm>
+            <a:off x="822960" y="3840480"/>
+            <a:ext cx="5029200" cy="2377440"/>
           </a:xfrm>
           <a:prstGeom prst="rect">
             <a:avLst/>
@@ -3960,7 +4085,7 @@
               </a:spcAft>
             </a:pPr>
             <a:r>
-              <a:rPr sz="1500" b="1">
+              <a:rPr sz="1400" b="1">
                 <a:solidFill>
                   <a:srgbClr val="2E6FA8"/>
                 </a:solidFill>
@@ -3969,13 +4094,13 @@
               <a:t>•  </a:t>
             </a:r>
             <a:r>
-              <a:rPr sz="1300">
+              <a:rPr sz="1200">
                 <a:solidFill>
                   <a:srgbClr val="1A1A1A"/>
                 </a:solidFill>
                 <a:latin typeface="Calibri"/>
               </a:rPr>
-              <a:t>Compare each clinic to its purchase potential</a:t>
+              <a:t>Brief explicitly says “the key is analytical and commercial utility, not technical sophistication.”</a:t>
             </a:r>
           </a:p>
           <a:p>
@@ -3985,7 +4110,7 @@
               </a:spcAft>
             </a:pPr>
             <a:r>
-              <a:rPr sz="1500" b="1">
+              <a:rPr sz="1400" b="1">
                 <a:solidFill>
                   <a:srgbClr val="2E6FA8"/>
                 </a:solidFill>
@@ -3994,13 +4119,13 @@
               <a:t>•  </a:t>
             </a:r>
             <a:r>
-              <a:rPr sz="1300">
+              <a:rPr sz="1200">
                 <a:solidFill>
                   <a:srgbClr val="1A1A1A"/>
                 </a:solidFill>
                 <a:latin typeface="Calibri"/>
               </a:rPr>
-              <a:t>Loyal · Promiscuous · Marginal · Lost</a:t>
+              <a:t>ML needs labelled outcomes — we don't have them yet, only mocked.</a:t>
             </a:r>
           </a:p>
           <a:p>
@@ -4010,7 +4135,7 @@
               </a:spcAft>
             </a:pPr>
             <a:r>
-              <a:rPr sz="1500" b="1">
+              <a:rPr sz="1400" b="1">
                 <a:solidFill>
                   <a:srgbClr val="2E6FA8"/>
                 </a:solidFill>
@@ -4019,33 +4144,33 @@
               <a:t>•  </a:t>
             </a:r>
             <a:r>
-              <a:rPr sz="1300">
+              <a:rPr sz="1200">
                 <a:solidFill>
                   <a:srgbClr val="1A1A1A"/>
                 </a:solidFill>
                 <a:latin typeface="Calibri"/>
               </a:rPr>
-              <a:t>Realistic capture impact (30-50% growth)</a:t>
-            </a:r>
-          </a:p>
-        </p:txBody>
-      </p:sp>
-      <p:sp>
-        <p:nvSpPr>
-          <p:cNvPr id="9" name="Rounded Rectangle 8"/>
+              <a:t>Rules are tunable later via the feedback loop, when real outcomes accumulate.</a:t>
+            </a:r>
+          </a:p>
+        </p:txBody>
+      </p:sp>
+      <p:sp>
+        <p:nvSpPr>
+          <p:cNvPr id="12" name="Rounded Rectangle 11"/>
           <p:cNvSpPr/>
           <p:nvPr/>
         </p:nvSpPr>
         <p:spPr>
           <a:xfrm>
-            <a:off x="6263640" y="1828800"/>
-            <a:ext cx="5486400" cy="4297680"/>
+            <a:off x="6199632" y="3246120"/>
+            <a:ext cx="5440680" cy="3108960"/>
           </a:xfrm>
           <a:prstGeom prst="roundRect">
             <a:avLst/>
           </a:prstGeom>
           <a:solidFill>
-            <a:srgbClr val="1B2A4A"/>
+            <a:srgbClr val="F4F6FA"/>
           </a:solidFill>
           <a:ln>
             <a:noFill/>
@@ -4075,13 +4200,13 @@
       </p:sp>
       <p:sp>
         <p:nvSpPr>
-          <p:cNvPr id="10" name="TextBox 9"/>
-          <p:cNvSpPr txBox="1"/>
-          <p:nvPr/>
-        </p:nvSpPr>
-        <p:spPr>
-          <a:xfrm>
-            <a:off x="6537960" y="2011680"/>
+          <p:cNvPr id="13" name="TextBox 12"/>
+          <p:cNvSpPr txBox="1"/>
+          <p:nvPr/>
+        </p:nvSpPr>
+        <p:spPr>
+          <a:xfrm>
+            <a:off x="6473952" y="3429000"/>
             <a:ext cx="5029200" cy="365760"/>
           </a:xfrm>
           <a:prstGeom prst="rect">
@@ -4099,95 +4224,25 @@
             <a:r>
               <a:rPr sz="1100" b="1">
                 <a:solidFill>
-                  <a:srgbClr val="C9D4E3"/>
-                </a:solidFill>
-                <a:latin typeface="Calibri"/>
-              </a:rPr>
-              <a:t>TECHNICAL PRODUCTS</a:t>
-            </a:r>
-          </a:p>
-        </p:txBody>
-      </p:sp>
-      <p:sp>
-        <p:nvSpPr>
-          <p:cNvPr id="11" name="TextBox 10"/>
-          <p:cNvSpPr txBox="1"/>
-          <p:nvPr/>
-        </p:nvSpPr>
-        <p:spPr>
-          <a:xfrm>
-            <a:off x="6537960" y="2331720"/>
-            <a:ext cx="5029200" cy="548640"/>
-          </a:xfrm>
-          <a:prstGeom prst="rect">
-            <a:avLst/>
-          </a:prstGeom>
-          <a:noFill/>
-        </p:spPr>
-        <p:txBody>
-          <a:bodyPr wrap="square" lIns="0" rIns="0" tIns="0" bIns="0" anchor="t">
-            <a:spAutoFit/>
-          </a:bodyPr>
-          <a:lstStyle/>
-          <a:p>
-            <a:pPr algn="l"/>
-            <a:r>
-              <a:rPr sz="2200" b="1">
-                <a:solidFill>
-                  <a:srgbClr val="FFFFFF"/>
-                </a:solidFill>
-                <a:latin typeface="Calibri"/>
-              </a:rPr>
-              <a:t>Biomaterials</a:t>
-            </a:r>
-          </a:p>
-        </p:txBody>
-      </p:sp>
-      <p:sp>
-        <p:nvSpPr>
-          <p:cNvPr id="12" name="TextBox 11"/>
-          <p:cNvSpPr txBox="1"/>
-          <p:nvPr/>
-        </p:nvSpPr>
-        <p:spPr>
-          <a:xfrm>
-            <a:off x="6537960" y="2926080"/>
-            <a:ext cx="5029200" cy="365760"/>
-          </a:xfrm>
-          <a:prstGeom prst="rect">
-            <a:avLst/>
-          </a:prstGeom>
-          <a:noFill/>
-        </p:spPr>
-        <p:txBody>
-          <a:bodyPr wrap="square" lIns="0" rIns="0" tIns="0" bIns="0" anchor="t">
-            <a:spAutoFit/>
-          </a:bodyPr>
-          <a:lstStyle/>
-          <a:p>
-            <a:pPr algn="l"/>
-            <a:r>
-              <a:rPr sz="1300" b="0">
-                <a:solidFill>
-                  <a:srgbClr val="FFFFFF"/>
-                </a:solidFill>
-                <a:latin typeface="Calibri"/>
-              </a:rPr>
-              <a:t>Sporadic purchases. Case-driven demand.</a:t>
-            </a:r>
-          </a:p>
-        </p:txBody>
-      </p:sp>
-      <p:sp>
-        <p:nvSpPr>
-          <p:cNvPr id="13" name="TextBox 12"/>
-          <p:cNvSpPr txBox="1"/>
-          <p:nvPr/>
-        </p:nvSpPr>
-        <p:spPr>
-          <a:xfrm>
-            <a:off x="6537960" y="3383280"/>
-            <a:ext cx="5029200" cy="2468880"/>
+                  <a:srgbClr val="2E6FA8"/>
+                </a:solidFill>
+                <a:latin typeface="Calibri"/>
+              </a:rPr>
+              <a:t>OUR ADVANTAGE</a:t>
+            </a:r>
+          </a:p>
+        </p:txBody>
+      </p:sp>
+      <p:sp>
+        <p:nvSpPr>
+          <p:cNvPr id="14" name="TextBox 13"/>
+          <p:cNvSpPr txBox="1"/>
+          <p:nvPr/>
+        </p:nvSpPr>
+        <p:spPr>
+          <a:xfrm>
+            <a:off x="6473952" y="3840480"/>
+            <a:ext cx="5029200" cy="2377440"/>
           </a:xfrm>
           <a:prstGeom prst="rect">
             <a:avLst/>
@@ -4206,22 +4261,22 @@
               </a:spcAft>
             </a:pPr>
             <a:r>
-              <a:rPr sz="1500" b="1">
-                <a:solidFill>
-                  <a:srgbClr val="C9D4E3"/>
+              <a:rPr sz="1400" b="1">
+                <a:solidFill>
+                  <a:srgbClr val="2E6FA8"/>
                 </a:solidFill>
                 <a:latin typeface="Calibri"/>
               </a:rPr>
               <a:t>•  </a:t>
             </a:r>
             <a:r>
-              <a:rPr sz="1300">
-                <a:solidFill>
-                  <a:srgbClr val="FFFFFF"/>
-                </a:solidFill>
-                <a:latin typeface="Calibri"/>
-              </a:rPr>
-              <a:t>Compare each clinic to its OWN history</a:t>
+              <a:rPr sz="1200">
+                <a:solidFill>
+                  <a:srgbClr val="1A1A1A"/>
+                </a:solidFill>
+                <a:latin typeface="Calibri"/>
+              </a:rPr>
+              <a:t>Explainable: every alert traces to its raw inputs. Sales reps and judges can audit.</a:t>
             </a:r>
           </a:p>
           <a:p>
@@ -4231,22 +4286,22 @@
               </a:spcAft>
             </a:pPr>
             <a:r>
-              <a:rPr sz="1500" b="1">
-                <a:solidFill>
-                  <a:srgbClr val="C9D4E3"/>
+              <a:rPr sz="1400" b="1">
+                <a:solidFill>
+                  <a:srgbClr val="2E6FA8"/>
                 </a:solidFill>
                 <a:latin typeface="Calibri"/>
               </a:rPr>
               <a:t>•  </a:t>
             </a:r>
             <a:r>
-              <a:rPr sz="1300">
-                <a:solidFill>
-                  <a:srgbClr val="FFFFFF"/>
-                </a:solidFill>
-                <a:latin typeface="Calibri"/>
-              </a:rPr>
-              <a:t>Year-over-year baseline (neutralises August)</a:t>
+              <a:rPr sz="1200">
+                <a:solidFill>
+                  <a:srgbClr val="1A1A1A"/>
+                </a:solidFill>
+                <a:latin typeface="Calibri"/>
+              </a:rPr>
+              <a:t>Defensible: every threshold is anchored to either an observation or a brief requirement.</a:t>
             </a:r>
           </a:p>
           <a:p>
@@ -4256,57 +4311,22 @@
               </a:spcAft>
             </a:pPr>
             <a:r>
-              <a:rPr sz="1500" b="1">
-                <a:solidFill>
-                  <a:srgbClr val="C9D4E3"/>
+              <a:rPr sz="1400" b="1">
+                <a:solidFill>
+                  <a:srgbClr val="2E6FA8"/>
                 </a:solidFill>
                 <a:latin typeface="Calibri"/>
               </a:rPr>
               <a:t>•  </a:t>
             </a:r>
             <a:r>
-              <a:rPr sz="1300">
-                <a:solidFill>
-                  <a:srgbClr val="FFFFFF"/>
-                </a:solidFill>
-                <a:latin typeface="Calibri"/>
-              </a:rPr>
-              <a:t>Frequency drop · Volume drop · Absence · Anomaly</a:t>
-            </a:r>
-          </a:p>
-        </p:txBody>
-      </p:sp>
-      <p:sp>
-        <p:nvSpPr>
-          <p:cNvPr id="14" name="TextBox 13"/>
-          <p:cNvSpPr txBox="1"/>
-          <p:nvPr/>
-        </p:nvSpPr>
-        <p:spPr>
-          <a:xfrm>
-            <a:off x="640080" y="6263640"/>
-            <a:ext cx="10972800" cy="365760"/>
-          </a:xfrm>
-          <a:prstGeom prst="rect">
-            <a:avLst/>
-          </a:prstGeom>
-          <a:noFill/>
-        </p:spPr>
-        <p:txBody>
-          <a:bodyPr wrap="square" lIns="0" rIns="0" tIns="0" bIns="0" anchor="t">
-            <a:spAutoFit/>
-          </a:bodyPr>
-          <a:lstStyle/>
-          <a:p>
-            <a:pPr algn="ctr"/>
-            <a:r>
-              <a:rPr sz="1300" b="1">
-                <a:solidFill>
-                  <a:srgbClr val="1B2A4A"/>
-                </a:solidFill>
-                <a:latin typeface="Calibri"/>
-              </a:rPr>
-              <a:t>Output: ranked daily alerts with reason, urgency, channel, and full traceability.</a:t>
+              <a:rPr sz="1200">
+                <a:solidFill>
+                  <a:srgbClr val="1A1A1A"/>
+                </a:solidFill>
+                <a:latin typeface="Calibri"/>
+              </a:rPr>
+              <a:t>Fast: 5 seconds for 6,000 clients. Daily idempotent. Linear scaling.</a:t>
             </a:r>
           </a:p>
         </p:txBody>
@@ -4331,14 +4351,92 @@
       <p:grpSpPr/>
       <p:sp>
         <p:nvSpPr>
-          <p:cNvPr id="2" name="TextBox 1"/>
-          <p:cNvSpPr txBox="1"/>
-          <p:nvPr/>
-        </p:nvSpPr>
-        <p:spPr>
-          <a:xfrm>
-            <a:off x="640080" y="411480"/>
-            <a:ext cx="10972800" cy="640080"/>
+          <p:cNvPr id="2" name="Oval 1"/>
+          <p:cNvSpPr/>
+          <p:nvPr/>
+        </p:nvSpPr>
+        <p:spPr>
+          <a:xfrm>
+            <a:off x="548640" y="457200"/>
+            <a:ext cx="640080" cy="640080"/>
+          </a:xfrm>
+          <a:prstGeom prst="ellipse">
+            <a:avLst/>
+          </a:prstGeom>
+          <a:solidFill>
+            <a:srgbClr val="2E6FA8"/>
+          </a:solidFill>
+          <a:ln>
+            <a:noFill/>
+          </a:ln>
+        </p:spPr>
+        <p:style>
+          <a:lnRef idx="1">
+            <a:schemeClr val="accent1"/>
+          </a:lnRef>
+          <a:fillRef idx="3">
+            <a:schemeClr val="accent1"/>
+          </a:fillRef>
+          <a:effectRef idx="2">
+            <a:schemeClr val="accent1"/>
+          </a:effectRef>
+          <a:fontRef idx="minor">
+            <a:schemeClr val="lt1"/>
+          </a:fontRef>
+        </p:style>
+        <p:txBody>
+          <a:bodyPr rtlCol="0" anchor="ctr"/>
+          <a:lstStyle/>
+          <a:p>
+            <a:pPr algn="ctr"/>
+          </a:p>
+        </p:txBody>
+      </p:sp>
+      <p:sp>
+        <p:nvSpPr>
+          <p:cNvPr id="3" name="TextBox 2"/>
+          <p:cNvSpPr txBox="1"/>
+          <p:nvPr/>
+        </p:nvSpPr>
+        <p:spPr>
+          <a:xfrm>
+            <a:off x="548640" y="502920"/>
+            <a:ext cx="640080" cy="548640"/>
+          </a:xfrm>
+          <a:prstGeom prst="rect">
+            <a:avLst/>
+          </a:prstGeom>
+          <a:noFill/>
+        </p:spPr>
+        <p:txBody>
+          <a:bodyPr wrap="square" lIns="0" rIns="0" tIns="0" bIns="0" anchor="t">
+            <a:spAutoFit/>
+          </a:bodyPr>
+          <a:lstStyle/>
+          <a:p>
+            <a:pPr algn="ctr"/>
+            <a:r>
+              <a:rPr sz="2000" b="1">
+                <a:solidFill>
+                  <a:srgbClr val="FFFFFF"/>
+                </a:solidFill>
+                <a:latin typeface="Calibri"/>
+              </a:rPr>
+              <a:t>02</a:t>
+            </a:r>
+          </a:p>
+        </p:txBody>
+      </p:sp>
+      <p:sp>
+        <p:nvSpPr>
+          <p:cNvPr id="4" name="TextBox 3"/>
+          <p:cNvSpPr txBox="1"/>
+          <p:nvPr/>
+        </p:nvSpPr>
+        <p:spPr>
+          <a:xfrm>
+            <a:off x="1371600" y="411480"/>
+            <a:ext cx="10332720" cy="640080"/>
           </a:xfrm>
           <a:prstGeom prst="rect">
             <a:avLst/>
@@ -4353,27 +4451,27 @@
           <a:p>
             <a:pPr algn="l"/>
             <a:r>
-              <a:rPr sz="3000" b="1">
+              <a:rPr sz="2800" b="1">
                 <a:solidFill>
                   <a:srgbClr val="1B2A4A"/>
                 </a:solidFill>
                 <a:latin typeface="Calibri"/>
               </a:rPr>
-              <a:t>Heuristic design — 8 cases, no black box</a:t>
-            </a:r>
-          </a:p>
-        </p:txBody>
-      </p:sp>
-      <p:sp>
-        <p:nvSpPr>
-          <p:cNvPr id="3" name="TextBox 2"/>
-          <p:cNvSpPr txBox="1"/>
-          <p:nvPr/>
-        </p:nvSpPr>
-        <p:spPr>
-          <a:xfrm>
-            <a:off x="640080" y="1005840"/>
-            <a:ext cx="10972800" cy="457200"/>
+              <a:t>Analytical logic</a:t>
+            </a:r>
+          </a:p>
+        </p:txBody>
+      </p:sp>
+      <p:sp>
+        <p:nvSpPr>
+          <p:cNvPr id="5" name="TextBox 4"/>
+          <p:cNvSpPr txBox="1"/>
+          <p:nvPr/>
+        </p:nvSpPr>
+        <p:spPr>
+          <a:xfrm>
+            <a:off x="1371600" y="960120"/>
+            <a:ext cx="10332720" cy="365760"/>
           </a:xfrm>
           <a:prstGeom prst="rect">
             <a:avLst/>
@@ -4394,21 +4492,21 @@
                 </a:solidFill>
                 <a:latin typeface="Calibri"/>
               </a:rPr>
-              <a:t>Every rule is anchored to either an observation in the data or a requirement in the brief.</a:t>
-            </a:r>
-          </a:p>
-        </p:txBody>
-      </p:sp>
-      <p:sp>
-        <p:nvSpPr>
-          <p:cNvPr id="4" name="Rounded Rectangle 3"/>
+              <a:t>Two parallel logics · signals per case · noise filtering · priority scoring</a:t>
+            </a:r>
+          </a:p>
+        </p:txBody>
+      </p:sp>
+      <p:sp>
+        <p:nvSpPr>
+          <p:cNvPr id="6" name="Rounded Rectangle 5"/>
           <p:cNvSpPr/>
           <p:nvPr/>
         </p:nvSpPr>
         <p:spPr>
           <a:xfrm>
-            <a:off x="640080" y="1783080"/>
-            <a:ext cx="2603754" cy="1920240"/>
+            <a:off x="548640" y="1508760"/>
+            <a:ext cx="5440680" cy="2377440"/>
           </a:xfrm>
           <a:prstGeom prst="roundRect">
             <a:avLst/>
@@ -4444,14 +4542,14 @@
       </p:sp>
       <p:sp>
         <p:nvSpPr>
-          <p:cNvPr id="5" name="TextBox 4"/>
-          <p:cNvSpPr txBox="1"/>
-          <p:nvPr/>
-        </p:nvSpPr>
-        <p:spPr>
-          <a:xfrm>
-            <a:off x="804672" y="1911096"/>
-            <a:ext cx="2274570" cy="365760"/>
+          <p:cNvPr id="7" name="TextBox 6"/>
+          <p:cNvSpPr txBox="1"/>
+          <p:nvPr/>
+        </p:nvSpPr>
+        <p:spPr>
+          <a:xfrm>
+            <a:off x="822960" y="1645920"/>
+            <a:ext cx="5029200" cy="365760"/>
           </a:xfrm>
           <a:prstGeom prst="rect">
             <a:avLst/>
@@ -4466,27 +4564,203 @@
           <a:p>
             <a:pPr algn="l"/>
             <a:r>
-              <a:rPr sz="1200" b="1">
+              <a:rPr sz="1100" b="1">
+                <a:solidFill>
+                  <a:srgbClr val="2E6FA8"/>
+                </a:solidFill>
+                <a:latin typeface="Calibri"/>
+              </a:rPr>
+              <a:t>COMMODITIES — anaesthesia · biosecurity</a:t>
+            </a:r>
+          </a:p>
+        </p:txBody>
+      </p:sp>
+      <p:sp>
+        <p:nvSpPr>
+          <p:cNvPr id="8" name="TextBox 7"/>
+          <p:cNvSpPr txBox="1"/>
+          <p:nvPr/>
+        </p:nvSpPr>
+        <p:spPr>
+          <a:xfrm>
+            <a:off x="822960" y="2011680"/>
+            <a:ext cx="5029200" cy="457200"/>
+          </a:xfrm>
+          <a:prstGeom prst="rect">
+            <a:avLst/>
+          </a:prstGeom>
+          <a:noFill/>
+        </p:spPr>
+        <p:txBody>
+          <a:bodyPr wrap="square" lIns="0" rIns="0" tIns="0" bIns="0" anchor="t">
+            <a:spAutoFit/>
+          </a:bodyPr>
+          <a:lstStyle/>
+          <a:p>
+            <a:pPr algn="l"/>
+            <a:r>
+              <a:rPr sz="1400" b="1">
                 <a:solidFill>
                   <a:srgbClr val="1B2A4A"/>
                 </a:solidFill>
                 <a:latin typeface="Calibri"/>
               </a:rPr>
-              <a:t>01  Two-track logic</a:t>
-            </a:r>
-          </a:p>
-        </p:txBody>
-      </p:sp>
-      <p:sp>
-        <p:nvSpPr>
-          <p:cNvPr id="6" name="TextBox 5"/>
-          <p:cNvSpPr txBox="1"/>
-          <p:nvPr/>
-        </p:nvSpPr>
-        <p:spPr>
-          <a:xfrm>
-            <a:off x="804672" y="2286000"/>
-            <a:ext cx="2274570" cy="914400"/>
+              <a:t>Recurring purchases · share-of-potential rule</a:t>
+            </a:r>
+          </a:p>
+        </p:txBody>
+      </p:sp>
+      <p:sp>
+        <p:nvSpPr>
+          <p:cNvPr id="9" name="TextBox 8"/>
+          <p:cNvSpPr txBox="1"/>
+          <p:nvPr/>
+        </p:nvSpPr>
+        <p:spPr>
+          <a:xfrm>
+            <a:off x="822960" y="2468880"/>
+            <a:ext cx="5029200" cy="1371600"/>
+          </a:xfrm>
+          <a:prstGeom prst="rect">
+            <a:avLst/>
+          </a:prstGeom>
+          <a:noFill/>
+        </p:spPr>
+        <p:txBody>
+          <a:bodyPr wrap="square" lIns="0" rIns="0">
+            <a:spAutoFit/>
+          </a:bodyPr>
+          <a:lstStyle/>
+          <a:p>
+            <a:pPr algn="l">
+              <a:spcAft>
+                <a:spcPts val="400"/>
+              </a:spcAft>
+            </a:pPr>
+            <a:r>
+              <a:rPr sz="1300" b="1">
+                <a:solidFill>
+                  <a:srgbClr val="2E6FA8"/>
+                </a:solidFill>
+                <a:latin typeface="Calibri"/>
+              </a:rPr>
+              <a:t>•  </a:t>
+            </a:r>
+            <a:r>
+              <a:rPr sz="1100">
+                <a:solidFill>
+                  <a:srgbClr val="1A1A1A"/>
+                </a:solidFill>
+                <a:latin typeface="Calibri"/>
+              </a:rPr>
+              <a:t>Loyal ≥30%, Promiscuous 5-30%, Marginal &lt;5%</a:t>
+            </a:r>
+          </a:p>
+          <a:p>
+            <a:pPr algn="l">
+              <a:spcAft>
+                <a:spcPts val="400"/>
+              </a:spcAft>
+            </a:pPr>
+            <a:r>
+              <a:rPr sz="1300" b="1">
+                <a:solidFill>
+                  <a:srgbClr val="2E6FA8"/>
+                </a:solidFill>
+                <a:latin typeface="Calibri"/>
+              </a:rPr>
+              <a:t>•  </a:t>
+            </a:r>
+            <a:r>
+              <a:rPr sz="1100">
+                <a:solidFill>
+                  <a:srgbClr val="1A1A1A"/>
+                </a:solidFill>
+                <a:latin typeface="Calibri"/>
+              </a:rPr>
+              <a:t>Lost: &gt;270d silent + cyclic-client filter</a:t>
+            </a:r>
+          </a:p>
+          <a:p>
+            <a:pPr algn="l">
+              <a:spcAft>
+                <a:spcPts val="400"/>
+              </a:spcAft>
+            </a:pPr>
+            <a:r>
+              <a:rPr sz="1300" b="1">
+                <a:solidFill>
+                  <a:srgbClr val="2E6FA8"/>
+                </a:solidFill>
+                <a:latin typeface="Calibri"/>
+              </a:rPr>
+              <a:t>•  </a:t>
+            </a:r>
+            <a:r>
+              <a:rPr sz="1100">
+                <a:solidFill>
+                  <a:srgbClr val="1A1A1A"/>
+                </a:solidFill>
+                <a:latin typeface="Calibri"/>
+              </a:rPr>
+              <a:t>Trend: 6m current vs prior period</a:t>
+            </a:r>
+          </a:p>
+        </p:txBody>
+      </p:sp>
+      <p:sp>
+        <p:nvSpPr>
+          <p:cNvPr id="10" name="Rounded Rectangle 9"/>
+          <p:cNvSpPr/>
+          <p:nvPr/>
+        </p:nvSpPr>
+        <p:spPr>
+          <a:xfrm>
+            <a:off x="6199632" y="1508760"/>
+            <a:ext cx="5440680" cy="2377440"/>
+          </a:xfrm>
+          <a:prstGeom prst="roundRect">
+            <a:avLst/>
+          </a:prstGeom>
+          <a:solidFill>
+            <a:srgbClr val="1B2A4A"/>
+          </a:solidFill>
+          <a:ln>
+            <a:noFill/>
+          </a:ln>
+        </p:spPr>
+        <p:style>
+          <a:lnRef idx="1">
+            <a:schemeClr val="accent1"/>
+          </a:lnRef>
+          <a:fillRef idx="3">
+            <a:schemeClr val="accent1"/>
+          </a:fillRef>
+          <a:effectRef idx="2">
+            <a:schemeClr val="accent1"/>
+          </a:effectRef>
+          <a:fontRef idx="minor">
+            <a:schemeClr val="lt1"/>
+          </a:fontRef>
+        </p:style>
+        <p:txBody>
+          <a:bodyPr rtlCol="0" anchor="ctr"/>
+          <a:lstStyle/>
+          <a:p>
+            <a:pPr algn="ctr"/>
+          </a:p>
+        </p:txBody>
+      </p:sp>
+      <p:sp>
+        <p:nvSpPr>
+          <p:cNvPr id="11" name="TextBox 10"/>
+          <p:cNvSpPr txBox="1"/>
+          <p:nvPr/>
+        </p:nvSpPr>
+        <p:spPr>
+          <a:xfrm>
+            <a:off x="6473952" y="1645920"/>
+            <a:ext cx="5029200" cy="365760"/>
           </a:xfrm>
           <a:prstGeom prst="rect">
             <a:avLst/>
@@ -4501,27 +4775,27 @@
           <a:p>
             <a:pPr algn="l"/>
             <a:r>
-              <a:rPr sz="1000" b="0">
-                <a:solidFill>
-                  <a:srgbClr val="1A1A1A"/>
-                </a:solidFill>
-                <a:latin typeface="Calibri"/>
-              </a:rPr>
-              <a:t>Commodities (predictable) and technical (sporadic) get separate rules.</a:t>
-            </a:r>
-          </a:p>
-        </p:txBody>
-      </p:sp>
-      <p:sp>
-        <p:nvSpPr>
-          <p:cNvPr id="7" name="TextBox 6"/>
-          <p:cNvSpPr txBox="1"/>
-          <p:nvPr/>
-        </p:nvSpPr>
-        <p:spPr>
-          <a:xfrm>
-            <a:off x="804672" y="3337560"/>
-            <a:ext cx="2274570" cy="274320"/>
+              <a:rPr sz="1100" b="1">
+                <a:solidFill>
+                  <a:srgbClr val="C9D4E3"/>
+                </a:solidFill>
+                <a:latin typeface="Calibri"/>
+              </a:rPr>
+              <a:t>TECHNICAL — biomaterials</a:t>
+            </a:r>
+          </a:p>
+        </p:txBody>
+      </p:sp>
+      <p:sp>
+        <p:nvSpPr>
+          <p:cNvPr id="12" name="TextBox 11"/>
+          <p:cNvSpPr txBox="1"/>
+          <p:nvPr/>
+        </p:nvSpPr>
+        <p:spPr>
+          <a:xfrm>
+            <a:off x="6473952" y="2011680"/>
+            <a:ext cx="5029200" cy="457200"/>
           </a:xfrm>
           <a:prstGeom prst="rect">
             <a:avLst/>
@@ -4536,27 +4810,125 @@
           <a:p>
             <a:pPr algn="l"/>
             <a:r>
-              <a:rPr sz="900" b="1">
-                <a:solidFill>
-                  <a:srgbClr val="2E6FA8"/>
-                </a:solidFill>
-                <a:latin typeface="Calibri"/>
-              </a:rPr>
-              <a:t>→  Brief requirement</a:t>
-            </a:r>
-          </a:p>
-        </p:txBody>
-      </p:sp>
-      <p:sp>
-        <p:nvSpPr>
-          <p:cNvPr id="8" name="Rounded Rectangle 7"/>
+              <a:rPr sz="1400" b="1">
+                <a:solidFill>
+                  <a:srgbClr val="FFFFFF"/>
+                </a:solidFill>
+                <a:latin typeface="Calibri"/>
+              </a:rPr>
+              <a:t>Sporadic purchases · individual baseline + YoY</a:t>
+            </a:r>
+          </a:p>
+        </p:txBody>
+      </p:sp>
+      <p:sp>
+        <p:nvSpPr>
+          <p:cNvPr id="13" name="TextBox 12"/>
+          <p:cNvSpPr txBox="1"/>
+          <p:nvPr/>
+        </p:nvSpPr>
+        <p:spPr>
+          <a:xfrm>
+            <a:off x="6473952" y="2468880"/>
+            <a:ext cx="5029200" cy="1371600"/>
+          </a:xfrm>
+          <a:prstGeom prst="rect">
+            <a:avLst/>
+          </a:prstGeom>
+          <a:noFill/>
+        </p:spPr>
+        <p:txBody>
+          <a:bodyPr wrap="square" lIns="0" rIns="0">
+            <a:spAutoFit/>
+          </a:bodyPr>
+          <a:lstStyle/>
+          <a:p>
+            <a:pPr algn="l">
+              <a:spcAft>
+                <a:spcPts val="400"/>
+              </a:spcAft>
+            </a:pPr>
+            <a:r>
+              <a:rPr sz="1300" b="1">
+                <a:solidFill>
+                  <a:srgbClr val="C9D4E3"/>
+                </a:solidFill>
+                <a:latin typeface="Calibri"/>
+              </a:rPr>
+              <a:t>•  </a:t>
+            </a:r>
+            <a:r>
+              <a:rPr sz="1100">
+                <a:solidFill>
+                  <a:srgbClr val="FFFFFF"/>
+                </a:solidFill>
+                <a:latin typeface="Calibri"/>
+              </a:rPr>
+              <a:t>Compare to client's OWN past pattern</a:t>
+            </a:r>
+          </a:p>
+          <a:p>
+            <a:pPr algn="l">
+              <a:spcAft>
+                <a:spcPts val="400"/>
+              </a:spcAft>
+            </a:pPr>
+            <a:r>
+              <a:rPr sz="1300" b="1">
+                <a:solidFill>
+                  <a:srgbClr val="C9D4E3"/>
+                </a:solidFill>
+                <a:latin typeface="Calibri"/>
+              </a:rPr>
+              <a:t>•  </a:t>
+            </a:r>
+            <a:r>
+              <a:rPr sz="1100">
+                <a:solidFill>
+                  <a:srgbClr val="FFFFFF"/>
+                </a:solidFill>
+                <a:latin typeface="Calibri"/>
+              </a:rPr>
+              <a:t>4 signals: absent · drop_freq · drop_volume · anomaly</a:t>
+            </a:r>
+          </a:p>
+          <a:p>
+            <a:pPr algn="l">
+              <a:spcAft>
+                <a:spcPts val="400"/>
+              </a:spcAft>
+            </a:pPr>
+            <a:r>
+              <a:rPr sz="1300" b="1">
+                <a:solidFill>
+                  <a:srgbClr val="C9D4E3"/>
+                </a:solidFill>
+                <a:latin typeface="Calibri"/>
+              </a:rPr>
+              <a:t>•  </a:t>
+            </a:r>
+            <a:r>
+              <a:rPr sz="1100">
+                <a:solidFill>
+                  <a:srgbClr val="FFFFFF"/>
+                </a:solidFill>
+                <a:latin typeface="Calibri"/>
+              </a:rPr>
+              <a:t>Year-over-year baseline neutralises August / Christmas</a:t>
+            </a:r>
+          </a:p>
+        </p:txBody>
+      </p:sp>
+      <p:sp>
+        <p:nvSpPr>
+          <p:cNvPr id="14" name="Rounded Rectangle 13"/>
           <p:cNvSpPr/>
           <p:nvPr/>
         </p:nvSpPr>
         <p:spPr>
           <a:xfrm>
-            <a:off x="3408426" y="1783080"/>
-            <a:ext cx="2603754" cy="1920240"/>
+            <a:off x="548640" y="4069080"/>
+            <a:ext cx="6766560" cy="2331720"/>
           </a:xfrm>
           <a:prstGeom prst="roundRect">
             <a:avLst/>
@@ -4592,14 +4964,14 @@
       </p:sp>
       <p:sp>
         <p:nvSpPr>
-          <p:cNvPr id="9" name="TextBox 8"/>
-          <p:cNvSpPr txBox="1"/>
-          <p:nvPr/>
-        </p:nvSpPr>
-        <p:spPr>
-          <a:xfrm>
-            <a:off x="3573018" y="1911096"/>
-            <a:ext cx="2274570" cy="365760"/>
+          <p:cNvPr id="15" name="TextBox 14"/>
+          <p:cNvSpPr txBox="1"/>
+          <p:nvPr/>
+        </p:nvSpPr>
+        <p:spPr>
+          <a:xfrm>
+            <a:off x="822960" y="4251960"/>
+            <a:ext cx="6309360" cy="365760"/>
           </a:xfrm>
           <a:prstGeom prst="rect">
             <a:avLst/>
@@ -4614,97 +4986,150 @@
           <a:p>
             <a:pPr algn="l"/>
             <a:r>
-              <a:rPr sz="1200" b="1">
-                <a:solidFill>
-                  <a:srgbClr val="1B2A4A"/>
-                </a:solidFill>
-                <a:latin typeface="Calibri"/>
-              </a:rPr>
-              <a:t>02  August / seasonality</a:t>
-            </a:r>
-          </a:p>
-        </p:txBody>
-      </p:sp>
-      <p:sp>
-        <p:nvSpPr>
-          <p:cNvPr id="10" name="TextBox 9"/>
-          <p:cNvSpPr txBox="1"/>
-          <p:nvPr/>
-        </p:nvSpPr>
-        <p:spPr>
-          <a:xfrm>
-            <a:off x="3573018" y="2286000"/>
-            <a:ext cx="2274570" cy="914400"/>
-          </a:xfrm>
-          <a:prstGeom prst="rect">
-            <a:avLst/>
-          </a:prstGeom>
-          <a:noFill/>
-        </p:spPr>
-        <p:txBody>
-          <a:bodyPr wrap="square" lIns="0" rIns="0" tIns="0" bIns="0" anchor="t">
-            <a:spAutoFit/>
-          </a:bodyPr>
-          <a:lstStyle/>
-          <a:p>
-            <a:pPr algn="l"/>
-            <a:r>
-              <a:rPr sz="1000" b="0">
+              <a:rPr sz="1100" b="1">
+                <a:solidFill>
+                  <a:srgbClr val="CC6633"/>
+                </a:solidFill>
+                <a:latin typeface="Calibri"/>
+              </a:rPr>
+              <a:t>NOISE → SIGNAL</a:t>
+            </a:r>
+          </a:p>
+        </p:txBody>
+      </p:sp>
+      <p:sp>
+        <p:nvSpPr>
+          <p:cNvPr id="16" name="TextBox 15"/>
+          <p:cNvSpPr txBox="1"/>
+          <p:nvPr/>
+        </p:nvSpPr>
+        <p:spPr>
+          <a:xfrm>
+            <a:off x="822960" y="4663440"/>
+            <a:ext cx="6309360" cy="1645920"/>
+          </a:xfrm>
+          <a:prstGeom prst="rect">
+            <a:avLst/>
+          </a:prstGeom>
+          <a:noFill/>
+        </p:spPr>
+        <p:txBody>
+          <a:bodyPr wrap="square" lIns="0" rIns="0">
+            <a:spAutoFit/>
+          </a:bodyPr>
+          <a:lstStyle/>
+          <a:p>
+            <a:pPr algn="l">
+              <a:spcAft>
+                <a:spcPts val="300"/>
+              </a:spcAft>
+            </a:pPr>
+            <a:r>
+              <a:rPr sz="1300" b="1">
+                <a:solidFill>
+                  <a:srgbClr val="2E6FA8"/>
+                </a:solidFill>
+                <a:latin typeface="Calibri"/>
+              </a:rPr>
+              <a:t>•  </a:t>
+            </a:r>
+            <a:r>
+              <a:rPr sz="1100">
                 <a:solidFill>
                   <a:srgbClr val="1A1A1A"/>
                 </a:solidFill>
                 <a:latin typeface="Calibri"/>
               </a:rPr>
-              <a:t>Year-over-year baseline + holiday flag — neutralises August (0.25× yearly avg).</a:t>
-            </a:r>
-          </a:p>
-        </p:txBody>
-      </p:sp>
-      <p:sp>
-        <p:nvSpPr>
-          <p:cNvPr id="11" name="TextBox 10"/>
-          <p:cNvSpPr txBox="1"/>
-          <p:nvPr/>
-        </p:nvSpPr>
-        <p:spPr>
-          <a:xfrm>
-            <a:off x="3573018" y="3337560"/>
-            <a:ext cx="2274570" cy="274320"/>
-          </a:xfrm>
-          <a:prstGeom prst="rect">
-            <a:avLst/>
-          </a:prstGeom>
-          <a:noFill/>
-        </p:spPr>
-        <p:txBody>
-          <a:bodyPr wrap="square" lIns="0" rIns="0" tIns="0" bIns="0" anchor="t">
-            <a:spAutoFit/>
-          </a:bodyPr>
-          <a:lstStyle/>
-          <a:p>
-            <a:pPr algn="l"/>
-            <a:r>
-              <a:rPr sz="900" b="1">
+              <a:t>Holiday flag suppresses August/Christmas drops unless YoY confirms</a:t>
+            </a:r>
+          </a:p>
+          <a:p>
+            <a:pPr algn="l">
+              <a:spcAft>
+                <a:spcPts val="300"/>
+              </a:spcAft>
+            </a:pPr>
+            <a:r>
+              <a:rPr sz="1300" b="1">
                 <a:solidFill>
                   <a:srgbClr val="2E6FA8"/>
                 </a:solidFill>
                 <a:latin typeface="Calibri"/>
               </a:rPr>
-              <a:t>→  Empirical</a:t>
-            </a:r>
-          </a:p>
-        </p:txBody>
-      </p:sp>
-      <p:sp>
-        <p:nvSpPr>
-          <p:cNvPr id="12" name="Rounded Rectangle 11"/>
+              <a:t>•  </a:t>
+            </a:r>
+            <a:r>
+              <a:rPr sz="1100">
+                <a:solidFill>
+                  <a:srgbClr val="1A1A1A"/>
+                </a:solidFill>
+                <a:latin typeface="Calibri"/>
+              </a:rPr>
+              <a:t>Post-campaign grace silences clients who just stocked up heavily</a:t>
+            </a:r>
+          </a:p>
+          <a:p>
+            <a:pPr algn="l">
+              <a:spcAft>
+                <a:spcPts val="300"/>
+              </a:spcAft>
+            </a:pPr>
+            <a:r>
+              <a:rPr sz="1300" b="1">
+                <a:solidFill>
+                  <a:srgbClr val="2E6FA8"/>
+                </a:solidFill>
+                <a:latin typeface="Calibri"/>
+              </a:rPr>
+              <a:t>•  </a:t>
+            </a:r>
+            <a:r>
+              <a:rPr sz="1100">
+                <a:solidFill>
+                  <a:srgbClr val="1A1A1A"/>
+                </a:solidFill>
+                <a:latin typeface="Calibri"/>
+              </a:rPr>
+              <a:t>Outcome-driven snooze: 30d after won/lost/false_positive on same (cliente×fam×tipo)</a:t>
+            </a:r>
+          </a:p>
+          <a:p>
+            <a:pPr algn="l">
+              <a:spcAft>
+                <a:spcPts val="300"/>
+              </a:spcAft>
+            </a:pPr>
+            <a:r>
+              <a:rPr sz="1300" b="1">
+                <a:solidFill>
+                  <a:srgbClr val="2E6FA8"/>
+                </a:solidFill>
+                <a:latin typeface="Calibri"/>
+              </a:rPr>
+              <a:t>•  </a:t>
+            </a:r>
+            <a:r>
+              <a:rPr sz="1100">
+                <a:solidFill>
+                  <a:srgbClr val="1A1A1A"/>
+                </a:solidFill>
+                <a:latin typeface="Calibri"/>
+              </a:rPr>
+              <a:t>Cyclic-client filter: lost only fires if client was ever truly cyclic</a:t>
+            </a:r>
+          </a:p>
+        </p:txBody>
+      </p:sp>
+      <p:sp>
+        <p:nvSpPr>
+          <p:cNvPr id="17" name="Rounded Rectangle 16"/>
           <p:cNvSpPr/>
           <p:nvPr/>
         </p:nvSpPr>
         <p:spPr>
           <a:xfrm>
-            <a:off x="6176772" y="1783080"/>
-            <a:ext cx="2603754" cy="1920240"/>
+            <a:off x="7525512" y="4069080"/>
+            <a:ext cx="4114800" cy="2331720"/>
           </a:xfrm>
           <a:prstGeom prst="roundRect">
             <a:avLst/>
@@ -4740,14 +5165,14 @@
       </p:sp>
       <p:sp>
         <p:nvSpPr>
-          <p:cNvPr id="13" name="TextBox 12"/>
-          <p:cNvSpPr txBox="1"/>
-          <p:nvPr/>
-        </p:nvSpPr>
-        <p:spPr>
-          <a:xfrm>
-            <a:off x="6341364" y="1911096"/>
-            <a:ext cx="2274570" cy="365760"/>
+          <p:cNvPr id="18" name="TextBox 17"/>
+          <p:cNvSpPr txBox="1"/>
+          <p:nvPr/>
+        </p:nvSpPr>
+        <p:spPr>
+          <a:xfrm>
+            <a:off x="7799831" y="4251960"/>
+            <a:ext cx="3657600" cy="365760"/>
           </a:xfrm>
           <a:prstGeom prst="rect">
             <a:avLst/>
@@ -4762,27 +5187,62 @@
           <a:p>
             <a:pPr algn="l"/>
             <a:r>
-              <a:rPr sz="1200" b="1">
+              <a:rPr sz="1100" b="1">
+                <a:solidFill>
+                  <a:srgbClr val="2E6FA8"/>
+                </a:solidFill>
+                <a:latin typeface="Calibri"/>
+              </a:rPr>
+              <a:t>PRIORITY = SCORE</a:t>
+            </a:r>
+          </a:p>
+        </p:txBody>
+      </p:sp>
+      <p:sp>
+        <p:nvSpPr>
+          <p:cNvPr id="19" name="TextBox 18"/>
+          <p:cNvSpPr txBox="1"/>
+          <p:nvPr/>
+        </p:nvSpPr>
+        <p:spPr>
+          <a:xfrm>
+            <a:off x="7799831" y="4663440"/>
+            <a:ext cx="3657600" cy="914400"/>
+          </a:xfrm>
+          <a:prstGeom prst="rect">
+            <a:avLst/>
+          </a:prstGeom>
+          <a:noFill/>
+        </p:spPr>
+        <p:txBody>
+          <a:bodyPr wrap="square" lIns="0" rIns="0" tIns="0" bIns="0" anchor="t">
+            <a:spAutoFit/>
+          </a:bodyPr>
+          <a:lstStyle/>
+          <a:p>
+            <a:pPr algn="l"/>
+            <a:r>
+              <a:rPr sz="1300" b="1">
                 <a:solidFill>
                   <a:srgbClr val="1B2A4A"/>
                 </a:solidFill>
-                <a:latin typeface="Calibri"/>
-              </a:rPr>
-              <a:t>03  Lost-client filter</a:t>
-            </a:r>
-          </a:p>
-        </p:txBody>
-      </p:sp>
-      <p:sp>
-        <p:nvSpPr>
-          <p:cNvPr id="14" name="TextBox 13"/>
-          <p:cNvSpPr txBox="1"/>
-          <p:nvPr/>
-        </p:nvSpPr>
-        <p:spPr>
-          <a:xfrm>
-            <a:off x="6341364" y="2286000"/>
-            <a:ext cx="2274570" cy="914400"/>
+                <a:latin typeface="Consolas"/>
+              </a:rPr>
+              <a:t>score = impact × urgency × conv_prob</a:t>
+            </a:r>
+          </a:p>
+        </p:txBody>
+      </p:sp>
+      <p:sp>
+        <p:nvSpPr>
+          <p:cNvPr id="20" name="TextBox 19"/>
+          <p:cNvSpPr txBox="1"/>
+          <p:nvPr/>
+        </p:nvSpPr>
+        <p:spPr>
+          <a:xfrm>
+            <a:off x="7799831" y="5257800"/>
+            <a:ext cx="3657600" cy="1097280"/>
           </a:xfrm>
           <a:prstGeom prst="rect">
             <a:avLst/>
@@ -4797,858 +5257,14 @@
           <a:p>
             <a:pPr algn="l"/>
             <a:r>
-              <a:rPr sz="1000" b="0">
+              <a:rPr sz="1100" b="0">
                 <a:solidFill>
                   <a:srgbClr val="1A1A1A"/>
                 </a:solidFill>
                 <a:latin typeface="Calibri"/>
               </a:rPr>
-              <a:t>Only fire `lost` for cyclic clients (≥3 buys, ≥€200, cycle ≤365d).</a:t>
-            </a:r>
-          </a:p>
-        </p:txBody>
-      </p:sp>
-      <p:sp>
-        <p:nvSpPr>
-          <p:cNvPr id="15" name="TextBox 14"/>
-          <p:cNvSpPr txBox="1"/>
-          <p:nvPr/>
-        </p:nvSpPr>
-        <p:spPr>
-          <a:xfrm>
-            <a:off x="6341364" y="3337560"/>
-            <a:ext cx="2274570" cy="274320"/>
-          </a:xfrm>
-          <a:prstGeom prst="rect">
-            <a:avLst/>
-          </a:prstGeom>
-          <a:noFill/>
-        </p:spPr>
-        <p:txBody>
-          <a:bodyPr wrap="square" lIns="0" rIns="0" tIns="0" bIns="0" anchor="t">
-            <a:spAutoFit/>
-          </a:bodyPr>
-          <a:lstStyle/>
-          <a:p>
-            <a:pPr algn="l"/>
-            <a:r>
-              <a:rPr sz="900" b="1">
-                <a:solidFill>
-                  <a:srgbClr val="2E6FA8"/>
-                </a:solidFill>
-                <a:latin typeface="Calibri"/>
-              </a:rPr>
-              <a:t>→  Signal-to-noise</a:t>
-            </a:r>
-          </a:p>
-        </p:txBody>
-      </p:sp>
-      <p:sp>
-        <p:nvSpPr>
-          <p:cNvPr id="16" name="Rounded Rectangle 15"/>
-          <p:cNvSpPr/>
-          <p:nvPr/>
-        </p:nvSpPr>
-        <p:spPr>
-          <a:xfrm>
-            <a:off x="8945118" y="1783080"/>
-            <a:ext cx="2603754" cy="1920240"/>
-          </a:xfrm>
-          <a:prstGeom prst="roundRect">
-            <a:avLst/>
-          </a:prstGeom>
-          <a:solidFill>
-            <a:srgbClr val="F4F6FA"/>
-          </a:solidFill>
-          <a:ln>
-            <a:noFill/>
-          </a:ln>
-        </p:spPr>
-        <p:style>
-          <a:lnRef idx="1">
-            <a:schemeClr val="accent1"/>
-          </a:lnRef>
-          <a:fillRef idx="3">
-            <a:schemeClr val="accent1"/>
-          </a:fillRef>
-          <a:effectRef idx="2">
-            <a:schemeClr val="accent1"/>
-          </a:effectRef>
-          <a:fontRef idx="minor">
-            <a:schemeClr val="lt1"/>
-          </a:fontRef>
-        </p:style>
-        <p:txBody>
-          <a:bodyPr rtlCol="0" anchor="ctr"/>
-          <a:lstStyle/>
-          <a:p>
-            <a:pPr algn="ctr"/>
-          </a:p>
-        </p:txBody>
-      </p:sp>
-      <p:sp>
-        <p:nvSpPr>
-          <p:cNvPr id="17" name="TextBox 16"/>
-          <p:cNvSpPr txBox="1"/>
-          <p:nvPr/>
-        </p:nvSpPr>
-        <p:spPr>
-          <a:xfrm>
-            <a:off x="9109710" y="1911096"/>
-            <a:ext cx="2274570" cy="365760"/>
-          </a:xfrm>
-          <a:prstGeom prst="rect">
-            <a:avLst/>
-          </a:prstGeom>
-          <a:noFill/>
-        </p:spPr>
-        <p:txBody>
-          <a:bodyPr wrap="square" lIns="0" rIns="0" tIns="0" bIns="0" anchor="t">
-            <a:spAutoFit/>
-          </a:bodyPr>
-          <a:lstStyle/>
-          <a:p>
-            <a:pPr algn="l"/>
-            <a:r>
-              <a:rPr sz="1200" b="1">
-                <a:solidFill>
-                  <a:srgbClr val="1B2A4A"/>
-                </a:solidFill>
-                <a:latin typeface="Calibri"/>
-              </a:rPr>
-              <a:t>04  Post-campaign grace</a:t>
-            </a:r>
-          </a:p>
-        </p:txBody>
-      </p:sp>
-      <p:sp>
-        <p:nvSpPr>
-          <p:cNvPr id="18" name="TextBox 17"/>
-          <p:cNvSpPr txBox="1"/>
-          <p:nvPr/>
-        </p:nvSpPr>
-        <p:spPr>
-          <a:xfrm>
-            <a:off x="9109710" y="2286000"/>
-            <a:ext cx="2274570" cy="914400"/>
-          </a:xfrm>
-          <a:prstGeom prst="rect">
-            <a:avLst/>
-          </a:prstGeom>
-          <a:noFill/>
-        </p:spPr>
-        <p:txBody>
-          <a:bodyPr wrap="square" lIns="0" rIns="0" tIns="0" bIns="0" anchor="t">
-            <a:spAutoFit/>
-          </a:bodyPr>
-          <a:lstStyle/>
-          <a:p>
-            <a:pPr algn="l"/>
-            <a:r>
-              <a:rPr sz="1000" b="0">
-                <a:solidFill>
-                  <a:srgbClr val="1A1A1A"/>
-                </a:solidFill>
-                <a:latin typeface="Calibri"/>
-              </a:rPr>
-              <a:t>Heavy buyers in promo windows are silenced until expected restock date.</a:t>
-            </a:r>
-          </a:p>
-        </p:txBody>
-      </p:sp>
-      <p:sp>
-        <p:nvSpPr>
-          <p:cNvPr id="19" name="TextBox 18"/>
-          <p:cNvSpPr txBox="1"/>
-          <p:nvPr/>
-        </p:nvSpPr>
-        <p:spPr>
-          <a:xfrm>
-            <a:off x="9109710" y="3337560"/>
-            <a:ext cx="2274570" cy="274320"/>
-          </a:xfrm>
-          <a:prstGeom prst="rect">
-            <a:avLst/>
-          </a:prstGeom>
-          <a:noFill/>
-        </p:spPr>
-        <p:txBody>
-          <a:bodyPr wrap="square" lIns="0" rIns="0" tIns="0" bIns="0" anchor="t">
-            <a:spAutoFit/>
-          </a:bodyPr>
-          <a:lstStyle/>
-          <a:p>
-            <a:pPr algn="l"/>
-            <a:r>
-              <a:rPr sz="900" b="1">
-                <a:solidFill>
-                  <a:srgbClr val="2E6FA8"/>
-                </a:solidFill>
-                <a:latin typeface="Calibri"/>
-              </a:rPr>
-              <a:t>→  Brief caveat</a:t>
-            </a:r>
-          </a:p>
-        </p:txBody>
-      </p:sp>
-      <p:sp>
-        <p:nvSpPr>
-          <p:cNvPr id="20" name="Rounded Rectangle 19"/>
-          <p:cNvSpPr/>
-          <p:nvPr/>
-        </p:nvSpPr>
-        <p:spPr>
-          <a:xfrm>
-            <a:off x="640080" y="3886200"/>
-            <a:ext cx="2603754" cy="1920240"/>
-          </a:xfrm>
-          <a:prstGeom prst="roundRect">
-            <a:avLst/>
-          </a:prstGeom>
-          <a:solidFill>
-            <a:srgbClr val="F4F6FA"/>
-          </a:solidFill>
-          <a:ln>
-            <a:noFill/>
-          </a:ln>
-        </p:spPr>
-        <p:style>
-          <a:lnRef idx="1">
-            <a:schemeClr val="accent1"/>
-          </a:lnRef>
-          <a:fillRef idx="3">
-            <a:schemeClr val="accent1"/>
-          </a:fillRef>
-          <a:effectRef idx="2">
-            <a:schemeClr val="accent1"/>
-          </a:effectRef>
-          <a:fontRef idx="minor">
-            <a:schemeClr val="lt1"/>
-          </a:fontRef>
-        </p:style>
-        <p:txBody>
-          <a:bodyPr rtlCol="0" anchor="ctr"/>
-          <a:lstStyle/>
-          <a:p>
-            <a:pPr algn="ctr"/>
-          </a:p>
-        </p:txBody>
-      </p:sp>
-      <p:sp>
-        <p:nvSpPr>
-          <p:cNvPr id="21" name="TextBox 20"/>
-          <p:cNvSpPr txBox="1"/>
-          <p:nvPr/>
-        </p:nvSpPr>
-        <p:spPr>
-          <a:xfrm>
-            <a:off x="804672" y="4014216"/>
-            <a:ext cx="2274570" cy="365760"/>
-          </a:xfrm>
-          <a:prstGeom prst="rect">
-            <a:avLst/>
-          </a:prstGeom>
-          <a:noFill/>
-        </p:spPr>
-        <p:txBody>
-          <a:bodyPr wrap="square" lIns="0" rIns="0" tIns="0" bIns="0" anchor="t">
-            <a:spAutoFit/>
-          </a:bodyPr>
-          <a:lstStyle/>
-          <a:p>
-            <a:pPr algn="l"/>
-            <a:r>
-              <a:rPr sz="1200" b="1">
-                <a:solidFill>
-                  <a:srgbClr val="1B2A4A"/>
-                </a:solidFill>
-                <a:latin typeface="Calibri"/>
-              </a:rPr>
-              <a:t>05  Outcome-driven snooze</a:t>
-            </a:r>
-          </a:p>
-        </p:txBody>
-      </p:sp>
-      <p:sp>
-        <p:nvSpPr>
-          <p:cNvPr id="22" name="TextBox 21"/>
-          <p:cNvSpPr txBox="1"/>
-          <p:nvPr/>
-        </p:nvSpPr>
-        <p:spPr>
-          <a:xfrm>
-            <a:off x="804672" y="4389120"/>
-            <a:ext cx="2274570" cy="914400"/>
-          </a:xfrm>
-          <a:prstGeom prst="rect">
-            <a:avLst/>
-          </a:prstGeom>
-          <a:noFill/>
-        </p:spPr>
-        <p:txBody>
-          <a:bodyPr wrap="square" lIns="0" rIns="0" tIns="0" bIns="0" anchor="t">
-            <a:spAutoFit/>
-          </a:bodyPr>
-          <a:lstStyle/>
-          <a:p>
-            <a:pPr algn="l"/>
-            <a:r>
-              <a:rPr sz="1000" b="0">
-                <a:solidFill>
-                  <a:srgbClr val="1A1A1A"/>
-                </a:solidFill>
-                <a:latin typeface="Calibri"/>
-              </a:rPr>
-              <a:t>After won/lost/false_positive, that (cliente×fam×tipo) is muted 30 days.</a:t>
-            </a:r>
-          </a:p>
-        </p:txBody>
-      </p:sp>
-      <p:sp>
-        <p:nvSpPr>
-          <p:cNvPr id="23" name="TextBox 22"/>
-          <p:cNvSpPr txBox="1"/>
-          <p:nvPr/>
-        </p:nvSpPr>
-        <p:spPr>
-          <a:xfrm>
-            <a:off x="804672" y="5440680"/>
-            <a:ext cx="2274570" cy="274320"/>
-          </a:xfrm>
-          <a:prstGeom prst="rect">
-            <a:avLst/>
-          </a:prstGeom>
-          <a:noFill/>
-        </p:spPr>
-        <p:txBody>
-          <a:bodyPr wrap="square" lIns="0" rIns="0" tIns="0" bIns="0" anchor="t">
-            <a:spAutoFit/>
-          </a:bodyPr>
-          <a:lstStyle/>
-          <a:p>
-            <a:pPr algn="l"/>
-            <a:r>
-              <a:rPr sz="900" b="1">
-                <a:solidFill>
-                  <a:srgbClr val="2E6FA8"/>
-                </a:solidFill>
-                <a:latin typeface="Calibri"/>
-              </a:rPr>
-              <a:t>→  Brief operational</a:t>
-            </a:r>
-          </a:p>
-        </p:txBody>
-      </p:sp>
-      <p:sp>
-        <p:nvSpPr>
-          <p:cNvPr id="24" name="Rounded Rectangle 23"/>
-          <p:cNvSpPr/>
-          <p:nvPr/>
-        </p:nvSpPr>
-        <p:spPr>
-          <a:xfrm>
-            <a:off x="3408426" y="3886200"/>
-            <a:ext cx="2603754" cy="1920240"/>
-          </a:xfrm>
-          <a:prstGeom prst="roundRect">
-            <a:avLst/>
-          </a:prstGeom>
-          <a:solidFill>
-            <a:srgbClr val="F4F6FA"/>
-          </a:solidFill>
-          <a:ln>
-            <a:noFill/>
-          </a:ln>
-        </p:spPr>
-        <p:style>
-          <a:lnRef idx="1">
-            <a:schemeClr val="accent1"/>
-          </a:lnRef>
-          <a:fillRef idx="3">
-            <a:schemeClr val="accent1"/>
-          </a:fillRef>
-          <a:effectRef idx="2">
-            <a:schemeClr val="accent1"/>
-          </a:effectRef>
-          <a:fontRef idx="minor">
-            <a:schemeClr val="lt1"/>
-          </a:fontRef>
-        </p:style>
-        <p:txBody>
-          <a:bodyPr rtlCol="0" anchor="ctr"/>
-          <a:lstStyle/>
-          <a:p>
-            <a:pPr algn="ctr"/>
-          </a:p>
-        </p:txBody>
-      </p:sp>
-      <p:sp>
-        <p:nvSpPr>
-          <p:cNvPr id="25" name="TextBox 24"/>
-          <p:cNvSpPr txBox="1"/>
-          <p:nvPr/>
-        </p:nvSpPr>
-        <p:spPr>
-          <a:xfrm>
-            <a:off x="3573018" y="4014216"/>
-            <a:ext cx="2274570" cy="365760"/>
-          </a:xfrm>
-          <a:prstGeom prst="rect">
-            <a:avLst/>
-          </a:prstGeom>
-          <a:noFill/>
-        </p:spPr>
-        <p:txBody>
-          <a:bodyPr wrap="square" lIns="0" rIns="0" tIns="0" bIns="0" anchor="t">
-            <a:spAutoFit/>
-          </a:bodyPr>
-          <a:lstStyle/>
-          <a:p>
-            <a:pPr algn="l"/>
-            <a:r>
-              <a:rPr sz="1200" b="1">
-                <a:solidFill>
-                  <a:srgbClr val="1B2A4A"/>
-                </a:solidFill>
-                <a:latin typeface="Calibri"/>
-              </a:rPr>
-              <a:t>06  Dynamic contact window</a:t>
-            </a:r>
-          </a:p>
-        </p:txBody>
-      </p:sp>
-      <p:sp>
-        <p:nvSpPr>
-          <p:cNvPr id="26" name="TextBox 25"/>
-          <p:cNvSpPr txBox="1"/>
-          <p:nvPr/>
-        </p:nvSpPr>
-        <p:spPr>
-          <a:xfrm>
-            <a:off x="3573018" y="4389120"/>
-            <a:ext cx="2274570" cy="914400"/>
-          </a:xfrm>
-          <a:prstGeom prst="rect">
-            <a:avLst/>
-          </a:prstGeom>
-          <a:noFill/>
-        </p:spPr>
-        <p:txBody>
-          <a:bodyPr wrap="square" lIns="0" rIns="0" tIns="0" bIns="0" anchor="t">
-            <a:spAutoFit/>
-          </a:bodyPr>
-          <a:lstStyle/>
-          <a:p>
-            <a:pPr algn="l"/>
-            <a:r>
-              <a:rPr sz="1000" b="0">
-                <a:solidFill>
-                  <a:srgbClr val="1A1A1A"/>
-                </a:solidFill>
-                <a:latin typeface="Calibri"/>
-              </a:rPr>
-              <a:t>Window adapts to each client's avg cycle — overdue tightens, on-cycle exact.</a:t>
-            </a:r>
-          </a:p>
-        </p:txBody>
-      </p:sp>
-      <p:sp>
-        <p:nvSpPr>
-          <p:cNvPr id="27" name="TextBox 26"/>
-          <p:cNvSpPr txBox="1"/>
-          <p:nvPr/>
-        </p:nvSpPr>
-        <p:spPr>
-          <a:xfrm>
-            <a:off x="3573018" y="5440680"/>
-            <a:ext cx="2274570" cy="274320"/>
-          </a:xfrm>
-          <a:prstGeom prst="rect">
-            <a:avLst/>
-          </a:prstGeom>
-          <a:noFill/>
-        </p:spPr>
-        <p:txBody>
-          <a:bodyPr wrap="square" lIns="0" rIns="0" tIns="0" bIns="0" anchor="t">
-            <a:spAutoFit/>
-          </a:bodyPr>
-          <a:lstStyle/>
-          <a:p>
-            <a:pPr algn="l"/>
-            <a:r>
-              <a:rPr sz="900" b="1">
-                <a:solidFill>
-                  <a:srgbClr val="2E6FA8"/>
-                </a:solidFill>
-                <a:latin typeface="Calibri"/>
-              </a:rPr>
-              <a:t>→  Per-client rhythm</a:t>
-            </a:r>
-          </a:p>
-        </p:txBody>
-      </p:sp>
-      <p:sp>
-        <p:nvSpPr>
-          <p:cNvPr id="28" name="Rounded Rectangle 27"/>
-          <p:cNvSpPr/>
-          <p:nvPr/>
-        </p:nvSpPr>
-        <p:spPr>
-          <a:xfrm>
-            <a:off x="6176772" y="3886200"/>
-            <a:ext cx="2603754" cy="1920240"/>
-          </a:xfrm>
-          <a:prstGeom prst="roundRect">
-            <a:avLst/>
-          </a:prstGeom>
-          <a:solidFill>
-            <a:srgbClr val="F4F6FA"/>
-          </a:solidFill>
-          <a:ln>
-            <a:noFill/>
-          </a:ln>
-        </p:spPr>
-        <p:style>
-          <a:lnRef idx="1">
-            <a:schemeClr val="accent1"/>
-          </a:lnRef>
-          <a:fillRef idx="3">
-            <a:schemeClr val="accent1"/>
-          </a:fillRef>
-          <a:effectRef idx="2">
-            <a:schemeClr val="accent1"/>
-          </a:effectRef>
-          <a:fontRef idx="minor">
-            <a:schemeClr val="lt1"/>
-          </a:fontRef>
-        </p:style>
-        <p:txBody>
-          <a:bodyPr rtlCol="0" anchor="ctr"/>
-          <a:lstStyle/>
-          <a:p>
-            <a:pPr algn="ctr"/>
-          </a:p>
-        </p:txBody>
-      </p:sp>
-      <p:sp>
-        <p:nvSpPr>
-          <p:cNvPr id="29" name="TextBox 28"/>
-          <p:cNvSpPr txBox="1"/>
-          <p:nvPr/>
-        </p:nvSpPr>
-        <p:spPr>
-          <a:xfrm>
-            <a:off x="6341364" y="4014216"/>
-            <a:ext cx="2274570" cy="365760"/>
-          </a:xfrm>
-          <a:prstGeom prst="rect">
-            <a:avLst/>
-          </a:prstGeom>
-          <a:noFill/>
-        </p:spPr>
-        <p:txBody>
-          <a:bodyPr wrap="square" lIns="0" rIns="0" tIns="0" bIns="0" anchor="t">
-            <a:spAutoFit/>
-          </a:bodyPr>
-          <a:lstStyle/>
-          <a:p>
-            <a:pPr algn="l"/>
-            <a:r>
-              <a:rPr sz="1200" b="1">
-                <a:solidFill>
-                  <a:srgbClr val="1B2A4A"/>
-                </a:solidFill>
-                <a:latin typeface="Calibri"/>
-              </a:rPr>
-              <a:t>07  Realistic capture impact</a:t>
-            </a:r>
-          </a:p>
-        </p:txBody>
-      </p:sp>
-      <p:sp>
-        <p:nvSpPr>
-          <p:cNvPr id="30" name="TextBox 29"/>
-          <p:cNvSpPr txBox="1"/>
-          <p:nvPr/>
-        </p:nvSpPr>
-        <p:spPr>
-          <a:xfrm>
-            <a:off x="6341364" y="4389120"/>
-            <a:ext cx="2274570" cy="914400"/>
-          </a:xfrm>
-          <a:prstGeom prst="rect">
-            <a:avLst/>
-          </a:prstGeom>
-          <a:noFill/>
-        </p:spPr>
-        <p:txBody>
-          <a:bodyPr wrap="square" lIns="0" rIns="0" tIns="0" bIns="0" anchor="t">
-            <a:spAutoFit/>
-          </a:bodyPr>
-          <a:lstStyle/>
-          <a:p>
-            <a:pPr algn="l"/>
-            <a:r>
-              <a:rPr sz="1000" b="0">
-                <a:solidFill>
-                  <a:srgbClr val="1A1A1A"/>
-                </a:solidFill>
-                <a:latin typeface="Calibri"/>
-              </a:rPr>
-              <a:t>Promiscuous impact = current × 0.3–0.5 — defensible, not theoretical.</a:t>
-            </a:r>
-          </a:p>
-        </p:txBody>
-      </p:sp>
-      <p:sp>
-        <p:nvSpPr>
-          <p:cNvPr id="31" name="TextBox 30"/>
-          <p:cNvSpPr txBox="1"/>
-          <p:nvPr/>
-        </p:nvSpPr>
-        <p:spPr>
-          <a:xfrm>
-            <a:off x="6341364" y="5440680"/>
-            <a:ext cx="2274570" cy="274320"/>
-          </a:xfrm>
-          <a:prstGeom prst="rect">
-            <a:avLst/>
-          </a:prstGeom>
-          <a:noFill/>
-        </p:spPr>
-        <p:txBody>
-          <a:bodyPr wrap="square" lIns="0" rIns="0" tIns="0" bIns="0" anchor="t">
-            <a:spAutoFit/>
-          </a:bodyPr>
-          <a:lstStyle/>
-          <a:p>
-            <a:pPr algn="l"/>
-            <a:r>
-              <a:rPr sz="900" b="1">
-                <a:solidFill>
-                  <a:srgbClr val="2E6FA8"/>
-                </a:solidFill>
-                <a:latin typeface="Calibri"/>
-              </a:rPr>
-              <a:t>→  Defensibility</a:t>
-            </a:r>
-          </a:p>
-        </p:txBody>
-      </p:sp>
-      <p:sp>
-        <p:nvSpPr>
-          <p:cNvPr id="32" name="Rounded Rectangle 31"/>
-          <p:cNvSpPr/>
-          <p:nvPr/>
-        </p:nvSpPr>
-        <p:spPr>
-          <a:xfrm>
-            <a:off x="8945118" y="3886200"/>
-            <a:ext cx="2603754" cy="1920240"/>
-          </a:xfrm>
-          <a:prstGeom prst="roundRect">
-            <a:avLst/>
-          </a:prstGeom>
-          <a:solidFill>
-            <a:srgbClr val="F4F6FA"/>
-          </a:solidFill>
-          <a:ln>
-            <a:noFill/>
-          </a:ln>
-        </p:spPr>
-        <p:style>
-          <a:lnRef idx="1">
-            <a:schemeClr val="accent1"/>
-          </a:lnRef>
-          <a:fillRef idx="3">
-            <a:schemeClr val="accent1"/>
-          </a:fillRef>
-          <a:effectRef idx="2">
-            <a:schemeClr val="accent1"/>
-          </a:effectRef>
-          <a:fontRef idx="minor">
-            <a:schemeClr val="lt1"/>
-          </a:fontRef>
-        </p:style>
-        <p:txBody>
-          <a:bodyPr rtlCol="0" anchor="ctr"/>
-          <a:lstStyle/>
-          <a:p>
-            <a:pPr algn="ctr"/>
-          </a:p>
-        </p:txBody>
-      </p:sp>
-      <p:sp>
-        <p:nvSpPr>
-          <p:cNvPr id="33" name="TextBox 32"/>
-          <p:cNvSpPr txBox="1"/>
-          <p:nvPr/>
-        </p:nvSpPr>
-        <p:spPr>
-          <a:xfrm>
-            <a:off x="9109710" y="4014216"/>
-            <a:ext cx="2274570" cy="365760"/>
-          </a:xfrm>
-          <a:prstGeom prst="rect">
-            <a:avLst/>
-          </a:prstGeom>
-          <a:noFill/>
-        </p:spPr>
-        <p:txBody>
-          <a:bodyPr wrap="square" lIns="0" rIns="0" tIns="0" bIns="0" anchor="t">
-            <a:spAutoFit/>
-          </a:bodyPr>
-          <a:lstStyle/>
-          <a:p>
-            <a:pPr algn="l"/>
-            <a:r>
-              <a:rPr sz="1200" b="1">
-                <a:solidFill>
-                  <a:srgbClr val="1B2A4A"/>
-                </a:solidFill>
-                <a:latin typeface="Calibri"/>
-              </a:rPr>
-              <a:t>08  Conversion probability</a:t>
-            </a:r>
-          </a:p>
-        </p:txBody>
-      </p:sp>
-      <p:sp>
-        <p:nvSpPr>
-          <p:cNvPr id="34" name="TextBox 33"/>
-          <p:cNvSpPr txBox="1"/>
-          <p:nvPr/>
-        </p:nvSpPr>
-        <p:spPr>
-          <a:xfrm>
-            <a:off x="9109710" y="4389120"/>
-            <a:ext cx="2274570" cy="914400"/>
-          </a:xfrm>
-          <a:prstGeom prst="rect">
-            <a:avLst/>
-          </a:prstGeom>
-          <a:noFill/>
-        </p:spPr>
-        <p:txBody>
-          <a:bodyPr wrap="square" lIns="0" rIns="0" tIns="0" bIns="0" anchor="t">
-            <a:spAutoFit/>
-          </a:bodyPr>
-          <a:lstStyle/>
-          <a:p>
-            <a:pPr algn="l"/>
-            <a:r>
-              <a:rPr sz="1000" b="0">
-                <a:solidFill>
-                  <a:srgbClr val="1A1A1A"/>
-                </a:solidFill>
-                <a:latin typeface="Calibri"/>
-              </a:rPr>
-              <a:t>score = impact × urgency × conv_prob (4th brief signal).</a:t>
-            </a:r>
-          </a:p>
-        </p:txBody>
-      </p:sp>
-      <p:sp>
-        <p:nvSpPr>
-          <p:cNvPr id="35" name="TextBox 34"/>
-          <p:cNvSpPr txBox="1"/>
-          <p:nvPr/>
-        </p:nvSpPr>
-        <p:spPr>
-          <a:xfrm>
-            <a:off x="9109710" y="5440680"/>
-            <a:ext cx="2274570" cy="274320"/>
-          </a:xfrm>
-          <a:prstGeom prst="rect">
-            <a:avLst/>
-          </a:prstGeom>
-          <a:noFill/>
-        </p:spPr>
-        <p:txBody>
-          <a:bodyPr wrap="square" lIns="0" rIns="0" tIns="0" bIns="0" anchor="t">
-            <a:spAutoFit/>
-          </a:bodyPr>
-          <a:lstStyle/>
-          <a:p>
-            <a:pPr algn="l"/>
-            <a:r>
-              <a:rPr sz="900" b="1">
-                <a:solidFill>
-                  <a:srgbClr val="2E6FA8"/>
-                </a:solidFill>
-                <a:latin typeface="Calibri"/>
-              </a:rPr>
-              <a:t>→  Brief</a:t>
-            </a:r>
-          </a:p>
-        </p:txBody>
-      </p:sp>
-      <p:sp>
-        <p:nvSpPr>
-          <p:cNvPr id="36" name="TextBox 35"/>
-          <p:cNvSpPr txBox="1"/>
-          <p:nvPr/>
-        </p:nvSpPr>
-        <p:spPr>
-          <a:xfrm>
-            <a:off x="640080" y="5989320"/>
-            <a:ext cx="10972800" cy="365760"/>
-          </a:xfrm>
-          <a:prstGeom prst="rect">
-            <a:avLst/>
-          </a:prstGeom>
-          <a:noFill/>
-        </p:spPr>
-        <p:txBody>
-          <a:bodyPr wrap="square" lIns="0" rIns="0" tIns="0" bIns="0" anchor="t">
-            <a:spAutoFit/>
-          </a:bodyPr>
-          <a:lstStyle/>
-          <a:p>
-            <a:pPr algn="ctr"/>
-            <a:r>
-              <a:rPr sz="1300" b="1">
-                <a:solidFill>
-                  <a:srgbClr val="1B2A4A"/>
-                </a:solidFill>
-                <a:latin typeface="Calibri"/>
-              </a:rPr>
-              <a:t>All four prioritisation signals from the brief are in the score: impact × urgency × client value × conversion probability.</a:t>
-            </a:r>
-          </a:p>
-        </p:txBody>
-      </p:sp>
-      <p:sp>
-        <p:nvSpPr>
-          <p:cNvPr id="37" name="TextBox 36"/>
-          <p:cNvSpPr txBox="1"/>
-          <p:nvPr/>
-        </p:nvSpPr>
-        <p:spPr>
-          <a:xfrm>
-            <a:off x="640080" y="6355080"/>
-            <a:ext cx="10972800" cy="320040"/>
-          </a:xfrm>
-          <a:prstGeom prst="rect">
-            <a:avLst/>
-          </a:prstGeom>
-          <a:noFill/>
-        </p:spPr>
-        <p:txBody>
-          <a:bodyPr wrap="square" lIns="0" rIns="0" tIns="0" bIns="0" anchor="t">
-            <a:spAutoFit/>
-          </a:bodyPr>
-          <a:lstStyle/>
-          <a:p>
-            <a:pPr algn="ctr"/>
-            <a:r>
-              <a:rPr sz="1200" b="0">
-                <a:solidFill>
-                  <a:srgbClr val="6B6B6B"/>
-                </a:solidFill>
-                <a:latin typeface="Calibri"/>
-              </a:rPr>
-              <a:t>No black box. Every threshold and multiplier is documented in the code.</a:t>
+              <a:t>All four prioritisation signals from the brief.
+Higher score = higher in the daily call list.</a:t>
             </a:r>
           </a:p>
         </p:txBody>
@@ -5662,6 +5278,5585 @@
 </file>
 
 <file path=ppt/slides/slide4.xml><?xml version="1.0" encoding="utf-8"?>
+<p:sld xmlns:a="http://schemas.openxmlformats.org/drawingml/2006/main" xmlns:p="http://schemas.openxmlformats.org/presentationml/2006/main" xmlns:r="http://schemas.openxmlformats.org/officeDocument/2006/relationships">
+  <p:cSld>
+    <p:spTree>
+      <p:nvGrpSpPr>
+        <p:cNvPr id="1" name=""/>
+        <p:cNvGrpSpPr/>
+        <p:nvPr/>
+      </p:nvGrpSpPr>
+      <p:grpSpPr/>
+      <p:sp>
+        <p:nvSpPr>
+          <p:cNvPr id="2" name="Oval 1"/>
+          <p:cNvSpPr/>
+          <p:nvPr/>
+        </p:nvSpPr>
+        <p:spPr>
+          <a:xfrm>
+            <a:off x="548640" y="457200"/>
+            <a:ext cx="640080" cy="640080"/>
+          </a:xfrm>
+          <a:prstGeom prst="ellipse">
+            <a:avLst/>
+          </a:prstGeom>
+          <a:solidFill>
+            <a:srgbClr val="2E6FA8"/>
+          </a:solidFill>
+          <a:ln>
+            <a:noFill/>
+          </a:ln>
+        </p:spPr>
+        <p:style>
+          <a:lnRef idx="1">
+            <a:schemeClr val="accent1"/>
+          </a:lnRef>
+          <a:fillRef idx="3">
+            <a:schemeClr val="accent1"/>
+          </a:fillRef>
+          <a:effectRef idx="2">
+            <a:schemeClr val="accent1"/>
+          </a:effectRef>
+          <a:fontRef idx="minor">
+            <a:schemeClr val="lt1"/>
+          </a:fontRef>
+        </p:style>
+        <p:txBody>
+          <a:bodyPr rtlCol="0" anchor="ctr"/>
+          <a:lstStyle/>
+          <a:p>
+            <a:pPr algn="ctr"/>
+          </a:p>
+        </p:txBody>
+      </p:sp>
+      <p:sp>
+        <p:nvSpPr>
+          <p:cNvPr id="3" name="TextBox 2"/>
+          <p:cNvSpPr txBox="1"/>
+          <p:nvPr/>
+        </p:nvSpPr>
+        <p:spPr>
+          <a:xfrm>
+            <a:off x="548640" y="502920"/>
+            <a:ext cx="640080" cy="548640"/>
+          </a:xfrm>
+          <a:prstGeom prst="rect">
+            <a:avLst/>
+          </a:prstGeom>
+          <a:noFill/>
+        </p:spPr>
+        <p:txBody>
+          <a:bodyPr wrap="square" lIns="0" rIns="0" tIns="0" bIns="0" anchor="t">
+            <a:spAutoFit/>
+          </a:bodyPr>
+          <a:lstStyle/>
+          <a:p>
+            <a:pPr algn="ctr"/>
+            <a:r>
+              <a:rPr sz="2000" b="1">
+                <a:solidFill>
+                  <a:srgbClr val="FFFFFF"/>
+                </a:solidFill>
+                <a:latin typeface="Calibri"/>
+              </a:rPr>
+              <a:t>03</a:t>
+            </a:r>
+          </a:p>
+        </p:txBody>
+      </p:sp>
+      <p:sp>
+        <p:nvSpPr>
+          <p:cNvPr id="4" name="TextBox 3"/>
+          <p:cNvSpPr txBox="1"/>
+          <p:nvPr/>
+        </p:nvSpPr>
+        <p:spPr>
+          <a:xfrm>
+            <a:off x="1371600" y="411480"/>
+            <a:ext cx="10332720" cy="640080"/>
+          </a:xfrm>
+          <a:prstGeom prst="rect">
+            <a:avLst/>
+          </a:prstGeom>
+          <a:noFill/>
+        </p:spPr>
+        <p:txBody>
+          <a:bodyPr wrap="square" lIns="0" rIns="0" tIns="0" bIns="0" anchor="t">
+            <a:spAutoFit/>
+          </a:bodyPr>
+          <a:lstStyle/>
+          <a:p>
+            <a:pPr algn="l"/>
+            <a:r>
+              <a:rPr sz="2800" b="1">
+                <a:solidFill>
+                  <a:srgbClr val="1B2A4A"/>
+                </a:solidFill>
+                <a:latin typeface="Calibri"/>
+              </a:rPr>
+              <a:t>Data, variables, assumptions</a:t>
+            </a:r>
+          </a:p>
+        </p:txBody>
+      </p:sp>
+      <p:sp>
+        <p:nvSpPr>
+          <p:cNvPr id="5" name="TextBox 4"/>
+          <p:cNvSpPr txBox="1"/>
+          <p:nvPr/>
+        </p:nvSpPr>
+        <p:spPr>
+          <a:xfrm>
+            <a:off x="1371600" y="960120"/>
+            <a:ext cx="10332720" cy="365760"/>
+          </a:xfrm>
+          <a:prstGeom prst="rect">
+            <a:avLst/>
+          </a:prstGeom>
+          <a:noFill/>
+        </p:spPr>
+        <p:txBody>
+          <a:bodyPr wrap="square" lIns="0" rIns="0" tIns="0" bIns="0" anchor="t">
+            <a:spAutoFit/>
+          </a:bodyPr>
+          <a:lstStyle/>
+          <a:p>
+            <a:pPr algn="l"/>
+            <a:r>
+              <a:rPr sz="1400" b="0">
+                <a:solidFill>
+                  <a:srgbClr val="6B6B6B"/>
+                </a:solidFill>
+                <a:latin typeface="Calibri"/>
+              </a:rPr>
+              <a:t>Datasets used · derived variables · what we assume · what we cannot observe</a:t>
+            </a:r>
+          </a:p>
+        </p:txBody>
+      </p:sp>
+      <p:sp>
+        <p:nvSpPr>
+          <p:cNvPr id="6" name="Rounded Rectangle 5"/>
+          <p:cNvSpPr/>
+          <p:nvPr/>
+        </p:nvSpPr>
+        <p:spPr>
+          <a:xfrm>
+            <a:off x="548640" y="1508760"/>
+            <a:ext cx="3657600" cy="5120640"/>
+          </a:xfrm>
+          <a:prstGeom prst="roundRect">
+            <a:avLst/>
+          </a:prstGeom>
+          <a:solidFill>
+            <a:srgbClr val="F4F6FA"/>
+          </a:solidFill>
+          <a:ln>
+            <a:noFill/>
+          </a:ln>
+        </p:spPr>
+        <p:style>
+          <a:lnRef idx="1">
+            <a:schemeClr val="accent1"/>
+          </a:lnRef>
+          <a:fillRef idx="3">
+            <a:schemeClr val="accent1"/>
+          </a:fillRef>
+          <a:effectRef idx="2">
+            <a:schemeClr val="accent1"/>
+          </a:effectRef>
+          <a:fontRef idx="minor">
+            <a:schemeClr val="lt1"/>
+          </a:fontRef>
+        </p:style>
+        <p:txBody>
+          <a:bodyPr rtlCol="0" anchor="ctr"/>
+          <a:lstStyle/>
+          <a:p>
+            <a:pPr algn="ctr"/>
+          </a:p>
+        </p:txBody>
+      </p:sp>
+      <p:sp>
+        <p:nvSpPr>
+          <p:cNvPr id="7" name="TextBox 6"/>
+          <p:cNvSpPr txBox="1"/>
+          <p:nvPr/>
+        </p:nvSpPr>
+        <p:spPr>
+          <a:xfrm>
+            <a:off x="777240" y="1691640"/>
+            <a:ext cx="3200400" cy="365760"/>
+          </a:xfrm>
+          <a:prstGeom prst="rect">
+            <a:avLst/>
+          </a:prstGeom>
+          <a:noFill/>
+        </p:spPr>
+        <p:txBody>
+          <a:bodyPr wrap="square" lIns="0" rIns="0" tIns="0" bIns="0" anchor="t">
+            <a:spAutoFit/>
+          </a:bodyPr>
+          <a:lstStyle/>
+          <a:p>
+            <a:pPr algn="l"/>
+            <a:r>
+              <a:rPr sz="1100" b="1">
+                <a:solidFill>
+                  <a:srgbClr val="2E6FA8"/>
+                </a:solidFill>
+                <a:latin typeface="Calibri"/>
+              </a:rPr>
+              <a:t>DATASETS USED</a:t>
+            </a:r>
+          </a:p>
+        </p:txBody>
+      </p:sp>
+      <p:sp>
+        <p:nvSpPr>
+          <p:cNvPr id="8" name="TextBox 7"/>
+          <p:cNvSpPr txBox="1"/>
+          <p:nvPr/>
+        </p:nvSpPr>
+        <p:spPr>
+          <a:xfrm>
+            <a:off x="777240" y="2057400"/>
+            <a:ext cx="3200400" cy="2103120"/>
+          </a:xfrm>
+          <a:prstGeom prst="rect">
+            <a:avLst/>
+          </a:prstGeom>
+          <a:noFill/>
+        </p:spPr>
+        <p:txBody>
+          <a:bodyPr wrap="square" lIns="0" rIns="0">
+            <a:spAutoFit/>
+          </a:bodyPr>
+          <a:lstStyle/>
+          <a:p>
+            <a:pPr algn="l">
+              <a:spcAft>
+                <a:spcPts val="200"/>
+              </a:spcAft>
+            </a:pPr>
+            <a:r>
+              <a:rPr sz="1300" b="1">
+                <a:solidFill>
+                  <a:srgbClr val="2E6FA8"/>
+                </a:solidFill>
+                <a:latin typeface="Calibri"/>
+              </a:rPr>
+              <a:t>•  </a:t>
+            </a:r>
+            <a:r>
+              <a:rPr sz="1100">
+                <a:solidFill>
+                  <a:srgbClr val="1A1A1A"/>
+                </a:solidFill>
+                <a:latin typeface="Calibri"/>
+              </a:rPr>
+              <a:t>Ventas — 162K rows, 5 yrs, daily granularity</a:t>
+            </a:r>
+          </a:p>
+          <a:p>
+            <a:pPr algn="l">
+              <a:spcAft>
+                <a:spcPts val="200"/>
+              </a:spcAft>
+            </a:pPr>
+            <a:r>
+              <a:rPr sz="1300" b="1">
+                <a:solidFill>
+                  <a:srgbClr val="2E6FA8"/>
+                </a:solidFill>
+                <a:latin typeface="Calibri"/>
+              </a:rPr>
+              <a:t>•  </a:t>
+            </a:r>
+            <a:r>
+              <a:rPr sz="1100">
+                <a:solidFill>
+                  <a:srgbClr val="1A1A1A"/>
+                </a:solidFill>
+                <a:latin typeface="Calibri"/>
+              </a:rPr>
+              <a:t>Clientes — 11K, postal code, province</a:t>
+            </a:r>
+          </a:p>
+          <a:p>
+            <a:pPr algn="l">
+              <a:spcAft>
+                <a:spcPts val="200"/>
+              </a:spcAft>
+            </a:pPr>
+            <a:r>
+              <a:rPr sz="1300" b="1">
+                <a:solidFill>
+                  <a:srgbClr val="2E6FA8"/>
+                </a:solidFill>
+                <a:latin typeface="Calibri"/>
+              </a:rPr>
+              <a:t>•  </a:t>
+            </a:r>
+            <a:r>
+              <a:rPr sz="1100">
+                <a:solidFill>
+                  <a:srgbClr val="1A1A1A"/>
+                </a:solidFill>
+                <a:latin typeface="Calibri"/>
+              </a:rPr>
+              <a:t>Productos — 25 SKUs, 4 sub-families</a:t>
+            </a:r>
+          </a:p>
+          <a:p>
+            <a:pPr algn="l">
+              <a:spcAft>
+                <a:spcPts val="200"/>
+              </a:spcAft>
+            </a:pPr>
+            <a:r>
+              <a:rPr sz="1300" b="1">
+                <a:solidFill>
+                  <a:srgbClr val="2E6FA8"/>
+                </a:solidFill>
+                <a:latin typeface="Calibri"/>
+              </a:rPr>
+              <a:t>•  </a:t>
+            </a:r>
+            <a:r>
+              <a:rPr sz="1100">
+                <a:solidFill>
+                  <a:srgbClr val="1A1A1A"/>
+                </a:solidFill>
+                <a:latin typeface="Calibri"/>
+              </a:rPr>
+              <a:t>Potencial — annual estimate per client × familia</a:t>
+            </a:r>
+          </a:p>
+          <a:p>
+            <a:pPr algn="l">
+              <a:spcAft>
+                <a:spcPts val="200"/>
+              </a:spcAft>
+            </a:pPr>
+            <a:r>
+              <a:rPr sz="1300" b="1">
+                <a:solidFill>
+                  <a:srgbClr val="2E6FA8"/>
+                </a:solidFill>
+                <a:latin typeface="Calibri"/>
+              </a:rPr>
+              <a:t>•  </a:t>
+            </a:r>
+            <a:r>
+              <a:rPr sz="1100">
+                <a:solidFill>
+                  <a:srgbClr val="1A1A1A"/>
+                </a:solidFill>
+                <a:latin typeface="Calibri"/>
+              </a:rPr>
+              <a:t>Campañas — 10 promotional windows</a:t>
+            </a:r>
+          </a:p>
+        </p:txBody>
+      </p:sp>
+      <p:sp>
+        <p:nvSpPr>
+          <p:cNvPr id="9" name="TextBox 8"/>
+          <p:cNvSpPr txBox="1"/>
+          <p:nvPr/>
+        </p:nvSpPr>
+        <p:spPr>
+          <a:xfrm>
+            <a:off x="777240" y="4480560"/>
+            <a:ext cx="3200400" cy="365760"/>
+          </a:xfrm>
+          <a:prstGeom prst="rect">
+            <a:avLst/>
+          </a:prstGeom>
+          <a:noFill/>
+        </p:spPr>
+        <p:txBody>
+          <a:bodyPr wrap="square" lIns="0" rIns="0" tIns="0" bIns="0" anchor="t">
+            <a:spAutoFit/>
+          </a:bodyPr>
+          <a:lstStyle/>
+          <a:p>
+            <a:pPr algn="l"/>
+            <a:r>
+              <a:rPr sz="1100" b="1">
+                <a:solidFill>
+                  <a:srgbClr val="2E6FA8"/>
+                </a:solidFill>
+                <a:latin typeface="Calibri"/>
+              </a:rPr>
+              <a:t>DIRECT VARIABLES</a:t>
+            </a:r>
+          </a:p>
+        </p:txBody>
+      </p:sp>
+      <p:sp>
+        <p:nvSpPr>
+          <p:cNvPr id="10" name="TextBox 9"/>
+          <p:cNvSpPr txBox="1"/>
+          <p:nvPr/>
+        </p:nvSpPr>
+        <p:spPr>
+          <a:xfrm>
+            <a:off x="777240" y="4846320"/>
+            <a:ext cx="3200400" cy="1737360"/>
+          </a:xfrm>
+          <a:prstGeom prst="rect">
+            <a:avLst/>
+          </a:prstGeom>
+          <a:noFill/>
+        </p:spPr>
+        <p:txBody>
+          <a:bodyPr wrap="square" lIns="0" rIns="0">
+            <a:spAutoFit/>
+          </a:bodyPr>
+          <a:lstStyle/>
+          <a:p>
+            <a:pPr algn="l">
+              <a:spcAft>
+                <a:spcPts val="200"/>
+              </a:spcAft>
+            </a:pPr>
+            <a:r>
+              <a:rPr sz="1300" b="1">
+                <a:solidFill>
+                  <a:srgbClr val="2E6FA8"/>
+                </a:solidFill>
+                <a:latin typeface="Calibri"/>
+              </a:rPr>
+              <a:t>•  </a:t>
+            </a:r>
+            <a:r>
+              <a:rPr sz="1100">
+                <a:solidFill>
+                  <a:srgbClr val="1A1A1A"/>
+                </a:solidFill>
+                <a:latin typeface="Calibri"/>
+              </a:rPr>
+              <a:t>fecha · unidades · valores_h</a:t>
+            </a:r>
+          </a:p>
+          <a:p>
+            <a:pPr algn="l">
+              <a:spcAft>
+                <a:spcPts val="200"/>
+              </a:spcAft>
+            </a:pPr>
+            <a:r>
+              <a:rPr sz="1300" b="1">
+                <a:solidFill>
+                  <a:srgbClr val="2E6FA8"/>
+                </a:solidFill>
+                <a:latin typeface="Calibri"/>
+              </a:rPr>
+              <a:t>•  </a:t>
+            </a:r>
+            <a:r>
+              <a:rPr sz="1100">
+                <a:solidFill>
+                  <a:srgbClr val="1A1A1A"/>
+                </a:solidFill>
+                <a:latin typeface="Calibri"/>
+              </a:rPr>
+              <a:t>id_cliente · id_producto</a:t>
+            </a:r>
+          </a:p>
+          <a:p>
+            <a:pPr algn="l">
+              <a:spcAft>
+                <a:spcPts val="200"/>
+              </a:spcAft>
+            </a:pPr>
+            <a:r>
+              <a:rPr sz="1300" b="1">
+                <a:solidFill>
+                  <a:srgbClr val="2E6FA8"/>
+                </a:solidFill>
+                <a:latin typeface="Calibri"/>
+              </a:rPr>
+              <a:t>•  </a:t>
+            </a:r>
+            <a:r>
+              <a:rPr sz="1100">
+                <a:solidFill>
+                  <a:srgbClr val="1A1A1A"/>
+                </a:solidFill>
+                <a:latin typeface="Calibri"/>
+              </a:rPr>
+              <a:t>potencial_h · provincia</a:t>
+            </a:r>
+          </a:p>
+          <a:p>
+            <a:pPr algn="l">
+              <a:spcAft>
+                <a:spcPts val="200"/>
+              </a:spcAft>
+            </a:pPr>
+            <a:r>
+              <a:rPr sz="1300" b="1">
+                <a:solidFill>
+                  <a:srgbClr val="2E6FA8"/>
+                </a:solidFill>
+                <a:latin typeface="Calibri"/>
+              </a:rPr>
+              <a:t>•  </a:t>
+            </a:r>
+            <a:r>
+              <a:rPr sz="1100">
+                <a:solidFill>
+                  <a:srgbClr val="1A1A1A"/>
+                </a:solidFill>
+                <a:latin typeface="Calibri"/>
+              </a:rPr>
+              <a:t>tipo_transaccion (cleaned)</a:t>
+            </a:r>
+          </a:p>
+        </p:txBody>
+      </p:sp>
+      <p:sp>
+        <p:nvSpPr>
+          <p:cNvPr id="11" name="Rounded Rectangle 10"/>
+          <p:cNvSpPr/>
+          <p:nvPr/>
+        </p:nvSpPr>
+        <p:spPr>
+          <a:xfrm>
+            <a:off x="4325112" y="1508760"/>
+            <a:ext cx="3657600" cy="5120640"/>
+          </a:xfrm>
+          <a:prstGeom prst="roundRect">
+            <a:avLst/>
+          </a:prstGeom>
+          <a:solidFill>
+            <a:srgbClr val="1B2A4A"/>
+          </a:solidFill>
+          <a:ln>
+            <a:noFill/>
+          </a:ln>
+        </p:spPr>
+        <p:style>
+          <a:lnRef idx="1">
+            <a:schemeClr val="accent1"/>
+          </a:lnRef>
+          <a:fillRef idx="3">
+            <a:schemeClr val="accent1"/>
+          </a:fillRef>
+          <a:effectRef idx="2">
+            <a:schemeClr val="accent1"/>
+          </a:effectRef>
+          <a:fontRef idx="minor">
+            <a:schemeClr val="lt1"/>
+          </a:fontRef>
+        </p:style>
+        <p:txBody>
+          <a:bodyPr rtlCol="0" anchor="ctr"/>
+          <a:lstStyle/>
+          <a:p>
+            <a:pPr algn="ctr"/>
+          </a:p>
+        </p:txBody>
+      </p:sp>
+      <p:sp>
+        <p:nvSpPr>
+          <p:cNvPr id="12" name="TextBox 11"/>
+          <p:cNvSpPr txBox="1"/>
+          <p:nvPr/>
+        </p:nvSpPr>
+        <p:spPr>
+          <a:xfrm>
+            <a:off x="4553712" y="1691640"/>
+            <a:ext cx="3200400" cy="365760"/>
+          </a:xfrm>
+          <a:prstGeom prst="rect">
+            <a:avLst/>
+          </a:prstGeom>
+          <a:noFill/>
+        </p:spPr>
+        <p:txBody>
+          <a:bodyPr wrap="square" lIns="0" rIns="0" tIns="0" bIns="0" anchor="t">
+            <a:spAutoFit/>
+          </a:bodyPr>
+          <a:lstStyle/>
+          <a:p>
+            <a:pPr algn="l"/>
+            <a:r>
+              <a:rPr sz="1100" b="1">
+                <a:solidFill>
+                  <a:srgbClr val="C9D4E3"/>
+                </a:solidFill>
+                <a:latin typeface="Calibri"/>
+              </a:rPr>
+              <a:t>DERIVED VARIABLES</a:t>
+            </a:r>
+          </a:p>
+        </p:txBody>
+      </p:sp>
+      <p:sp>
+        <p:nvSpPr>
+          <p:cNvPr id="13" name="TextBox 12"/>
+          <p:cNvSpPr txBox="1"/>
+          <p:nvPr/>
+        </p:nvSpPr>
+        <p:spPr>
+          <a:xfrm>
+            <a:off x="4553712" y="2057400"/>
+            <a:ext cx="3200400" cy="4389120"/>
+          </a:xfrm>
+          <a:prstGeom prst="rect">
+            <a:avLst/>
+          </a:prstGeom>
+          <a:noFill/>
+        </p:spPr>
+        <p:txBody>
+          <a:bodyPr wrap="square" lIns="0" rIns="0">
+            <a:spAutoFit/>
+          </a:bodyPr>
+          <a:lstStyle/>
+          <a:p>
+            <a:pPr algn="l">
+              <a:spcAft>
+                <a:spcPts val="200"/>
+              </a:spcAft>
+            </a:pPr>
+            <a:r>
+              <a:rPr sz="1300" b="1">
+                <a:solidFill>
+                  <a:srgbClr val="C9D4E3"/>
+                </a:solidFill>
+                <a:latin typeface="Calibri"/>
+              </a:rPr>
+              <a:t>•  </a:t>
+            </a:r>
+            <a:r>
+              <a:rPr sz="1100">
+                <a:solidFill>
+                  <a:srgbClr val="FFFFFF"/>
+                </a:solidFill>
+                <a:latin typeface="Calibri"/>
+              </a:rPr>
+              <a:t>share_of_potential (trailing 12m)</a:t>
+            </a:r>
+          </a:p>
+          <a:p>
+            <a:pPr algn="l">
+              <a:spcAft>
+                <a:spcPts val="200"/>
+              </a:spcAft>
+            </a:pPr>
+            <a:r>
+              <a:rPr sz="1300" b="1">
+                <a:solidFill>
+                  <a:srgbClr val="C9D4E3"/>
+                </a:solidFill>
+                <a:latin typeface="Calibri"/>
+              </a:rPr>
+              <a:t>•  </a:t>
+            </a:r>
+            <a:r>
+              <a:rPr sz="1100">
+                <a:solidFill>
+                  <a:srgbClr val="FFFFFF"/>
+                </a:solidFill>
+                <a:latin typeface="Calibri"/>
+              </a:rPr>
+              <a:t>mean_interpurchase_days</a:t>
+            </a:r>
+          </a:p>
+          <a:p>
+            <a:pPr algn="l">
+              <a:spcAft>
+                <a:spcPts val="200"/>
+              </a:spcAft>
+            </a:pPr>
+            <a:r>
+              <a:rPr sz="1300" b="1">
+                <a:solidFill>
+                  <a:srgbClr val="C9D4E3"/>
+                </a:solidFill>
+                <a:latin typeface="Calibri"/>
+              </a:rPr>
+              <a:t>•  </a:t>
+            </a:r>
+            <a:r>
+              <a:rPr sz="1100">
+                <a:solidFill>
+                  <a:srgbClr val="FFFFFF"/>
+                </a:solidFill>
+                <a:latin typeface="Calibri"/>
+              </a:rPr>
+              <a:t>cyclicity_score · cycle_progress</a:t>
+            </a:r>
+          </a:p>
+          <a:p>
+            <a:pPr algn="l">
+              <a:spcAft>
+                <a:spcPts val="200"/>
+              </a:spcAft>
+            </a:pPr>
+            <a:r>
+              <a:rPr sz="1300" b="1">
+                <a:solidFill>
+                  <a:srgbClr val="C9D4E3"/>
+                </a:solidFill>
+                <a:latin typeface="Calibri"/>
+              </a:rPr>
+              <a:t>•  </a:t>
+            </a:r>
+            <a:r>
+              <a:rPr sz="1100">
+                <a:solidFill>
+                  <a:srgbClr val="FFFFFF"/>
+                </a:solidFill>
+                <a:latin typeface="Calibri"/>
+              </a:rPr>
+              <a:t>recency_days · last_purchase</a:t>
+            </a:r>
+          </a:p>
+          <a:p>
+            <a:pPr algn="l">
+              <a:spcAft>
+                <a:spcPts val="200"/>
+              </a:spcAft>
+            </a:pPr>
+            <a:r>
+              <a:rPr sz="1300" b="1">
+                <a:solidFill>
+                  <a:srgbClr val="C9D4E3"/>
+                </a:solidFill>
+                <a:latin typeface="Calibri"/>
+              </a:rPr>
+              <a:t>•  </a:t>
+            </a:r>
+            <a:r>
+              <a:rPr sz="1100">
+                <a:solidFill>
+                  <a:srgbClr val="FFFFFF"/>
+                </a:solidFill>
+                <a:latin typeface="Calibri"/>
+              </a:rPr>
+              <a:t>freq_drop_ratio · vol_drop_ratio</a:t>
+            </a:r>
+          </a:p>
+          <a:p>
+            <a:pPr algn="l">
+              <a:spcAft>
+                <a:spcPts val="200"/>
+              </a:spcAft>
+            </a:pPr>
+            <a:r>
+              <a:rPr sz="1300" b="1">
+                <a:solidFill>
+                  <a:srgbClr val="C9D4E3"/>
+                </a:solidFill>
+                <a:latin typeface="Calibri"/>
+              </a:rPr>
+              <a:t>•  </a:t>
+            </a:r>
+            <a:r>
+              <a:rPr sz="1100">
+                <a:solidFill>
+                  <a:srgbClr val="FFFFFF"/>
+                </a:solidFill>
+                <a:latin typeface="Calibri"/>
+              </a:rPr>
+              <a:t>expected_freq_recent (YoY)</a:t>
+            </a:r>
+          </a:p>
+          <a:p>
+            <a:pPr algn="l">
+              <a:spcAft>
+                <a:spcPts val="200"/>
+              </a:spcAft>
+            </a:pPr>
+            <a:r>
+              <a:rPr sz="1300" b="1">
+                <a:solidFill>
+                  <a:srgbClr val="C9D4E3"/>
+                </a:solidFill>
+                <a:latin typeface="Calibri"/>
+              </a:rPr>
+              <a:t>•  </a:t>
+            </a:r>
+            <a:r>
+              <a:rPr sz="1100">
+                <a:solidFill>
+                  <a:srgbClr val="FFFFFF"/>
+                </a:solidFill>
+                <a:latin typeface="Calibri"/>
+              </a:rPr>
+              <a:t>expected_vol_recent (YoY)</a:t>
+            </a:r>
+          </a:p>
+          <a:p>
+            <a:pPr algn="l">
+              <a:spcAft>
+                <a:spcPts val="200"/>
+              </a:spcAft>
+            </a:pPr>
+            <a:r>
+              <a:rPr sz="1300" b="1">
+                <a:solidFill>
+                  <a:srgbClr val="C9D4E3"/>
+                </a:solidFill>
+                <a:latin typeface="Calibri"/>
+              </a:rPr>
+              <a:t>•  </a:t>
+            </a:r>
+            <a:r>
+              <a:rPr sz="1100">
+                <a:solidFill>
+                  <a:srgbClr val="FFFFFF"/>
+                </a:solidFill>
+                <a:latin typeface="Calibri"/>
+              </a:rPr>
+              <a:t>loyalty_tier · trend</a:t>
+            </a:r>
+          </a:p>
+          <a:p>
+            <a:pPr algn="l">
+              <a:spcAft>
+                <a:spcPts val="200"/>
+              </a:spcAft>
+            </a:pPr>
+            <a:r>
+              <a:rPr sz="1300" b="1">
+                <a:solidFill>
+                  <a:srgbClr val="C9D4E3"/>
+                </a:solidFill>
+                <a:latin typeface="Calibri"/>
+              </a:rPr>
+              <a:t>•  </a:t>
+            </a:r>
+            <a:r>
+              <a:rPr sz="1100">
+                <a:solidFill>
+                  <a:srgbClr val="FFFFFF"/>
+                </a:solidFill>
+                <a:latin typeface="Calibri"/>
+              </a:rPr>
+              <a:t>conversion_probability</a:t>
+            </a:r>
+          </a:p>
+          <a:p>
+            <a:pPr algn="l">
+              <a:spcAft>
+                <a:spcPts val="200"/>
+              </a:spcAft>
+            </a:pPr>
+            <a:r>
+              <a:rPr sz="1300" b="1">
+                <a:solidFill>
+                  <a:srgbClr val="C9D4E3"/>
+                </a:solidFill>
+                <a:latin typeface="Calibri"/>
+              </a:rPr>
+              <a:t>•  </a:t>
+            </a:r>
+            <a:r>
+              <a:rPr sz="1100">
+                <a:solidFill>
+                  <a:srgbClr val="FFFFFF"/>
+                </a:solidFill>
+                <a:latin typeface="Calibri"/>
+              </a:rPr>
+              <a:t>score = impact × urgency × conv_prob</a:t>
+            </a:r>
+          </a:p>
+        </p:txBody>
+      </p:sp>
+      <p:sp>
+        <p:nvSpPr>
+          <p:cNvPr id="14" name="Rounded Rectangle 13"/>
+          <p:cNvSpPr/>
+          <p:nvPr/>
+        </p:nvSpPr>
+        <p:spPr>
+          <a:xfrm>
+            <a:off x="8101584" y="1508760"/>
+            <a:ext cx="3657600" cy="5120640"/>
+          </a:xfrm>
+          <a:prstGeom prst="roundRect">
+            <a:avLst/>
+          </a:prstGeom>
+          <a:solidFill>
+            <a:srgbClr val="F4F6FA"/>
+          </a:solidFill>
+          <a:ln>
+            <a:noFill/>
+          </a:ln>
+        </p:spPr>
+        <p:style>
+          <a:lnRef idx="1">
+            <a:schemeClr val="accent1"/>
+          </a:lnRef>
+          <a:fillRef idx="3">
+            <a:schemeClr val="accent1"/>
+          </a:fillRef>
+          <a:effectRef idx="2">
+            <a:schemeClr val="accent1"/>
+          </a:effectRef>
+          <a:fontRef idx="minor">
+            <a:schemeClr val="lt1"/>
+          </a:fontRef>
+        </p:style>
+        <p:txBody>
+          <a:bodyPr rtlCol="0" anchor="ctr"/>
+          <a:lstStyle/>
+          <a:p>
+            <a:pPr algn="ctr"/>
+          </a:p>
+        </p:txBody>
+      </p:sp>
+      <p:sp>
+        <p:nvSpPr>
+          <p:cNvPr id="15" name="TextBox 14"/>
+          <p:cNvSpPr txBox="1"/>
+          <p:nvPr/>
+        </p:nvSpPr>
+        <p:spPr>
+          <a:xfrm>
+            <a:off x="8330184" y="1691640"/>
+            <a:ext cx="3200400" cy="365760"/>
+          </a:xfrm>
+          <a:prstGeom prst="rect">
+            <a:avLst/>
+          </a:prstGeom>
+          <a:noFill/>
+        </p:spPr>
+        <p:txBody>
+          <a:bodyPr wrap="square" lIns="0" rIns="0" tIns="0" bIns="0" anchor="t">
+            <a:spAutoFit/>
+          </a:bodyPr>
+          <a:lstStyle/>
+          <a:p>
+            <a:pPr algn="l"/>
+            <a:r>
+              <a:rPr sz="1100" b="1">
+                <a:solidFill>
+                  <a:srgbClr val="CC6633"/>
+                </a:solidFill>
+                <a:latin typeface="Calibri"/>
+              </a:rPr>
+              <a:t>KEY ASSUMPTIONS</a:t>
+            </a:r>
+          </a:p>
+        </p:txBody>
+      </p:sp>
+      <p:sp>
+        <p:nvSpPr>
+          <p:cNvPr id="16" name="TextBox 15"/>
+          <p:cNvSpPr txBox="1"/>
+          <p:nvPr/>
+        </p:nvSpPr>
+        <p:spPr>
+          <a:xfrm>
+            <a:off x="8330184" y="2057400"/>
+            <a:ext cx="3200400" cy="2286000"/>
+          </a:xfrm>
+          <a:prstGeom prst="rect">
+            <a:avLst/>
+          </a:prstGeom>
+          <a:noFill/>
+        </p:spPr>
+        <p:txBody>
+          <a:bodyPr wrap="square" lIns="0" rIns="0">
+            <a:spAutoFit/>
+          </a:bodyPr>
+          <a:lstStyle/>
+          <a:p>
+            <a:pPr algn="l">
+              <a:spcAft>
+                <a:spcPts val="200"/>
+              </a:spcAft>
+            </a:pPr>
+            <a:r>
+              <a:rPr sz="1300" b="1">
+                <a:solidFill>
+                  <a:srgbClr val="2E6FA8"/>
+                </a:solidFill>
+                <a:latin typeface="Calibri"/>
+              </a:rPr>
+              <a:t>•  </a:t>
+            </a:r>
+            <a:r>
+              <a:rPr sz="1100">
+                <a:solidFill>
+                  <a:srgbClr val="1A1A1A"/>
+                </a:solidFill>
+                <a:latin typeface="Calibri"/>
+              </a:rPr>
+              <a:t>Cyclicity inferred from purchase intervals</a:t>
+            </a:r>
+          </a:p>
+          <a:p>
+            <a:pPr algn="l">
+              <a:spcAft>
+                <a:spcPts val="200"/>
+              </a:spcAft>
+            </a:pPr>
+            <a:r>
+              <a:rPr sz="1300" b="1">
+                <a:solidFill>
+                  <a:srgbClr val="2E6FA8"/>
+                </a:solidFill>
+                <a:latin typeface="Calibri"/>
+              </a:rPr>
+              <a:t>•  </a:t>
+            </a:r>
+            <a:r>
+              <a:rPr sz="1100">
+                <a:solidFill>
+                  <a:srgbClr val="1A1A1A"/>
+                </a:solidFill>
+                <a:latin typeface="Calibri"/>
+              </a:rPr>
+              <a:t>potencial_h is Inibsa's annual estimate (≥0)</a:t>
+            </a:r>
+          </a:p>
+          <a:p>
+            <a:pPr algn="l">
+              <a:spcAft>
+                <a:spcPts val="200"/>
+              </a:spcAft>
+            </a:pPr>
+            <a:r>
+              <a:rPr sz="1300" b="1">
+                <a:solidFill>
+                  <a:srgbClr val="2E6FA8"/>
+                </a:solidFill>
+                <a:latin typeface="Calibri"/>
+              </a:rPr>
+              <a:t>•  </a:t>
+            </a:r>
+            <a:r>
+              <a:rPr sz="1100">
+                <a:solidFill>
+                  <a:srgbClr val="1A1A1A"/>
+                </a:solidFill>
+                <a:latin typeface="Calibri"/>
+              </a:rPr>
+              <a:t>Returns/zero-cost units flagged, not dropped</a:t>
+            </a:r>
+          </a:p>
+          <a:p>
+            <a:pPr algn="l">
+              <a:spcAft>
+                <a:spcPts val="200"/>
+              </a:spcAft>
+            </a:pPr>
+            <a:r>
+              <a:rPr sz="1300" b="1">
+                <a:solidFill>
+                  <a:srgbClr val="2E6FA8"/>
+                </a:solidFill>
+                <a:latin typeface="Calibri"/>
+              </a:rPr>
+              <a:t>•  </a:t>
+            </a:r>
+            <a:r>
+              <a:rPr sz="1100">
+                <a:solidFill>
+                  <a:srgbClr val="1A1A1A"/>
+                </a:solidFill>
+                <a:latin typeface="Calibri"/>
+              </a:rPr>
+              <a:t>Unregistered clients flagged separately</a:t>
+            </a:r>
+          </a:p>
+        </p:txBody>
+      </p:sp>
+      <p:sp>
+        <p:nvSpPr>
+          <p:cNvPr id="17" name="TextBox 16"/>
+          <p:cNvSpPr txBox="1"/>
+          <p:nvPr/>
+        </p:nvSpPr>
+        <p:spPr>
+          <a:xfrm>
+            <a:off x="8330184" y="4297680"/>
+            <a:ext cx="3200400" cy="365760"/>
+          </a:xfrm>
+          <a:prstGeom prst="rect">
+            <a:avLst/>
+          </a:prstGeom>
+          <a:noFill/>
+        </p:spPr>
+        <p:txBody>
+          <a:bodyPr wrap="square" lIns="0" rIns="0" tIns="0" bIns="0" anchor="t">
+            <a:spAutoFit/>
+          </a:bodyPr>
+          <a:lstStyle/>
+          <a:p>
+            <a:pPr algn="l"/>
+            <a:r>
+              <a:rPr sz="1100" b="1">
+                <a:solidFill>
+                  <a:srgbClr val="CC6633"/>
+                </a:solidFill>
+                <a:latin typeface="Calibri"/>
+              </a:rPr>
+              <a:t>WHAT WE CAN'T OBSERVE</a:t>
+            </a:r>
+          </a:p>
+        </p:txBody>
+      </p:sp>
+      <p:sp>
+        <p:nvSpPr>
+          <p:cNvPr id="18" name="TextBox 17"/>
+          <p:cNvSpPr txBox="1"/>
+          <p:nvPr/>
+        </p:nvSpPr>
+        <p:spPr>
+          <a:xfrm>
+            <a:off x="8330184" y="4663440"/>
+            <a:ext cx="3200400" cy="1737360"/>
+          </a:xfrm>
+          <a:prstGeom prst="rect">
+            <a:avLst/>
+          </a:prstGeom>
+          <a:noFill/>
+        </p:spPr>
+        <p:txBody>
+          <a:bodyPr wrap="square" lIns="0" rIns="0" tIns="0" bIns="0" anchor="t">
+            <a:spAutoFit/>
+          </a:bodyPr>
+          <a:lstStyle/>
+          <a:p>
+            <a:pPr algn="l"/>
+            <a:r>
+              <a:rPr sz="1100" b="0">
+                <a:solidFill>
+                  <a:srgbClr val="1A1A1A"/>
+                </a:solidFill>
+                <a:latin typeface="Calibri"/>
+              </a:rPr>
+              <a:t>Competitor purchases are invisible. We INFER un-captured demand from the gap between observed sales and Inibsa's potential estimate. share_of_potential &lt;30% with active recent buying = promiscuous (split with competitors).</a:t>
+            </a:r>
+          </a:p>
+        </p:txBody>
+      </p:sp>
+    </p:spTree>
+  </p:cSld>
+  <p:clrMapOvr>
+    <a:masterClrMapping/>
+  </p:clrMapOvr>
+</p:sld>
+</file>
+
+<file path=ppt/slides/slide5.xml><?xml version="1.0" encoding="utf-8"?>
+<p:sld xmlns:a="http://schemas.openxmlformats.org/drawingml/2006/main" xmlns:p="http://schemas.openxmlformats.org/presentationml/2006/main" xmlns:r="http://schemas.openxmlformats.org/officeDocument/2006/relationships">
+  <p:cSld>
+    <p:spTree>
+      <p:nvGrpSpPr>
+        <p:cNvPr id="1" name=""/>
+        <p:cNvGrpSpPr/>
+        <p:nvPr/>
+      </p:nvGrpSpPr>
+      <p:grpSpPr/>
+      <p:sp>
+        <p:nvSpPr>
+          <p:cNvPr id="2" name="Oval 1"/>
+          <p:cNvSpPr/>
+          <p:nvPr/>
+        </p:nvSpPr>
+        <p:spPr>
+          <a:xfrm>
+            <a:off x="548640" y="457200"/>
+            <a:ext cx="640080" cy="640080"/>
+          </a:xfrm>
+          <a:prstGeom prst="ellipse">
+            <a:avLst/>
+          </a:prstGeom>
+          <a:solidFill>
+            <a:srgbClr val="2E6FA8"/>
+          </a:solidFill>
+          <a:ln>
+            <a:noFill/>
+          </a:ln>
+        </p:spPr>
+        <p:style>
+          <a:lnRef idx="1">
+            <a:schemeClr val="accent1"/>
+          </a:lnRef>
+          <a:fillRef idx="3">
+            <a:schemeClr val="accent1"/>
+          </a:fillRef>
+          <a:effectRef idx="2">
+            <a:schemeClr val="accent1"/>
+          </a:effectRef>
+          <a:fontRef idx="minor">
+            <a:schemeClr val="lt1"/>
+          </a:fontRef>
+        </p:style>
+        <p:txBody>
+          <a:bodyPr rtlCol="0" anchor="ctr"/>
+          <a:lstStyle/>
+          <a:p>
+            <a:pPr algn="ctr"/>
+          </a:p>
+        </p:txBody>
+      </p:sp>
+      <p:sp>
+        <p:nvSpPr>
+          <p:cNvPr id="3" name="TextBox 2"/>
+          <p:cNvSpPr txBox="1"/>
+          <p:nvPr/>
+        </p:nvSpPr>
+        <p:spPr>
+          <a:xfrm>
+            <a:off x="548640" y="502920"/>
+            <a:ext cx="640080" cy="548640"/>
+          </a:xfrm>
+          <a:prstGeom prst="rect">
+            <a:avLst/>
+          </a:prstGeom>
+          <a:noFill/>
+        </p:spPr>
+        <p:txBody>
+          <a:bodyPr wrap="square" lIns="0" rIns="0" tIns="0" bIns="0" anchor="t">
+            <a:spAutoFit/>
+          </a:bodyPr>
+          <a:lstStyle/>
+          <a:p>
+            <a:pPr algn="ctr"/>
+            <a:r>
+              <a:rPr sz="2000" b="1">
+                <a:solidFill>
+                  <a:srgbClr val="FFFFFF"/>
+                </a:solidFill>
+                <a:latin typeface="Calibri"/>
+              </a:rPr>
+              <a:t>04</a:t>
+            </a:r>
+          </a:p>
+        </p:txBody>
+      </p:sp>
+      <p:sp>
+        <p:nvSpPr>
+          <p:cNvPr id="4" name="TextBox 3"/>
+          <p:cNvSpPr txBox="1"/>
+          <p:nvPr/>
+        </p:nvSpPr>
+        <p:spPr>
+          <a:xfrm>
+            <a:off x="1371600" y="411480"/>
+            <a:ext cx="10332720" cy="640080"/>
+          </a:xfrm>
+          <a:prstGeom prst="rect">
+            <a:avLst/>
+          </a:prstGeom>
+          <a:noFill/>
+        </p:spPr>
+        <p:txBody>
+          <a:bodyPr wrap="square" lIns="0" rIns="0" tIns="0" bIns="0" anchor="t">
+            <a:spAutoFit/>
+          </a:bodyPr>
+          <a:lstStyle/>
+          <a:p>
+            <a:pPr algn="l"/>
+            <a:r>
+              <a:rPr sz="2800" b="1">
+                <a:solidFill>
+                  <a:srgbClr val="1B2A4A"/>
+                </a:solidFill>
+                <a:latin typeface="Calibri"/>
+              </a:rPr>
+              <a:t>Output</a:t>
+            </a:r>
+          </a:p>
+        </p:txBody>
+      </p:sp>
+      <p:sp>
+        <p:nvSpPr>
+          <p:cNvPr id="5" name="TextBox 4"/>
+          <p:cNvSpPr txBox="1"/>
+          <p:nvPr/>
+        </p:nvSpPr>
+        <p:spPr>
+          <a:xfrm>
+            <a:off x="1371600" y="960120"/>
+            <a:ext cx="10332720" cy="365760"/>
+          </a:xfrm>
+          <a:prstGeom prst="rect">
+            <a:avLst/>
+          </a:prstGeom>
+          <a:noFill/>
+        </p:spPr>
+        <p:txBody>
+          <a:bodyPr wrap="square" lIns="0" rIns="0" tIns="0" bIns="0" anchor="t">
+            <a:spAutoFit/>
+          </a:bodyPr>
+          <a:lstStyle/>
+          <a:p>
+            <a:pPr algn="l"/>
+            <a:r>
+              <a:rPr sz="1400" b="0">
+                <a:solidFill>
+                  <a:srgbClr val="6B6B6B"/>
+                </a:solidFill>
+                <a:latin typeface="Calibri"/>
+              </a:rPr>
+              <a:t>Alert structure · what's inside · how it's surfaced to the sales team</a:t>
+            </a:r>
+          </a:p>
+        </p:txBody>
+      </p:sp>
+      <p:sp>
+        <p:nvSpPr>
+          <p:cNvPr id="6" name="Rounded Rectangle 5"/>
+          <p:cNvSpPr/>
+          <p:nvPr/>
+        </p:nvSpPr>
+        <p:spPr>
+          <a:xfrm>
+            <a:off x="548640" y="1508760"/>
+            <a:ext cx="6766560" cy="4937760"/>
+          </a:xfrm>
+          <a:prstGeom prst="roundRect">
+            <a:avLst/>
+          </a:prstGeom>
+          <a:solidFill>
+            <a:srgbClr val="1A1A1A"/>
+          </a:solidFill>
+          <a:ln>
+            <a:noFill/>
+          </a:ln>
+        </p:spPr>
+        <p:style>
+          <a:lnRef idx="1">
+            <a:schemeClr val="accent1"/>
+          </a:lnRef>
+          <a:fillRef idx="3">
+            <a:schemeClr val="accent1"/>
+          </a:fillRef>
+          <a:effectRef idx="2">
+            <a:schemeClr val="accent1"/>
+          </a:effectRef>
+          <a:fontRef idx="minor">
+            <a:schemeClr val="lt1"/>
+          </a:fontRef>
+        </p:style>
+        <p:txBody>
+          <a:bodyPr rtlCol="0" anchor="ctr"/>
+          <a:lstStyle/>
+          <a:p>
+            <a:pPr algn="ctr"/>
+          </a:p>
+        </p:txBody>
+      </p:sp>
+      <p:sp>
+        <p:nvSpPr>
+          <p:cNvPr id="7" name="TextBox 6"/>
+          <p:cNvSpPr txBox="1"/>
+          <p:nvPr/>
+        </p:nvSpPr>
+        <p:spPr>
+          <a:xfrm>
+            <a:off x="777240" y="1691640"/>
+            <a:ext cx="6400800" cy="365760"/>
+          </a:xfrm>
+          <a:prstGeom prst="rect">
+            <a:avLst/>
+          </a:prstGeom>
+          <a:noFill/>
+        </p:spPr>
+        <p:txBody>
+          <a:bodyPr wrap="square" lIns="0" rIns="0" tIns="0" bIns="0" anchor="t">
+            <a:spAutoFit/>
+          </a:bodyPr>
+          <a:lstStyle/>
+          <a:p>
+            <a:pPr algn="l"/>
+            <a:r>
+              <a:rPr sz="1100" b="1">
+                <a:solidFill>
+                  <a:srgbClr val="CC6633"/>
+                </a:solidFill>
+                <a:latin typeface="Consolas"/>
+              </a:rPr>
+              <a:t>ONE ALERT — JSON-LIKE</a:t>
+            </a:r>
+          </a:p>
+        </p:txBody>
+      </p:sp>
+      <p:sp>
+        <p:nvSpPr>
+          <p:cNvPr id="8" name="TextBox 7"/>
+          <p:cNvSpPr txBox="1"/>
+          <p:nvPr/>
+        </p:nvSpPr>
+        <p:spPr>
+          <a:xfrm>
+            <a:off x="868680" y="2103120"/>
+            <a:ext cx="2468880" cy="274320"/>
+          </a:xfrm>
+          <a:prstGeom prst="rect">
+            <a:avLst/>
+          </a:prstGeom>
+          <a:noFill/>
+        </p:spPr>
+        <p:txBody>
+          <a:bodyPr wrap="square" lIns="0" rIns="0" tIns="0" bIns="0" anchor="t">
+            <a:spAutoFit/>
+          </a:bodyPr>
+          <a:lstStyle/>
+          <a:p>
+            <a:pPr algn="l"/>
+            <a:r>
+              <a:rPr sz="1100" b="1">
+                <a:solidFill>
+                  <a:srgbClr val="CC6633"/>
+                </a:solidFill>
+                <a:latin typeface="Consolas"/>
+              </a:rPr>
+              <a:t>alert_id</a:t>
+            </a:r>
+          </a:p>
+        </p:txBody>
+      </p:sp>
+      <p:sp>
+        <p:nvSpPr>
+          <p:cNvPr id="9" name="TextBox 8"/>
+          <p:cNvSpPr txBox="1"/>
+          <p:nvPr/>
+        </p:nvSpPr>
+        <p:spPr>
+          <a:xfrm>
+            <a:off x="3337560" y="2103120"/>
+            <a:ext cx="3840480" cy="274320"/>
+          </a:xfrm>
+          <a:prstGeom prst="rect">
+            <a:avLst/>
+          </a:prstGeom>
+          <a:noFill/>
+        </p:spPr>
+        <p:txBody>
+          <a:bodyPr wrap="square" lIns="0" rIns="0" tIns="0" bIns="0" anchor="t">
+            <a:spAutoFit/>
+          </a:bodyPr>
+          <a:lstStyle/>
+          <a:p>
+            <a:pPr algn="l"/>
+            <a:r>
+              <a:rPr sz="1100" b="0">
+                <a:solidFill>
+                  <a:srgbClr val="FFFFFF"/>
+                </a:solidFill>
+                <a:latin typeface="Consolas"/>
+              </a:rPr>
+              <a:t>"ALT-20251229-000001"</a:t>
+            </a:r>
+          </a:p>
+        </p:txBody>
+      </p:sp>
+      <p:sp>
+        <p:nvSpPr>
+          <p:cNvPr id="10" name="TextBox 9"/>
+          <p:cNvSpPr txBox="1"/>
+          <p:nvPr/>
+        </p:nvSpPr>
+        <p:spPr>
+          <a:xfrm>
+            <a:off x="868680" y="2386584"/>
+            <a:ext cx="2468880" cy="274320"/>
+          </a:xfrm>
+          <a:prstGeom prst="rect">
+            <a:avLst/>
+          </a:prstGeom>
+          <a:noFill/>
+        </p:spPr>
+        <p:txBody>
+          <a:bodyPr wrap="square" lIns="0" rIns="0" tIns="0" bIns="0" anchor="t">
+            <a:spAutoFit/>
+          </a:bodyPr>
+          <a:lstStyle/>
+          <a:p>
+            <a:pPr algn="l"/>
+            <a:r>
+              <a:rPr sz="1100" b="1">
+                <a:solidFill>
+                  <a:srgbClr val="CC6633"/>
+                </a:solidFill>
+                <a:latin typeface="Consolas"/>
+              </a:rPr>
+              <a:t>id_cliente</a:t>
+            </a:r>
+          </a:p>
+        </p:txBody>
+      </p:sp>
+      <p:sp>
+        <p:nvSpPr>
+          <p:cNvPr id="11" name="TextBox 10"/>
+          <p:cNvSpPr txBox="1"/>
+          <p:nvPr/>
+        </p:nvSpPr>
+        <p:spPr>
+          <a:xfrm>
+            <a:off x="3337560" y="2386584"/>
+            <a:ext cx="3840480" cy="274320"/>
+          </a:xfrm>
+          <a:prstGeom prst="rect">
+            <a:avLst/>
+          </a:prstGeom>
+          <a:noFill/>
+        </p:spPr>
+        <p:txBody>
+          <a:bodyPr wrap="square" lIns="0" rIns="0" tIns="0" bIns="0" anchor="t">
+            <a:spAutoFit/>
+          </a:bodyPr>
+          <a:lstStyle/>
+          <a:p>
+            <a:pPr algn="l"/>
+            <a:r>
+              <a:rPr sz="1100" b="0">
+                <a:solidFill>
+                  <a:srgbClr val="FFFFFF"/>
+                </a:solidFill>
+                <a:latin typeface="Consolas"/>
+              </a:rPr>
+              <a:t>"40439"</a:t>
+            </a:r>
+          </a:p>
+        </p:txBody>
+      </p:sp>
+      <p:sp>
+        <p:nvSpPr>
+          <p:cNvPr id="12" name="TextBox 11"/>
+          <p:cNvSpPr txBox="1"/>
+          <p:nvPr/>
+        </p:nvSpPr>
+        <p:spPr>
+          <a:xfrm>
+            <a:off x="868680" y="2670048"/>
+            <a:ext cx="2468880" cy="274320"/>
+          </a:xfrm>
+          <a:prstGeom prst="rect">
+            <a:avLst/>
+          </a:prstGeom>
+          <a:noFill/>
+        </p:spPr>
+        <p:txBody>
+          <a:bodyPr wrap="square" lIns="0" rIns="0" tIns="0" bIns="0" anchor="t">
+            <a:spAutoFit/>
+          </a:bodyPr>
+          <a:lstStyle/>
+          <a:p>
+            <a:pPr algn="l"/>
+            <a:r>
+              <a:rPr sz="1100" b="1">
+                <a:solidFill>
+                  <a:srgbClr val="CC6633"/>
+                </a:solidFill>
+                <a:latin typeface="Consolas"/>
+              </a:rPr>
+              <a:t>provincia</a:t>
+            </a:r>
+          </a:p>
+        </p:txBody>
+      </p:sp>
+      <p:sp>
+        <p:nvSpPr>
+          <p:cNvPr id="13" name="TextBox 12"/>
+          <p:cNvSpPr txBox="1"/>
+          <p:nvPr/>
+        </p:nvSpPr>
+        <p:spPr>
+          <a:xfrm>
+            <a:off x="3337560" y="2670048"/>
+            <a:ext cx="3840480" cy="274320"/>
+          </a:xfrm>
+          <a:prstGeom prst="rect">
+            <a:avLst/>
+          </a:prstGeom>
+          <a:noFill/>
+        </p:spPr>
+        <p:txBody>
+          <a:bodyPr wrap="square" lIns="0" rIns="0" tIns="0" bIns="0" anchor="t">
+            <a:spAutoFit/>
+          </a:bodyPr>
+          <a:lstStyle/>
+          <a:p>
+            <a:pPr algn="l"/>
+            <a:r>
+              <a:rPr sz="1100" b="0">
+                <a:solidFill>
+                  <a:srgbClr val="FFFFFF"/>
+                </a:solidFill>
+                <a:latin typeface="Consolas"/>
+              </a:rPr>
+              <a:t>"Zaragoza"</a:t>
+            </a:r>
+          </a:p>
+        </p:txBody>
+      </p:sp>
+      <p:sp>
+        <p:nvSpPr>
+          <p:cNvPr id="14" name="TextBox 13"/>
+          <p:cNvSpPr txBox="1"/>
+          <p:nvPr/>
+        </p:nvSpPr>
+        <p:spPr>
+          <a:xfrm>
+            <a:off x="868680" y="2953512"/>
+            <a:ext cx="2468880" cy="274320"/>
+          </a:xfrm>
+          <a:prstGeom prst="rect">
+            <a:avLst/>
+          </a:prstGeom>
+          <a:noFill/>
+        </p:spPr>
+        <p:txBody>
+          <a:bodyPr wrap="square" lIns="0" rIns="0" tIns="0" bIns="0" anchor="t">
+            <a:spAutoFit/>
+          </a:bodyPr>
+          <a:lstStyle/>
+          <a:p>
+            <a:pPr algn="l"/>
+            <a:r>
+              <a:rPr sz="1100" b="1">
+                <a:solidFill>
+                  <a:srgbClr val="CC6633"/>
+                </a:solidFill>
+                <a:latin typeface="Consolas"/>
+              </a:rPr>
+              <a:t>familia</a:t>
+            </a:r>
+          </a:p>
+        </p:txBody>
+      </p:sp>
+      <p:sp>
+        <p:nvSpPr>
+          <p:cNvPr id="15" name="TextBox 14"/>
+          <p:cNvSpPr txBox="1"/>
+          <p:nvPr/>
+        </p:nvSpPr>
+        <p:spPr>
+          <a:xfrm>
+            <a:off x="3337560" y="2953512"/>
+            <a:ext cx="3840480" cy="274320"/>
+          </a:xfrm>
+          <a:prstGeom prst="rect">
+            <a:avLst/>
+          </a:prstGeom>
+          <a:noFill/>
+        </p:spPr>
+        <p:txBody>
+          <a:bodyPr wrap="square" lIns="0" rIns="0" tIns="0" bIns="0" anchor="t">
+            <a:spAutoFit/>
+          </a:bodyPr>
+          <a:lstStyle/>
+          <a:p>
+            <a:pPr algn="l"/>
+            <a:r>
+              <a:rPr sz="1100" b="0">
+                <a:solidFill>
+                  <a:srgbClr val="FFFFFF"/>
+                </a:solidFill>
+                <a:latin typeface="Consolas"/>
+              </a:rPr>
+              <a:t>"Categoria C2"  (Bioseguridad)</a:t>
+            </a:r>
+          </a:p>
+        </p:txBody>
+      </p:sp>
+      <p:sp>
+        <p:nvSpPr>
+          <p:cNvPr id="16" name="TextBox 15"/>
+          <p:cNvSpPr txBox="1"/>
+          <p:nvPr/>
+        </p:nvSpPr>
+        <p:spPr>
+          <a:xfrm>
+            <a:off x="868680" y="3236976"/>
+            <a:ext cx="2468880" cy="274320"/>
+          </a:xfrm>
+          <a:prstGeom prst="rect">
+            <a:avLst/>
+          </a:prstGeom>
+          <a:noFill/>
+        </p:spPr>
+        <p:txBody>
+          <a:bodyPr wrap="square" lIns="0" rIns="0" tIns="0" bIns="0" anchor="t">
+            <a:spAutoFit/>
+          </a:bodyPr>
+          <a:lstStyle/>
+          <a:p>
+            <a:pPr algn="l"/>
+            <a:r>
+              <a:rPr sz="1100" b="1">
+                <a:solidFill>
+                  <a:srgbClr val="CC6633"/>
+                </a:solidFill>
+                <a:latin typeface="Consolas"/>
+              </a:rPr>
+              <a:t>tipo_alerta</a:t>
+            </a:r>
+          </a:p>
+        </p:txBody>
+      </p:sp>
+      <p:sp>
+        <p:nvSpPr>
+          <p:cNvPr id="17" name="TextBox 16"/>
+          <p:cNvSpPr txBox="1"/>
+          <p:nvPr/>
+        </p:nvSpPr>
+        <p:spPr>
+          <a:xfrm>
+            <a:off x="3337560" y="3236976"/>
+            <a:ext cx="3840480" cy="274320"/>
+          </a:xfrm>
+          <a:prstGeom prst="rect">
+            <a:avLst/>
+          </a:prstGeom>
+          <a:noFill/>
+        </p:spPr>
+        <p:txBody>
+          <a:bodyPr wrap="square" lIns="0" rIns="0" tIns="0" bIns="0" anchor="t">
+            <a:spAutoFit/>
+          </a:bodyPr>
+          <a:lstStyle/>
+          <a:p>
+            <a:pPr algn="l"/>
+            <a:r>
+              <a:rPr sz="1100" b="0">
+                <a:solidFill>
+                  <a:srgbClr val="FFFFFF"/>
+                </a:solidFill>
+                <a:latin typeface="Consolas"/>
+              </a:rPr>
+              <a:t>"capture_window"</a:t>
+            </a:r>
+          </a:p>
+        </p:txBody>
+      </p:sp>
+      <p:sp>
+        <p:nvSpPr>
+          <p:cNvPr id="18" name="TextBox 17"/>
+          <p:cNvSpPr txBox="1"/>
+          <p:nvPr/>
+        </p:nvSpPr>
+        <p:spPr>
+          <a:xfrm>
+            <a:off x="868680" y="3520440"/>
+            <a:ext cx="2468880" cy="274320"/>
+          </a:xfrm>
+          <a:prstGeom prst="rect">
+            <a:avLst/>
+          </a:prstGeom>
+          <a:noFill/>
+        </p:spPr>
+        <p:txBody>
+          <a:bodyPr wrap="square" lIns="0" rIns="0" tIns="0" bIns="0" anchor="t">
+            <a:spAutoFit/>
+          </a:bodyPr>
+          <a:lstStyle/>
+          <a:p>
+            <a:pPr algn="l"/>
+            <a:r>
+              <a:rPr sz="1100" b="1">
+                <a:solidFill>
+                  <a:srgbClr val="CC6633"/>
+                </a:solidFill>
+                <a:latin typeface="Consolas"/>
+              </a:rPr>
+              <a:t>category</a:t>
+            </a:r>
+          </a:p>
+        </p:txBody>
+      </p:sp>
+      <p:sp>
+        <p:nvSpPr>
+          <p:cNvPr id="19" name="TextBox 18"/>
+          <p:cNvSpPr txBox="1"/>
+          <p:nvPr/>
+        </p:nvSpPr>
+        <p:spPr>
+          <a:xfrm>
+            <a:off x="3337560" y="3520440"/>
+            <a:ext cx="3840480" cy="274320"/>
+          </a:xfrm>
+          <a:prstGeom prst="rect">
+            <a:avLst/>
+          </a:prstGeom>
+          <a:noFill/>
+        </p:spPr>
+        <p:txBody>
+          <a:bodyPr wrap="square" lIns="0" rIns="0" tIns="0" bIns="0" anchor="t">
+            <a:spAutoFit/>
+          </a:bodyPr>
+          <a:lstStyle/>
+          <a:p>
+            <a:pPr algn="l"/>
+            <a:r>
+              <a:rPr sz="1100" b="0">
+                <a:solidFill>
+                  <a:srgbClr val="FFFFFF"/>
+                </a:solidFill>
+                <a:latin typeface="Consolas"/>
+              </a:rPr>
+              <a:t>"sales_opportunity"</a:t>
+            </a:r>
+          </a:p>
+        </p:txBody>
+      </p:sp>
+      <p:sp>
+        <p:nvSpPr>
+          <p:cNvPr id="20" name="TextBox 19"/>
+          <p:cNvSpPr txBox="1"/>
+          <p:nvPr/>
+        </p:nvSpPr>
+        <p:spPr>
+          <a:xfrm>
+            <a:off x="868680" y="3803904"/>
+            <a:ext cx="2468880" cy="274320"/>
+          </a:xfrm>
+          <a:prstGeom prst="rect">
+            <a:avLst/>
+          </a:prstGeom>
+          <a:noFill/>
+        </p:spPr>
+        <p:txBody>
+          <a:bodyPr wrap="square" lIns="0" rIns="0" tIns="0" bIns="0" anchor="t">
+            <a:spAutoFit/>
+          </a:bodyPr>
+          <a:lstStyle/>
+          <a:p>
+            <a:pPr algn="l"/>
+            <a:r>
+              <a:rPr sz="1100" b="1">
+                <a:solidFill>
+                  <a:srgbClr val="CC6633"/>
+                </a:solidFill>
+                <a:latin typeface="Consolas"/>
+              </a:rPr>
+              <a:t>prioridad</a:t>
+            </a:r>
+          </a:p>
+        </p:txBody>
+      </p:sp>
+      <p:sp>
+        <p:nvSpPr>
+          <p:cNvPr id="21" name="TextBox 20"/>
+          <p:cNvSpPr txBox="1"/>
+          <p:nvPr/>
+        </p:nvSpPr>
+        <p:spPr>
+          <a:xfrm>
+            <a:off x="3337560" y="3803904"/>
+            <a:ext cx="3840480" cy="274320"/>
+          </a:xfrm>
+          <a:prstGeom prst="rect">
+            <a:avLst/>
+          </a:prstGeom>
+          <a:noFill/>
+        </p:spPr>
+        <p:txBody>
+          <a:bodyPr wrap="square" lIns="0" rIns="0" tIns="0" bIns="0" anchor="t">
+            <a:spAutoFit/>
+          </a:bodyPr>
+          <a:lstStyle/>
+          <a:p>
+            <a:pPr algn="l"/>
+            <a:r>
+              <a:rPr sz="1100" b="0">
+                <a:solidFill>
+                  <a:srgbClr val="FFFFFF"/>
+                </a:solidFill>
+                <a:latin typeface="Consolas"/>
+              </a:rPr>
+              <a:t>"High"</a:t>
+            </a:r>
+          </a:p>
+        </p:txBody>
+      </p:sp>
+      <p:sp>
+        <p:nvSpPr>
+          <p:cNvPr id="22" name="TextBox 21"/>
+          <p:cNvSpPr txBox="1"/>
+          <p:nvPr/>
+        </p:nvSpPr>
+        <p:spPr>
+          <a:xfrm>
+            <a:off x="868680" y="4087368"/>
+            <a:ext cx="2468880" cy="274320"/>
+          </a:xfrm>
+          <a:prstGeom prst="rect">
+            <a:avLst/>
+          </a:prstGeom>
+          <a:noFill/>
+        </p:spPr>
+        <p:txBody>
+          <a:bodyPr wrap="square" lIns="0" rIns="0" tIns="0" bIns="0" anchor="t">
+            <a:spAutoFit/>
+          </a:bodyPr>
+          <a:lstStyle/>
+          <a:p>
+            <a:pPr algn="l"/>
+            <a:r>
+              <a:rPr sz="1100" b="1">
+                <a:solidFill>
+                  <a:srgbClr val="CC6633"/>
+                </a:solidFill>
+                <a:latin typeface="Consolas"/>
+              </a:rPr>
+              <a:t>score</a:t>
+            </a:r>
+          </a:p>
+        </p:txBody>
+      </p:sp>
+      <p:sp>
+        <p:nvSpPr>
+          <p:cNvPr id="23" name="TextBox 22"/>
+          <p:cNvSpPr txBox="1"/>
+          <p:nvPr/>
+        </p:nvSpPr>
+        <p:spPr>
+          <a:xfrm>
+            <a:off x="3337560" y="4087368"/>
+            <a:ext cx="3840480" cy="274320"/>
+          </a:xfrm>
+          <a:prstGeom prst="rect">
+            <a:avLst/>
+          </a:prstGeom>
+          <a:noFill/>
+        </p:spPr>
+        <p:txBody>
+          <a:bodyPr wrap="square" lIns="0" rIns="0" tIns="0" bIns="0" anchor="t">
+            <a:spAutoFit/>
+          </a:bodyPr>
+          <a:lstStyle/>
+          <a:p>
+            <a:pPr algn="l"/>
+            <a:r>
+              <a:rPr sz="1100" b="0">
+                <a:solidFill>
+                  <a:srgbClr val="FFFFFF"/>
+                </a:solidFill>
+                <a:latin typeface="Consolas"/>
+              </a:rPr>
+              <a:t>22,613</a:t>
+            </a:r>
+          </a:p>
+        </p:txBody>
+      </p:sp>
+      <p:sp>
+        <p:nvSpPr>
+          <p:cNvPr id="24" name="TextBox 23"/>
+          <p:cNvSpPr txBox="1"/>
+          <p:nvPr/>
+        </p:nvSpPr>
+        <p:spPr>
+          <a:xfrm>
+            <a:off x="868680" y="4370832"/>
+            <a:ext cx="2468880" cy="274320"/>
+          </a:xfrm>
+          <a:prstGeom prst="rect">
+            <a:avLst/>
+          </a:prstGeom>
+          <a:noFill/>
+        </p:spPr>
+        <p:txBody>
+          <a:bodyPr wrap="square" lIns="0" rIns="0" tIns="0" bIns="0" anchor="t">
+            <a:spAutoFit/>
+          </a:bodyPr>
+          <a:lstStyle/>
+          <a:p>
+            <a:pPr algn="l"/>
+            <a:r>
+              <a:rPr sz="1100" b="1">
+                <a:solidFill>
+                  <a:srgbClr val="CC6633"/>
+                </a:solidFill>
+                <a:latin typeface="Consolas"/>
+              </a:rPr>
+              <a:t>expected_impact_eur</a:t>
+            </a:r>
+          </a:p>
+        </p:txBody>
+      </p:sp>
+      <p:sp>
+        <p:nvSpPr>
+          <p:cNvPr id="25" name="TextBox 24"/>
+          <p:cNvSpPr txBox="1"/>
+          <p:nvPr/>
+        </p:nvSpPr>
+        <p:spPr>
+          <a:xfrm>
+            <a:off x="3337560" y="4370832"/>
+            <a:ext cx="3840480" cy="274320"/>
+          </a:xfrm>
+          <a:prstGeom prst="rect">
+            <a:avLst/>
+          </a:prstGeom>
+          <a:noFill/>
+        </p:spPr>
+        <p:txBody>
+          <a:bodyPr wrap="square" lIns="0" rIns="0" tIns="0" bIns="0" anchor="t">
+            <a:spAutoFit/>
+          </a:bodyPr>
+          <a:lstStyle/>
+          <a:p>
+            <a:pPr algn="l"/>
+            <a:r>
+              <a:rPr sz="1100" b="0">
+                <a:solidFill>
+                  <a:srgbClr val="FFFFFF"/>
+                </a:solidFill>
+                <a:latin typeface="Consolas"/>
+              </a:rPr>
+              <a:t>€2,496  (current × 0.5)</a:t>
+            </a:r>
+          </a:p>
+        </p:txBody>
+      </p:sp>
+      <p:sp>
+        <p:nvSpPr>
+          <p:cNvPr id="26" name="TextBox 25"/>
+          <p:cNvSpPr txBox="1"/>
+          <p:nvPr/>
+        </p:nvSpPr>
+        <p:spPr>
+          <a:xfrm>
+            <a:off x="868680" y="4654296"/>
+            <a:ext cx="2468880" cy="274320"/>
+          </a:xfrm>
+          <a:prstGeom prst="rect">
+            <a:avLst/>
+          </a:prstGeom>
+          <a:noFill/>
+        </p:spPr>
+        <p:txBody>
+          <a:bodyPr wrap="square" lIns="0" rIns="0" tIns="0" bIns="0" anchor="t">
+            <a:spAutoFit/>
+          </a:bodyPr>
+          <a:lstStyle/>
+          <a:p>
+            <a:pPr algn="l"/>
+            <a:r>
+              <a:rPr sz="1100" b="1">
+                <a:solidFill>
+                  <a:srgbClr val="CC6633"/>
+                </a:solidFill>
+                <a:latin typeface="Consolas"/>
+              </a:rPr>
+              <a:t>urgency_factor</a:t>
+            </a:r>
+          </a:p>
+        </p:txBody>
+      </p:sp>
+      <p:sp>
+        <p:nvSpPr>
+          <p:cNvPr id="27" name="TextBox 26"/>
+          <p:cNvSpPr txBox="1"/>
+          <p:nvPr/>
+        </p:nvSpPr>
+        <p:spPr>
+          <a:xfrm>
+            <a:off x="3337560" y="4654296"/>
+            <a:ext cx="3840480" cy="274320"/>
+          </a:xfrm>
+          <a:prstGeom prst="rect">
+            <a:avLst/>
+          </a:prstGeom>
+          <a:noFill/>
+        </p:spPr>
+        <p:txBody>
+          <a:bodyPr wrap="square" lIns="0" rIns="0" tIns="0" bIns="0" anchor="t">
+            <a:spAutoFit/>
+          </a:bodyPr>
+          <a:lstStyle/>
+          <a:p>
+            <a:pPr algn="l"/>
+            <a:r>
+              <a:rPr sz="1100" b="0">
+                <a:solidFill>
+                  <a:srgbClr val="FFFFFF"/>
+                </a:solidFill>
+                <a:latin typeface="Consolas"/>
+              </a:rPr>
+              <a:t>0.70</a:t>
+            </a:r>
+          </a:p>
+        </p:txBody>
+      </p:sp>
+      <p:sp>
+        <p:nvSpPr>
+          <p:cNvPr id="28" name="TextBox 27"/>
+          <p:cNvSpPr txBox="1"/>
+          <p:nvPr/>
+        </p:nvSpPr>
+        <p:spPr>
+          <a:xfrm>
+            <a:off x="868680" y="4937760"/>
+            <a:ext cx="2468880" cy="274320"/>
+          </a:xfrm>
+          <a:prstGeom prst="rect">
+            <a:avLst/>
+          </a:prstGeom>
+          <a:noFill/>
+        </p:spPr>
+        <p:txBody>
+          <a:bodyPr wrap="square" lIns="0" rIns="0" tIns="0" bIns="0" anchor="t">
+            <a:spAutoFit/>
+          </a:bodyPr>
+          <a:lstStyle/>
+          <a:p>
+            <a:pPr algn="l"/>
+            <a:r>
+              <a:rPr sz="1100" b="1">
+                <a:solidFill>
+                  <a:srgbClr val="CC6633"/>
+                </a:solidFill>
+                <a:latin typeface="Consolas"/>
+              </a:rPr>
+              <a:t>conversion_probability</a:t>
+            </a:r>
+          </a:p>
+        </p:txBody>
+      </p:sp>
+      <p:sp>
+        <p:nvSpPr>
+          <p:cNvPr id="29" name="TextBox 28"/>
+          <p:cNvSpPr txBox="1"/>
+          <p:nvPr/>
+        </p:nvSpPr>
+        <p:spPr>
+          <a:xfrm>
+            <a:off x="3337560" y="4937760"/>
+            <a:ext cx="3840480" cy="274320"/>
+          </a:xfrm>
+          <a:prstGeom prst="rect">
+            <a:avLst/>
+          </a:prstGeom>
+          <a:noFill/>
+        </p:spPr>
+        <p:txBody>
+          <a:bodyPr wrap="square" lIns="0" rIns="0" tIns="0" bIns="0" anchor="t">
+            <a:spAutoFit/>
+          </a:bodyPr>
+          <a:lstStyle/>
+          <a:p>
+            <a:pPr algn="l"/>
+            <a:r>
+              <a:rPr sz="1100" b="0">
+                <a:solidFill>
+                  <a:srgbClr val="FFFFFF"/>
+                </a:solidFill>
+                <a:latin typeface="Consolas"/>
+              </a:rPr>
+              <a:t>0.83  (near-loyal)</a:t>
+            </a:r>
+          </a:p>
+        </p:txBody>
+      </p:sp>
+      <p:sp>
+        <p:nvSpPr>
+          <p:cNvPr id="30" name="TextBox 29"/>
+          <p:cNvSpPr txBox="1"/>
+          <p:nvPr/>
+        </p:nvSpPr>
+        <p:spPr>
+          <a:xfrm>
+            <a:off x="868680" y="5221224"/>
+            <a:ext cx="2468880" cy="274320"/>
+          </a:xfrm>
+          <a:prstGeom prst="rect">
+            <a:avLst/>
+          </a:prstGeom>
+          <a:noFill/>
+        </p:spPr>
+        <p:txBody>
+          <a:bodyPr wrap="square" lIns="0" rIns="0" tIns="0" bIns="0" anchor="t">
+            <a:spAutoFit/>
+          </a:bodyPr>
+          <a:lstStyle/>
+          <a:p>
+            <a:pPr algn="l"/>
+            <a:r>
+              <a:rPr sz="1100" b="1">
+                <a:solidFill>
+                  <a:srgbClr val="CC6633"/>
+                </a:solidFill>
+                <a:latin typeface="Consolas"/>
+              </a:rPr>
+              <a:t>canal</a:t>
+            </a:r>
+          </a:p>
+        </p:txBody>
+      </p:sp>
+      <p:sp>
+        <p:nvSpPr>
+          <p:cNvPr id="31" name="TextBox 30"/>
+          <p:cNvSpPr txBox="1"/>
+          <p:nvPr/>
+        </p:nvSpPr>
+        <p:spPr>
+          <a:xfrm>
+            <a:off x="3337560" y="5221224"/>
+            <a:ext cx="3840480" cy="274320"/>
+          </a:xfrm>
+          <a:prstGeom prst="rect">
+            <a:avLst/>
+          </a:prstGeom>
+          <a:noFill/>
+        </p:spPr>
+        <p:txBody>
+          <a:bodyPr wrap="square" lIns="0" rIns="0" tIns="0" bIns="0" anchor="t">
+            <a:spAutoFit/>
+          </a:bodyPr>
+          <a:lstStyle/>
+          <a:p>
+            <a:pPr algn="l"/>
+            <a:r>
+              <a:rPr sz="1100" b="0">
+                <a:solidFill>
+                  <a:srgbClr val="FFFFFF"/>
+                </a:solidFill>
+                <a:latin typeface="Consolas"/>
+              </a:rPr>
+              <a:t>"delegado"</a:t>
+            </a:r>
+          </a:p>
+        </p:txBody>
+      </p:sp>
+      <p:sp>
+        <p:nvSpPr>
+          <p:cNvPr id="32" name="TextBox 31"/>
+          <p:cNvSpPr txBox="1"/>
+          <p:nvPr/>
+        </p:nvSpPr>
+        <p:spPr>
+          <a:xfrm>
+            <a:off x="868680" y="5504688"/>
+            <a:ext cx="2468880" cy="274320"/>
+          </a:xfrm>
+          <a:prstGeom prst="rect">
+            <a:avLst/>
+          </a:prstGeom>
+          <a:noFill/>
+        </p:spPr>
+        <p:txBody>
+          <a:bodyPr wrap="square" lIns="0" rIns="0" tIns="0" bIns="0" anchor="t">
+            <a:spAutoFit/>
+          </a:bodyPr>
+          <a:lstStyle/>
+          <a:p>
+            <a:pPr algn="l"/>
+            <a:r>
+              <a:rPr sz="1100" b="1">
+                <a:solidFill>
+                  <a:srgbClr val="CC6633"/>
+                </a:solidFill>
+                <a:latin typeface="Consolas"/>
+              </a:rPr>
+              <a:t>contact_window_days</a:t>
+            </a:r>
+          </a:p>
+        </p:txBody>
+      </p:sp>
+      <p:sp>
+        <p:nvSpPr>
+          <p:cNvPr id="33" name="TextBox 32"/>
+          <p:cNvSpPr txBox="1"/>
+          <p:nvPr/>
+        </p:nvSpPr>
+        <p:spPr>
+          <a:xfrm>
+            <a:off x="3337560" y="5504688"/>
+            <a:ext cx="3840480" cy="274320"/>
+          </a:xfrm>
+          <a:prstGeom prst="rect">
+            <a:avLst/>
+          </a:prstGeom>
+          <a:noFill/>
+        </p:spPr>
+        <p:txBody>
+          <a:bodyPr wrap="square" lIns="0" rIns="0" tIns="0" bIns="0" anchor="t">
+            <a:spAutoFit/>
+          </a:bodyPr>
+          <a:lstStyle/>
+          <a:p>
+            <a:pPr algn="l"/>
+            <a:r>
+              <a:rPr sz="1100" b="0">
+                <a:solidFill>
+                  <a:srgbClr val="FFFFFF"/>
+                </a:solidFill>
+                <a:latin typeface="Consolas"/>
+              </a:rPr>
+              <a:t>6  (dynamic)</a:t>
+            </a:r>
+          </a:p>
+        </p:txBody>
+      </p:sp>
+      <p:sp>
+        <p:nvSpPr>
+          <p:cNvPr id="34" name="TextBox 33"/>
+          <p:cNvSpPr txBox="1"/>
+          <p:nvPr/>
+        </p:nvSpPr>
+        <p:spPr>
+          <a:xfrm>
+            <a:off x="868680" y="5788152"/>
+            <a:ext cx="2468880" cy="274320"/>
+          </a:xfrm>
+          <a:prstGeom prst="rect">
+            <a:avLst/>
+          </a:prstGeom>
+          <a:noFill/>
+        </p:spPr>
+        <p:txBody>
+          <a:bodyPr wrap="square" lIns="0" rIns="0" tIns="0" bIns="0" anchor="t">
+            <a:spAutoFit/>
+          </a:bodyPr>
+          <a:lstStyle/>
+          <a:p>
+            <a:pPr algn="l"/>
+            <a:r>
+              <a:rPr sz="1100" b="1">
+                <a:solidFill>
+                  <a:srgbClr val="CC6633"/>
+                </a:solidFill>
+                <a:latin typeface="Consolas"/>
+              </a:rPr>
+              <a:t>motivo</a:t>
+            </a:r>
+          </a:p>
+        </p:txBody>
+      </p:sp>
+      <p:sp>
+        <p:nvSpPr>
+          <p:cNvPr id="35" name="TextBox 34"/>
+          <p:cNvSpPr txBox="1"/>
+          <p:nvPr/>
+        </p:nvSpPr>
+        <p:spPr>
+          <a:xfrm>
+            <a:off x="3337560" y="5788152"/>
+            <a:ext cx="3840480" cy="274320"/>
+          </a:xfrm>
+          <a:prstGeom prst="rect">
+            <a:avLst/>
+          </a:prstGeom>
+          <a:noFill/>
+        </p:spPr>
+        <p:txBody>
+          <a:bodyPr wrap="square" lIns="0" rIns="0" tIns="0" bIns="0" anchor="t">
+            <a:spAutoFit/>
+          </a:bodyPr>
+          <a:lstStyle/>
+          <a:p>
+            <a:pPr algn="l"/>
+            <a:r>
+              <a:rPr sz="1100" b="0">
+                <a:solidFill>
+                  <a:srgbClr val="FFFFFF"/>
+                </a:solidFill>
+                <a:latin typeface="Consolas"/>
+              </a:rPr>
+              <a:t>"Promiscuous client: 27% share..."</a:t>
+            </a:r>
+          </a:p>
+        </p:txBody>
+      </p:sp>
+      <p:sp>
+        <p:nvSpPr>
+          <p:cNvPr id="36" name="TextBox 35"/>
+          <p:cNvSpPr txBox="1"/>
+          <p:nvPr/>
+        </p:nvSpPr>
+        <p:spPr>
+          <a:xfrm>
+            <a:off x="868680" y="6071616"/>
+            <a:ext cx="2468880" cy="274320"/>
+          </a:xfrm>
+          <a:prstGeom prst="rect">
+            <a:avLst/>
+          </a:prstGeom>
+          <a:noFill/>
+        </p:spPr>
+        <p:txBody>
+          <a:bodyPr wrap="square" lIns="0" rIns="0" tIns="0" bIns="0" anchor="t">
+            <a:spAutoFit/>
+          </a:bodyPr>
+          <a:lstStyle/>
+          <a:p>
+            <a:pPr algn="l"/>
+            <a:r>
+              <a:rPr sz="1100" b="1">
+                <a:solidFill>
+                  <a:srgbClr val="CC6633"/>
+                </a:solidFill>
+                <a:latin typeface="Consolas"/>
+              </a:rPr>
+              <a:t>trace_features</a:t>
+            </a:r>
+          </a:p>
+        </p:txBody>
+      </p:sp>
+      <p:sp>
+        <p:nvSpPr>
+          <p:cNvPr id="37" name="TextBox 36"/>
+          <p:cNvSpPr txBox="1"/>
+          <p:nvPr/>
+        </p:nvSpPr>
+        <p:spPr>
+          <a:xfrm>
+            <a:off x="3337560" y="6071616"/>
+            <a:ext cx="3840480" cy="274320"/>
+          </a:xfrm>
+          <a:prstGeom prst="rect">
+            <a:avLst/>
+          </a:prstGeom>
+          <a:noFill/>
+        </p:spPr>
+        <p:txBody>
+          <a:bodyPr wrap="square" lIns="0" rIns="0" tIns="0" bIns="0" anchor="t">
+            <a:spAutoFit/>
+          </a:bodyPr>
+          <a:lstStyle/>
+          <a:p>
+            <a:pPr algn="l"/>
+            <a:r>
+              <a:rPr sz="1100" b="0">
+                <a:solidFill>
+                  <a:srgbClr val="FFFFFF"/>
+                </a:solidFill>
+                <a:latin typeface="Consolas"/>
+              </a:rPr>
+              <a:t>{ share: 0.27, current: 4,993, ... }</a:t>
+            </a:r>
+          </a:p>
+        </p:txBody>
+      </p:sp>
+      <p:sp>
+        <p:nvSpPr>
+          <p:cNvPr id="38" name="TextBox 37"/>
+          <p:cNvSpPr txBox="1"/>
+          <p:nvPr/>
+        </p:nvSpPr>
+        <p:spPr>
+          <a:xfrm>
+            <a:off x="7543800" y="1691640"/>
+            <a:ext cx="4114800" cy="365760"/>
+          </a:xfrm>
+          <a:prstGeom prst="rect">
+            <a:avLst/>
+          </a:prstGeom>
+          <a:noFill/>
+        </p:spPr>
+        <p:txBody>
+          <a:bodyPr wrap="square" lIns="0" rIns="0" tIns="0" bIns="0" anchor="t">
+            <a:spAutoFit/>
+          </a:bodyPr>
+          <a:lstStyle/>
+          <a:p>
+            <a:pPr algn="l"/>
+            <a:r>
+              <a:rPr sz="1100" b="1">
+                <a:solidFill>
+                  <a:srgbClr val="2E6FA8"/>
+                </a:solidFill>
+                <a:latin typeface="Calibri"/>
+              </a:rPr>
+              <a:t>HOW IT'S SURFACED</a:t>
+            </a:r>
+          </a:p>
+        </p:txBody>
+      </p:sp>
+      <p:sp>
+        <p:nvSpPr>
+          <p:cNvPr id="39" name="Rounded Rectangle 38"/>
+          <p:cNvSpPr/>
+          <p:nvPr/>
+        </p:nvSpPr>
+        <p:spPr>
+          <a:xfrm>
+            <a:off x="7543800" y="2103120"/>
+            <a:ext cx="4114800" cy="1325880"/>
+          </a:xfrm>
+          <a:prstGeom prst="roundRect">
+            <a:avLst/>
+          </a:prstGeom>
+          <a:solidFill>
+            <a:srgbClr val="F4F6FA"/>
+          </a:solidFill>
+          <a:ln>
+            <a:noFill/>
+          </a:ln>
+        </p:spPr>
+        <p:style>
+          <a:lnRef idx="1">
+            <a:schemeClr val="accent1"/>
+          </a:lnRef>
+          <a:fillRef idx="3">
+            <a:schemeClr val="accent1"/>
+          </a:fillRef>
+          <a:effectRef idx="2">
+            <a:schemeClr val="accent1"/>
+          </a:effectRef>
+          <a:fontRef idx="minor">
+            <a:schemeClr val="lt1"/>
+          </a:fontRef>
+        </p:style>
+        <p:txBody>
+          <a:bodyPr rtlCol="0" anchor="ctr"/>
+          <a:lstStyle/>
+          <a:p>
+            <a:pPr algn="ctr"/>
+          </a:p>
+        </p:txBody>
+      </p:sp>
+      <p:sp>
+        <p:nvSpPr>
+          <p:cNvPr id="40" name="Rectangle 39"/>
+          <p:cNvSpPr/>
+          <p:nvPr/>
+        </p:nvSpPr>
+        <p:spPr>
+          <a:xfrm>
+            <a:off x="7543800" y="2103120"/>
+            <a:ext cx="91440" cy="1325880"/>
+          </a:xfrm>
+          <a:prstGeom prst="rect">
+            <a:avLst/>
+          </a:prstGeom>
+          <a:solidFill>
+            <a:srgbClr val="2E6FA8"/>
+          </a:solidFill>
+          <a:ln>
+            <a:noFill/>
+          </a:ln>
+        </p:spPr>
+        <p:style>
+          <a:lnRef idx="1">
+            <a:schemeClr val="accent1"/>
+          </a:lnRef>
+          <a:fillRef idx="3">
+            <a:schemeClr val="accent1"/>
+          </a:fillRef>
+          <a:effectRef idx="2">
+            <a:schemeClr val="accent1"/>
+          </a:effectRef>
+          <a:fontRef idx="minor">
+            <a:schemeClr val="lt1"/>
+          </a:fontRef>
+        </p:style>
+        <p:txBody>
+          <a:bodyPr rtlCol="0" anchor="ctr"/>
+          <a:lstStyle/>
+          <a:p>
+            <a:pPr algn="ctr"/>
+          </a:p>
+        </p:txBody>
+      </p:sp>
+      <p:sp>
+        <p:nvSpPr>
+          <p:cNvPr id="41" name="TextBox 40"/>
+          <p:cNvSpPr txBox="1"/>
+          <p:nvPr/>
+        </p:nvSpPr>
+        <p:spPr>
+          <a:xfrm>
+            <a:off x="7772400" y="2286000"/>
+            <a:ext cx="3840480" cy="365760"/>
+          </a:xfrm>
+          <a:prstGeom prst="rect">
+            <a:avLst/>
+          </a:prstGeom>
+          <a:noFill/>
+        </p:spPr>
+        <p:txBody>
+          <a:bodyPr wrap="square" lIns="0" rIns="0" tIns="0" bIns="0" anchor="t">
+            <a:spAutoFit/>
+          </a:bodyPr>
+          <a:lstStyle/>
+          <a:p>
+            <a:pPr algn="l"/>
+            <a:r>
+              <a:rPr sz="1400" b="1">
+                <a:solidFill>
+                  <a:srgbClr val="1B2A4A"/>
+                </a:solidFill>
+                <a:latin typeface="Calibri"/>
+              </a:rPr>
+              <a:t>Streamlit dashboard</a:t>
+            </a:r>
+          </a:p>
+        </p:txBody>
+      </p:sp>
+      <p:sp>
+        <p:nvSpPr>
+          <p:cNvPr id="42" name="TextBox 41"/>
+          <p:cNvSpPr txBox="1"/>
+          <p:nvPr/>
+        </p:nvSpPr>
+        <p:spPr>
+          <a:xfrm>
+            <a:off x="7772400" y="2697480"/>
+            <a:ext cx="3840480" cy="640080"/>
+          </a:xfrm>
+          <a:prstGeom prst="rect">
+            <a:avLst/>
+          </a:prstGeom>
+          <a:noFill/>
+        </p:spPr>
+        <p:txBody>
+          <a:bodyPr wrap="square" lIns="0" rIns="0" tIns="0" bIns="0" anchor="t">
+            <a:spAutoFit/>
+          </a:bodyPr>
+          <a:lstStyle/>
+          <a:p>
+            <a:pPr algn="l"/>
+            <a:r>
+              <a:rPr sz="1100" b="0">
+                <a:solidFill>
+                  <a:srgbClr val="1A1A1A"/>
+                </a:solidFill>
+                <a:latin typeface="Calibri"/>
+              </a:rPr>
+              <a:t>3 tabs · Client view (4 categories) · Monitoring · Learning loop</a:t>
+            </a:r>
+          </a:p>
+        </p:txBody>
+      </p:sp>
+      <p:sp>
+        <p:nvSpPr>
+          <p:cNvPr id="43" name="Rounded Rectangle 42"/>
+          <p:cNvSpPr/>
+          <p:nvPr/>
+        </p:nvSpPr>
+        <p:spPr>
+          <a:xfrm>
+            <a:off x="7543800" y="3566160"/>
+            <a:ext cx="4114800" cy="1325880"/>
+          </a:xfrm>
+          <a:prstGeom prst="roundRect">
+            <a:avLst/>
+          </a:prstGeom>
+          <a:solidFill>
+            <a:srgbClr val="F4F6FA"/>
+          </a:solidFill>
+          <a:ln>
+            <a:noFill/>
+          </a:ln>
+        </p:spPr>
+        <p:style>
+          <a:lnRef idx="1">
+            <a:schemeClr val="accent1"/>
+          </a:lnRef>
+          <a:fillRef idx="3">
+            <a:schemeClr val="accent1"/>
+          </a:fillRef>
+          <a:effectRef idx="2">
+            <a:schemeClr val="accent1"/>
+          </a:effectRef>
+          <a:fontRef idx="minor">
+            <a:schemeClr val="lt1"/>
+          </a:fontRef>
+        </p:style>
+        <p:txBody>
+          <a:bodyPr rtlCol="0" anchor="ctr"/>
+          <a:lstStyle/>
+          <a:p>
+            <a:pPr algn="ctr"/>
+          </a:p>
+        </p:txBody>
+      </p:sp>
+      <p:sp>
+        <p:nvSpPr>
+          <p:cNvPr id="44" name="Rectangle 43"/>
+          <p:cNvSpPr/>
+          <p:nvPr/>
+        </p:nvSpPr>
+        <p:spPr>
+          <a:xfrm>
+            <a:off x="7543800" y="3566160"/>
+            <a:ext cx="91440" cy="1325880"/>
+          </a:xfrm>
+          <a:prstGeom prst="rect">
+            <a:avLst/>
+          </a:prstGeom>
+          <a:solidFill>
+            <a:srgbClr val="5A7A9A"/>
+          </a:solidFill>
+          <a:ln>
+            <a:noFill/>
+          </a:ln>
+        </p:spPr>
+        <p:style>
+          <a:lnRef idx="1">
+            <a:schemeClr val="accent1"/>
+          </a:lnRef>
+          <a:fillRef idx="3">
+            <a:schemeClr val="accent1"/>
+          </a:fillRef>
+          <a:effectRef idx="2">
+            <a:schemeClr val="accent1"/>
+          </a:effectRef>
+          <a:fontRef idx="minor">
+            <a:schemeClr val="lt1"/>
+          </a:fontRef>
+        </p:style>
+        <p:txBody>
+          <a:bodyPr rtlCol="0" anchor="ctr"/>
+          <a:lstStyle/>
+          <a:p>
+            <a:pPr algn="ctr"/>
+          </a:p>
+        </p:txBody>
+      </p:sp>
+      <p:sp>
+        <p:nvSpPr>
+          <p:cNvPr id="45" name="TextBox 44"/>
+          <p:cNvSpPr txBox="1"/>
+          <p:nvPr/>
+        </p:nvSpPr>
+        <p:spPr>
+          <a:xfrm>
+            <a:off x="7772400" y="3749040"/>
+            <a:ext cx="3840480" cy="365760"/>
+          </a:xfrm>
+          <a:prstGeom prst="rect">
+            <a:avLst/>
+          </a:prstGeom>
+          <a:noFill/>
+        </p:spPr>
+        <p:txBody>
+          <a:bodyPr wrap="square" lIns="0" rIns="0" tIns="0" bIns="0" anchor="t">
+            <a:spAutoFit/>
+          </a:bodyPr>
+          <a:lstStyle/>
+          <a:p>
+            <a:pPr algn="l"/>
+            <a:r>
+              <a:rPr sz="1400" b="1">
+                <a:solidFill>
+                  <a:srgbClr val="1B2A4A"/>
+                </a:solidFill>
+                <a:latin typeface="Calibri"/>
+              </a:rPr>
+              <a:t>CSV / JSON export</a:t>
+            </a:r>
+          </a:p>
+        </p:txBody>
+      </p:sp>
+      <p:sp>
+        <p:nvSpPr>
+          <p:cNvPr id="46" name="TextBox 45"/>
+          <p:cNvSpPr txBox="1"/>
+          <p:nvPr/>
+        </p:nvSpPr>
+        <p:spPr>
+          <a:xfrm>
+            <a:off x="7772400" y="4160520"/>
+            <a:ext cx="3840480" cy="640080"/>
+          </a:xfrm>
+          <a:prstGeom prst="rect">
+            <a:avLst/>
+          </a:prstGeom>
+          <a:noFill/>
+        </p:spPr>
+        <p:txBody>
+          <a:bodyPr wrap="square" lIns="0" rIns="0" tIns="0" bIns="0" anchor="t">
+            <a:spAutoFit/>
+          </a:bodyPr>
+          <a:lstStyle/>
+          <a:p>
+            <a:pPr algn="l"/>
+            <a:r>
+              <a:rPr sz="1100" b="0">
+                <a:solidFill>
+                  <a:srgbClr val="1A1A1A"/>
+                </a:solidFill>
+                <a:latin typeface="Calibri"/>
+              </a:rPr>
+              <a:t>Filtered call list · HubSpot Tasks-shaped JSON</a:t>
+            </a:r>
+          </a:p>
+        </p:txBody>
+      </p:sp>
+      <p:sp>
+        <p:nvSpPr>
+          <p:cNvPr id="47" name="Rounded Rectangle 46"/>
+          <p:cNvSpPr/>
+          <p:nvPr/>
+        </p:nvSpPr>
+        <p:spPr>
+          <a:xfrm>
+            <a:off x="7543800" y="5029200"/>
+            <a:ext cx="4114800" cy="1325880"/>
+          </a:xfrm>
+          <a:prstGeom prst="roundRect">
+            <a:avLst/>
+          </a:prstGeom>
+          <a:solidFill>
+            <a:srgbClr val="F4F6FA"/>
+          </a:solidFill>
+          <a:ln>
+            <a:noFill/>
+          </a:ln>
+        </p:spPr>
+        <p:style>
+          <a:lnRef idx="1">
+            <a:schemeClr val="accent1"/>
+          </a:lnRef>
+          <a:fillRef idx="3">
+            <a:schemeClr val="accent1"/>
+          </a:fillRef>
+          <a:effectRef idx="2">
+            <a:schemeClr val="accent1"/>
+          </a:effectRef>
+          <a:fontRef idx="minor">
+            <a:schemeClr val="lt1"/>
+          </a:fontRef>
+        </p:style>
+        <p:txBody>
+          <a:bodyPr rtlCol="0" anchor="ctr"/>
+          <a:lstStyle/>
+          <a:p>
+            <a:pPr algn="ctr"/>
+          </a:p>
+        </p:txBody>
+      </p:sp>
+      <p:sp>
+        <p:nvSpPr>
+          <p:cNvPr id="48" name="Rectangle 47"/>
+          <p:cNvSpPr/>
+          <p:nvPr/>
+        </p:nvSpPr>
+        <p:spPr>
+          <a:xfrm>
+            <a:off x="7543800" y="5029200"/>
+            <a:ext cx="91440" cy="1325880"/>
+          </a:xfrm>
+          <a:prstGeom prst="rect">
+            <a:avLst/>
+          </a:prstGeom>
+          <a:solidFill>
+            <a:srgbClr val="1B2A4A"/>
+          </a:solidFill>
+          <a:ln>
+            <a:noFill/>
+          </a:ln>
+        </p:spPr>
+        <p:style>
+          <a:lnRef idx="1">
+            <a:schemeClr val="accent1"/>
+          </a:lnRef>
+          <a:fillRef idx="3">
+            <a:schemeClr val="accent1"/>
+          </a:fillRef>
+          <a:effectRef idx="2">
+            <a:schemeClr val="accent1"/>
+          </a:effectRef>
+          <a:fontRef idx="minor">
+            <a:schemeClr val="lt1"/>
+          </a:fontRef>
+        </p:style>
+        <p:txBody>
+          <a:bodyPr rtlCol="0" anchor="ctr"/>
+          <a:lstStyle/>
+          <a:p>
+            <a:pPr algn="ctr"/>
+          </a:p>
+        </p:txBody>
+      </p:sp>
+      <p:sp>
+        <p:nvSpPr>
+          <p:cNvPr id="49" name="TextBox 48"/>
+          <p:cNvSpPr txBox="1"/>
+          <p:nvPr/>
+        </p:nvSpPr>
+        <p:spPr>
+          <a:xfrm>
+            <a:off x="7772400" y="5212080"/>
+            <a:ext cx="3840480" cy="365760"/>
+          </a:xfrm>
+          <a:prstGeom prst="rect">
+            <a:avLst/>
+          </a:prstGeom>
+          <a:noFill/>
+        </p:spPr>
+        <p:txBody>
+          <a:bodyPr wrap="square" lIns="0" rIns="0" tIns="0" bIns="0" anchor="t">
+            <a:spAutoFit/>
+          </a:bodyPr>
+          <a:lstStyle/>
+          <a:p>
+            <a:pPr algn="l"/>
+            <a:r>
+              <a:rPr sz="1400" b="1">
+                <a:solidFill>
+                  <a:srgbClr val="1B2A4A"/>
+                </a:solidFill>
+                <a:latin typeface="Calibri"/>
+              </a:rPr>
+              <a:t>Daily call list</a:t>
+            </a:r>
+          </a:p>
+        </p:txBody>
+      </p:sp>
+      <p:sp>
+        <p:nvSpPr>
+          <p:cNvPr id="50" name="TextBox 49"/>
+          <p:cNvSpPr txBox="1"/>
+          <p:nvPr/>
+        </p:nvSpPr>
+        <p:spPr>
+          <a:xfrm>
+            <a:off x="7772400" y="5623560"/>
+            <a:ext cx="3840480" cy="640080"/>
+          </a:xfrm>
+          <a:prstGeom prst="rect">
+            <a:avLst/>
+          </a:prstGeom>
+          <a:noFill/>
+        </p:spPr>
+        <p:txBody>
+          <a:bodyPr wrap="square" lIns="0" rIns="0" tIns="0" bIns="0" anchor="t">
+            <a:spAutoFit/>
+          </a:bodyPr>
+          <a:lstStyle/>
+          <a:p>
+            <a:pPr algn="l"/>
+            <a:r>
+              <a:rPr sz="1100" b="0">
+                <a:solidFill>
+                  <a:srgbClr val="1A1A1A"/>
+                </a:solidFill>
+                <a:latin typeface="Calibri"/>
+              </a:rPr>
+              <a:t>🔴 Lost · 🟠 Loss risk · 🟡 Sales opportunity · 🟢 Healthy</a:t>
+            </a:r>
+          </a:p>
+        </p:txBody>
+      </p:sp>
+      <p:sp>
+        <p:nvSpPr>
+          <p:cNvPr id="51" name="TextBox 50"/>
+          <p:cNvSpPr txBox="1"/>
+          <p:nvPr/>
+        </p:nvSpPr>
+        <p:spPr>
+          <a:xfrm>
+            <a:off x="7543800" y="6400800"/>
+            <a:ext cx="4114800" cy="274320"/>
+          </a:xfrm>
+          <a:prstGeom prst="rect">
+            <a:avLst/>
+          </a:prstGeom>
+          <a:noFill/>
+        </p:spPr>
+        <p:txBody>
+          <a:bodyPr wrap="square" lIns="0" rIns="0" tIns="0" bIns="0" anchor="t">
+            <a:spAutoFit/>
+          </a:bodyPr>
+          <a:lstStyle/>
+          <a:p>
+            <a:pPr algn="l"/>
+            <a:r>
+              <a:rPr sz="1000" b="1">
+                <a:solidFill>
+                  <a:srgbClr val="2E6FA8"/>
+                </a:solidFill>
+                <a:latin typeface="Calibri"/>
+              </a:rPr>
+              <a:t>Every metric in trace_features → no black box.</a:t>
+            </a:r>
+          </a:p>
+        </p:txBody>
+      </p:sp>
+    </p:spTree>
+  </p:cSld>
+  <p:clrMapOvr>
+    <a:masterClrMapping/>
+  </p:clrMapOvr>
+</p:sld>
+</file>
+
+<file path=ppt/slides/slide6.xml><?xml version="1.0" encoding="utf-8"?>
+<p:sld xmlns:a="http://schemas.openxmlformats.org/drawingml/2006/main" xmlns:p="http://schemas.openxmlformats.org/presentationml/2006/main" xmlns:r="http://schemas.openxmlformats.org/officeDocument/2006/relationships">
+  <p:cSld>
+    <p:spTree>
+      <p:nvGrpSpPr>
+        <p:cNvPr id="1" name=""/>
+        <p:cNvGrpSpPr/>
+        <p:nvPr/>
+      </p:nvGrpSpPr>
+      <p:grpSpPr/>
+      <p:sp>
+        <p:nvSpPr>
+          <p:cNvPr id="2" name="Oval 1"/>
+          <p:cNvSpPr/>
+          <p:nvPr/>
+        </p:nvSpPr>
+        <p:spPr>
+          <a:xfrm>
+            <a:off x="548640" y="457200"/>
+            <a:ext cx="640080" cy="640080"/>
+          </a:xfrm>
+          <a:prstGeom prst="ellipse">
+            <a:avLst/>
+          </a:prstGeom>
+          <a:solidFill>
+            <a:srgbClr val="2E6FA8"/>
+          </a:solidFill>
+          <a:ln>
+            <a:noFill/>
+          </a:ln>
+        </p:spPr>
+        <p:style>
+          <a:lnRef idx="1">
+            <a:schemeClr val="accent1"/>
+          </a:lnRef>
+          <a:fillRef idx="3">
+            <a:schemeClr val="accent1"/>
+          </a:fillRef>
+          <a:effectRef idx="2">
+            <a:schemeClr val="accent1"/>
+          </a:effectRef>
+          <a:fontRef idx="minor">
+            <a:schemeClr val="lt1"/>
+          </a:fontRef>
+        </p:style>
+        <p:txBody>
+          <a:bodyPr rtlCol="0" anchor="ctr"/>
+          <a:lstStyle/>
+          <a:p>
+            <a:pPr algn="ctr"/>
+          </a:p>
+        </p:txBody>
+      </p:sp>
+      <p:sp>
+        <p:nvSpPr>
+          <p:cNvPr id="3" name="TextBox 2"/>
+          <p:cNvSpPr txBox="1"/>
+          <p:nvPr/>
+        </p:nvSpPr>
+        <p:spPr>
+          <a:xfrm>
+            <a:off x="548640" y="502920"/>
+            <a:ext cx="640080" cy="548640"/>
+          </a:xfrm>
+          <a:prstGeom prst="rect">
+            <a:avLst/>
+          </a:prstGeom>
+          <a:noFill/>
+        </p:spPr>
+        <p:txBody>
+          <a:bodyPr wrap="square" lIns="0" rIns="0" tIns="0" bIns="0" anchor="t">
+            <a:spAutoFit/>
+          </a:bodyPr>
+          <a:lstStyle/>
+          <a:p>
+            <a:pPr algn="ctr"/>
+            <a:r>
+              <a:rPr sz="2000" b="1">
+                <a:solidFill>
+                  <a:srgbClr val="FFFFFF"/>
+                </a:solidFill>
+                <a:latin typeface="Calibri"/>
+              </a:rPr>
+              <a:t>05</a:t>
+            </a:r>
+          </a:p>
+        </p:txBody>
+      </p:sp>
+      <p:sp>
+        <p:nvSpPr>
+          <p:cNvPr id="4" name="TextBox 3"/>
+          <p:cNvSpPr txBox="1"/>
+          <p:nvPr/>
+        </p:nvSpPr>
+        <p:spPr>
+          <a:xfrm>
+            <a:off x="1371600" y="411480"/>
+            <a:ext cx="10332720" cy="640080"/>
+          </a:xfrm>
+          <a:prstGeom prst="rect">
+            <a:avLst/>
+          </a:prstGeom>
+          <a:noFill/>
+        </p:spPr>
+        <p:txBody>
+          <a:bodyPr wrap="square" lIns="0" rIns="0" tIns="0" bIns="0" anchor="t">
+            <a:spAutoFit/>
+          </a:bodyPr>
+          <a:lstStyle/>
+          <a:p>
+            <a:pPr algn="l"/>
+            <a:r>
+              <a:rPr sz="2800" b="1">
+                <a:solidFill>
+                  <a:srgbClr val="1B2A4A"/>
+                </a:solidFill>
+                <a:latin typeface="Calibri"/>
+              </a:rPr>
+              <a:t>Technical info</a:t>
+            </a:r>
+          </a:p>
+        </p:txBody>
+      </p:sp>
+      <p:sp>
+        <p:nvSpPr>
+          <p:cNvPr id="5" name="TextBox 4"/>
+          <p:cNvSpPr txBox="1"/>
+          <p:nvPr/>
+        </p:nvSpPr>
+        <p:spPr>
+          <a:xfrm>
+            <a:off x="1371600" y="960120"/>
+            <a:ext cx="10332720" cy="365760"/>
+          </a:xfrm>
+          <a:prstGeom prst="rect">
+            <a:avLst/>
+          </a:prstGeom>
+          <a:noFill/>
+        </p:spPr>
+        <p:txBody>
+          <a:bodyPr wrap="square" lIns="0" rIns="0" tIns="0" bIns="0" anchor="t">
+            <a:spAutoFit/>
+          </a:bodyPr>
+          <a:lstStyle/>
+          <a:p>
+            <a:pPr algn="l"/>
+            <a:r>
+              <a:rPr sz="1400" b="0">
+                <a:solidFill>
+                  <a:srgbClr val="6B6B6B"/>
+                </a:solidFill>
+                <a:latin typeface="Calibri"/>
+              </a:rPr>
+              <a:t>How we built it · language · environment · tooling</a:t>
+            </a:r>
+          </a:p>
+        </p:txBody>
+      </p:sp>
+      <p:sp>
+        <p:nvSpPr>
+          <p:cNvPr id="6" name="Rounded Rectangle 5"/>
+          <p:cNvSpPr/>
+          <p:nvPr/>
+        </p:nvSpPr>
+        <p:spPr>
+          <a:xfrm>
+            <a:off x="548640" y="1508760"/>
+            <a:ext cx="3657600" cy="5120640"/>
+          </a:xfrm>
+          <a:prstGeom prst="roundRect">
+            <a:avLst/>
+          </a:prstGeom>
+          <a:solidFill>
+            <a:srgbClr val="F4F6FA"/>
+          </a:solidFill>
+          <a:ln>
+            <a:noFill/>
+          </a:ln>
+        </p:spPr>
+        <p:style>
+          <a:lnRef idx="1">
+            <a:schemeClr val="accent1"/>
+          </a:lnRef>
+          <a:fillRef idx="3">
+            <a:schemeClr val="accent1"/>
+          </a:fillRef>
+          <a:effectRef idx="2">
+            <a:schemeClr val="accent1"/>
+          </a:effectRef>
+          <a:fontRef idx="minor">
+            <a:schemeClr val="lt1"/>
+          </a:fontRef>
+        </p:style>
+        <p:txBody>
+          <a:bodyPr rtlCol="0" anchor="ctr"/>
+          <a:lstStyle/>
+          <a:p>
+            <a:pPr algn="ctr"/>
+          </a:p>
+        </p:txBody>
+      </p:sp>
+      <p:sp>
+        <p:nvSpPr>
+          <p:cNvPr id="7" name="Rectangle 6"/>
+          <p:cNvSpPr/>
+          <p:nvPr/>
+        </p:nvSpPr>
+        <p:spPr>
+          <a:xfrm>
+            <a:off x="548640" y="1508760"/>
+            <a:ext cx="91440" cy="5120640"/>
+          </a:xfrm>
+          <a:prstGeom prst="rect">
+            <a:avLst/>
+          </a:prstGeom>
+          <a:solidFill>
+            <a:srgbClr val="2E6FA8"/>
+          </a:solidFill>
+          <a:ln>
+            <a:noFill/>
+          </a:ln>
+        </p:spPr>
+        <p:style>
+          <a:lnRef idx="1">
+            <a:schemeClr val="accent1"/>
+          </a:lnRef>
+          <a:fillRef idx="3">
+            <a:schemeClr val="accent1"/>
+          </a:fillRef>
+          <a:effectRef idx="2">
+            <a:schemeClr val="accent1"/>
+          </a:effectRef>
+          <a:fontRef idx="minor">
+            <a:schemeClr val="lt1"/>
+          </a:fontRef>
+        </p:style>
+        <p:txBody>
+          <a:bodyPr rtlCol="0" anchor="ctr"/>
+          <a:lstStyle/>
+          <a:p>
+            <a:pPr algn="ctr"/>
+          </a:p>
+        </p:txBody>
+      </p:sp>
+      <p:sp>
+        <p:nvSpPr>
+          <p:cNvPr id="8" name="TextBox 7"/>
+          <p:cNvSpPr txBox="1"/>
+          <p:nvPr/>
+        </p:nvSpPr>
+        <p:spPr>
+          <a:xfrm>
+            <a:off x="822960" y="1691640"/>
+            <a:ext cx="3200400" cy="365760"/>
+          </a:xfrm>
+          <a:prstGeom prst="rect">
+            <a:avLst/>
+          </a:prstGeom>
+          <a:noFill/>
+        </p:spPr>
+        <p:txBody>
+          <a:bodyPr wrap="square" lIns="0" rIns="0" tIns="0" bIns="0" anchor="t">
+            <a:spAutoFit/>
+          </a:bodyPr>
+          <a:lstStyle/>
+          <a:p>
+            <a:pPr algn="l"/>
+            <a:r>
+              <a:rPr sz="1100" b="1">
+                <a:solidFill>
+                  <a:srgbClr val="2E6FA8"/>
+                </a:solidFill>
+                <a:latin typeface="Calibri"/>
+              </a:rPr>
+              <a:t>HOW WE BUILT IT</a:t>
+            </a:r>
+          </a:p>
+        </p:txBody>
+      </p:sp>
+      <p:sp>
+        <p:nvSpPr>
+          <p:cNvPr id="9" name="TextBox 8"/>
+          <p:cNvSpPr txBox="1"/>
+          <p:nvPr/>
+        </p:nvSpPr>
+        <p:spPr>
+          <a:xfrm>
+            <a:off x="822960" y="2148840"/>
+            <a:ext cx="3200400" cy="4297680"/>
+          </a:xfrm>
+          <a:prstGeom prst="rect">
+            <a:avLst/>
+          </a:prstGeom>
+          <a:noFill/>
+        </p:spPr>
+        <p:txBody>
+          <a:bodyPr wrap="square" lIns="0" rIns="0">
+            <a:spAutoFit/>
+          </a:bodyPr>
+          <a:lstStyle/>
+          <a:p>
+            <a:pPr algn="l">
+              <a:spcAft>
+                <a:spcPts val="600"/>
+              </a:spcAft>
+            </a:pPr>
+            <a:r>
+              <a:rPr sz="1400" b="1">
+                <a:solidFill>
+                  <a:srgbClr val="2E6FA8"/>
+                </a:solidFill>
+                <a:latin typeface="Calibri"/>
+              </a:rPr>
+              <a:t>•  </a:t>
+            </a:r>
+            <a:r>
+              <a:rPr sz="1200">
+                <a:solidFill>
+                  <a:srgbClr val="1A1A1A"/>
+                </a:solidFill>
+                <a:latin typeface="Calibri"/>
+              </a:rPr>
+              <a:t>AI-assisted (Claude Code) + manual review on every change</a:t>
+            </a:r>
+          </a:p>
+          <a:p>
+            <a:pPr algn="l">
+              <a:spcAft>
+                <a:spcPts val="600"/>
+              </a:spcAft>
+            </a:pPr>
+            <a:r>
+              <a:rPr sz="1400" b="1">
+                <a:solidFill>
+                  <a:srgbClr val="2E6FA8"/>
+                </a:solidFill>
+                <a:latin typeface="Calibri"/>
+              </a:rPr>
+              <a:t>•  </a:t>
+            </a:r>
+            <a:r>
+              <a:rPr sz="1200">
+                <a:solidFill>
+                  <a:srgbClr val="1A1A1A"/>
+                </a:solidFill>
+                <a:latin typeface="Calibri"/>
+              </a:rPr>
+              <a:t>13 PRs of clean git history</a:t>
+            </a:r>
+          </a:p>
+          <a:p>
+            <a:pPr algn="l">
+              <a:spcAft>
+                <a:spcPts val="600"/>
+              </a:spcAft>
+            </a:pPr>
+            <a:r>
+              <a:rPr sz="1400" b="1">
+                <a:solidFill>
+                  <a:srgbClr val="2E6FA8"/>
+                </a:solidFill>
+                <a:latin typeface="Calibri"/>
+              </a:rPr>
+              <a:t>•  </a:t>
+            </a:r>
+            <a:r>
+              <a:rPr sz="1200">
+                <a:solidFill>
+                  <a:srgbClr val="1A1A1A"/>
+                </a:solidFill>
+                <a:latin typeface="Calibri"/>
+              </a:rPr>
+              <a:t>21 smoke tests passing</a:t>
+            </a:r>
+          </a:p>
+          <a:p>
+            <a:pPr algn="l">
+              <a:spcAft>
+                <a:spcPts val="600"/>
+              </a:spcAft>
+            </a:pPr>
+            <a:r>
+              <a:rPr sz="1400" b="1">
+                <a:solidFill>
+                  <a:srgbClr val="2E6FA8"/>
+                </a:solidFill>
+                <a:latin typeface="Calibri"/>
+              </a:rPr>
+              <a:t>•  </a:t>
+            </a:r>
+            <a:r>
+              <a:rPr sz="1200">
+                <a:solidFill>
+                  <a:srgbClr val="1A1A1A"/>
+                </a:solidFill>
+                <a:latin typeface="Calibri"/>
+              </a:rPr>
+              <a:t>Cleaned dataset (5 sheets, 162K rows of Ventas)</a:t>
+            </a:r>
+          </a:p>
+        </p:txBody>
+      </p:sp>
+      <p:sp>
+        <p:nvSpPr>
+          <p:cNvPr id="10" name="Rounded Rectangle 9"/>
+          <p:cNvSpPr/>
+          <p:nvPr/>
+        </p:nvSpPr>
+        <p:spPr>
+          <a:xfrm>
+            <a:off x="4325112" y="1508760"/>
+            <a:ext cx="3657600" cy="5120640"/>
+          </a:xfrm>
+          <a:prstGeom prst="roundRect">
+            <a:avLst/>
+          </a:prstGeom>
+          <a:solidFill>
+            <a:srgbClr val="F4F6FA"/>
+          </a:solidFill>
+          <a:ln>
+            <a:noFill/>
+          </a:ln>
+        </p:spPr>
+        <p:style>
+          <a:lnRef idx="1">
+            <a:schemeClr val="accent1"/>
+          </a:lnRef>
+          <a:fillRef idx="3">
+            <a:schemeClr val="accent1"/>
+          </a:fillRef>
+          <a:effectRef idx="2">
+            <a:schemeClr val="accent1"/>
+          </a:effectRef>
+          <a:fontRef idx="minor">
+            <a:schemeClr val="lt1"/>
+          </a:fontRef>
+        </p:style>
+        <p:txBody>
+          <a:bodyPr rtlCol="0" anchor="ctr"/>
+          <a:lstStyle/>
+          <a:p>
+            <a:pPr algn="ctr"/>
+          </a:p>
+        </p:txBody>
+      </p:sp>
+      <p:sp>
+        <p:nvSpPr>
+          <p:cNvPr id="11" name="Rectangle 10"/>
+          <p:cNvSpPr/>
+          <p:nvPr/>
+        </p:nvSpPr>
+        <p:spPr>
+          <a:xfrm>
+            <a:off x="4325112" y="1508760"/>
+            <a:ext cx="91440" cy="5120640"/>
+          </a:xfrm>
+          <a:prstGeom prst="rect">
+            <a:avLst/>
+          </a:prstGeom>
+          <a:solidFill>
+            <a:srgbClr val="5A7A9A"/>
+          </a:solidFill>
+          <a:ln>
+            <a:noFill/>
+          </a:ln>
+        </p:spPr>
+        <p:style>
+          <a:lnRef idx="1">
+            <a:schemeClr val="accent1"/>
+          </a:lnRef>
+          <a:fillRef idx="3">
+            <a:schemeClr val="accent1"/>
+          </a:fillRef>
+          <a:effectRef idx="2">
+            <a:schemeClr val="accent1"/>
+          </a:effectRef>
+          <a:fontRef idx="minor">
+            <a:schemeClr val="lt1"/>
+          </a:fontRef>
+        </p:style>
+        <p:txBody>
+          <a:bodyPr rtlCol="0" anchor="ctr"/>
+          <a:lstStyle/>
+          <a:p>
+            <a:pPr algn="ctr"/>
+          </a:p>
+        </p:txBody>
+      </p:sp>
+      <p:sp>
+        <p:nvSpPr>
+          <p:cNvPr id="12" name="TextBox 11"/>
+          <p:cNvSpPr txBox="1"/>
+          <p:nvPr/>
+        </p:nvSpPr>
+        <p:spPr>
+          <a:xfrm>
+            <a:off x="4599432" y="1691640"/>
+            <a:ext cx="3200400" cy="365760"/>
+          </a:xfrm>
+          <a:prstGeom prst="rect">
+            <a:avLst/>
+          </a:prstGeom>
+          <a:noFill/>
+        </p:spPr>
+        <p:txBody>
+          <a:bodyPr wrap="square" lIns="0" rIns="0" tIns="0" bIns="0" anchor="t">
+            <a:spAutoFit/>
+          </a:bodyPr>
+          <a:lstStyle/>
+          <a:p>
+            <a:pPr algn="l"/>
+            <a:r>
+              <a:rPr sz="1100" b="1">
+                <a:solidFill>
+                  <a:srgbClr val="5A7A9A"/>
+                </a:solidFill>
+                <a:latin typeface="Calibri"/>
+              </a:rPr>
+              <a:t>LANGUAGE &amp; STACK</a:t>
+            </a:r>
+          </a:p>
+        </p:txBody>
+      </p:sp>
+      <p:sp>
+        <p:nvSpPr>
+          <p:cNvPr id="13" name="TextBox 12"/>
+          <p:cNvSpPr txBox="1"/>
+          <p:nvPr/>
+        </p:nvSpPr>
+        <p:spPr>
+          <a:xfrm>
+            <a:off x="4599432" y="2148840"/>
+            <a:ext cx="3200400" cy="4297680"/>
+          </a:xfrm>
+          <a:prstGeom prst="rect">
+            <a:avLst/>
+          </a:prstGeom>
+          <a:noFill/>
+        </p:spPr>
+        <p:txBody>
+          <a:bodyPr wrap="square" lIns="0" rIns="0">
+            <a:spAutoFit/>
+          </a:bodyPr>
+          <a:lstStyle/>
+          <a:p>
+            <a:pPr algn="l">
+              <a:spcAft>
+                <a:spcPts val="600"/>
+              </a:spcAft>
+            </a:pPr>
+            <a:r>
+              <a:rPr sz="1400" b="1">
+                <a:solidFill>
+                  <a:srgbClr val="2E6FA8"/>
+                </a:solidFill>
+                <a:latin typeface="Calibri"/>
+              </a:rPr>
+              <a:t>•  </a:t>
+            </a:r>
+            <a:r>
+              <a:rPr sz="1200">
+                <a:solidFill>
+                  <a:srgbClr val="1A1A1A"/>
+                </a:solidFill>
+                <a:latin typeface="Calibri"/>
+              </a:rPr>
+              <a:t>Python 3.10+</a:t>
+            </a:r>
+          </a:p>
+          <a:p>
+            <a:pPr algn="l">
+              <a:spcAft>
+                <a:spcPts val="600"/>
+              </a:spcAft>
+            </a:pPr>
+            <a:r>
+              <a:rPr sz="1400" b="1">
+                <a:solidFill>
+                  <a:srgbClr val="2E6FA8"/>
+                </a:solidFill>
+                <a:latin typeface="Calibri"/>
+              </a:rPr>
+              <a:t>•  </a:t>
+            </a:r>
+            <a:r>
+              <a:rPr sz="1200">
+                <a:solidFill>
+                  <a:srgbClr val="1A1A1A"/>
+                </a:solidFill>
+                <a:latin typeface="Calibri"/>
+              </a:rPr>
+              <a:t>pandas, numpy — analytics</a:t>
+            </a:r>
+          </a:p>
+          <a:p>
+            <a:pPr algn="l">
+              <a:spcAft>
+                <a:spcPts val="600"/>
+              </a:spcAft>
+            </a:pPr>
+            <a:r>
+              <a:rPr sz="1400" b="1">
+                <a:solidFill>
+                  <a:srgbClr val="2E6FA8"/>
+                </a:solidFill>
+                <a:latin typeface="Calibri"/>
+              </a:rPr>
+              <a:t>•  </a:t>
+            </a:r>
+            <a:r>
+              <a:rPr sz="1200">
+                <a:solidFill>
+                  <a:srgbClr val="1A1A1A"/>
+                </a:solidFill>
+                <a:latin typeface="Calibri"/>
+              </a:rPr>
+              <a:t>streamlit — interactive dashboard</a:t>
+            </a:r>
+          </a:p>
+          <a:p>
+            <a:pPr algn="l">
+              <a:spcAft>
+                <a:spcPts val="600"/>
+              </a:spcAft>
+            </a:pPr>
+            <a:r>
+              <a:rPr sz="1400" b="1">
+                <a:solidFill>
+                  <a:srgbClr val="2E6FA8"/>
+                </a:solidFill>
+                <a:latin typeface="Calibri"/>
+              </a:rPr>
+              <a:t>•  </a:t>
+            </a:r>
+            <a:r>
+              <a:rPr sz="1200">
+                <a:solidFill>
+                  <a:srgbClr val="1A1A1A"/>
+                </a:solidFill>
+                <a:latin typeface="Calibri"/>
+              </a:rPr>
+              <a:t>openpyxl — clean Excel I/O</a:t>
+            </a:r>
+          </a:p>
+          <a:p>
+            <a:pPr algn="l">
+              <a:spcAft>
+                <a:spcPts val="600"/>
+              </a:spcAft>
+            </a:pPr>
+            <a:r>
+              <a:rPr sz="1400" b="1">
+                <a:solidFill>
+                  <a:srgbClr val="2E6FA8"/>
+                </a:solidFill>
+                <a:latin typeface="Calibri"/>
+              </a:rPr>
+              <a:t>•  </a:t>
+            </a:r>
+            <a:r>
+              <a:rPr sz="1200">
+                <a:solidFill>
+                  <a:srgbClr val="1A1A1A"/>
+                </a:solidFill>
+                <a:latin typeface="Calibri"/>
+              </a:rPr>
+              <a:t>python-pptx — programmatic deck</a:t>
+            </a:r>
+          </a:p>
+        </p:txBody>
+      </p:sp>
+      <p:sp>
+        <p:nvSpPr>
+          <p:cNvPr id="14" name="Rounded Rectangle 13"/>
+          <p:cNvSpPr/>
+          <p:nvPr/>
+        </p:nvSpPr>
+        <p:spPr>
+          <a:xfrm>
+            <a:off x="8101584" y="1508760"/>
+            <a:ext cx="3657600" cy="5120640"/>
+          </a:xfrm>
+          <a:prstGeom prst="roundRect">
+            <a:avLst/>
+          </a:prstGeom>
+          <a:solidFill>
+            <a:srgbClr val="1B2A4A"/>
+          </a:solidFill>
+          <a:ln>
+            <a:noFill/>
+          </a:ln>
+        </p:spPr>
+        <p:style>
+          <a:lnRef idx="1">
+            <a:schemeClr val="accent1"/>
+          </a:lnRef>
+          <a:fillRef idx="3">
+            <a:schemeClr val="accent1"/>
+          </a:fillRef>
+          <a:effectRef idx="2">
+            <a:schemeClr val="accent1"/>
+          </a:effectRef>
+          <a:fontRef idx="minor">
+            <a:schemeClr val="lt1"/>
+          </a:fontRef>
+        </p:style>
+        <p:txBody>
+          <a:bodyPr rtlCol="0" anchor="ctr"/>
+          <a:lstStyle/>
+          <a:p>
+            <a:pPr algn="ctr"/>
+          </a:p>
+        </p:txBody>
+      </p:sp>
+      <p:sp>
+        <p:nvSpPr>
+          <p:cNvPr id="15" name="Rectangle 14"/>
+          <p:cNvSpPr/>
+          <p:nvPr/>
+        </p:nvSpPr>
+        <p:spPr>
+          <a:xfrm>
+            <a:off x="8101584" y="1508760"/>
+            <a:ext cx="91440" cy="5120640"/>
+          </a:xfrm>
+          <a:prstGeom prst="rect">
+            <a:avLst/>
+          </a:prstGeom>
+          <a:solidFill>
+            <a:srgbClr val="1B2A4A"/>
+          </a:solidFill>
+          <a:ln>
+            <a:noFill/>
+          </a:ln>
+        </p:spPr>
+        <p:style>
+          <a:lnRef idx="1">
+            <a:schemeClr val="accent1"/>
+          </a:lnRef>
+          <a:fillRef idx="3">
+            <a:schemeClr val="accent1"/>
+          </a:fillRef>
+          <a:effectRef idx="2">
+            <a:schemeClr val="accent1"/>
+          </a:effectRef>
+          <a:fontRef idx="minor">
+            <a:schemeClr val="lt1"/>
+          </a:fontRef>
+        </p:style>
+        <p:txBody>
+          <a:bodyPr rtlCol="0" anchor="ctr"/>
+          <a:lstStyle/>
+          <a:p>
+            <a:pPr algn="ctr"/>
+          </a:p>
+        </p:txBody>
+      </p:sp>
+      <p:sp>
+        <p:nvSpPr>
+          <p:cNvPr id="16" name="TextBox 15"/>
+          <p:cNvSpPr txBox="1"/>
+          <p:nvPr/>
+        </p:nvSpPr>
+        <p:spPr>
+          <a:xfrm>
+            <a:off x="8375904" y="1691640"/>
+            <a:ext cx="3200400" cy="365760"/>
+          </a:xfrm>
+          <a:prstGeom prst="rect">
+            <a:avLst/>
+          </a:prstGeom>
+          <a:noFill/>
+        </p:spPr>
+        <p:txBody>
+          <a:bodyPr wrap="square" lIns="0" rIns="0" tIns="0" bIns="0" anchor="t">
+            <a:spAutoFit/>
+          </a:bodyPr>
+          <a:lstStyle/>
+          <a:p>
+            <a:pPr algn="l"/>
+            <a:r>
+              <a:rPr sz="1100" b="1">
+                <a:solidFill>
+                  <a:srgbClr val="C9D4E3"/>
+                </a:solidFill>
+                <a:latin typeface="Calibri"/>
+              </a:rPr>
+              <a:t>ENVIRONMENT</a:t>
+            </a:r>
+          </a:p>
+        </p:txBody>
+      </p:sp>
+      <p:sp>
+        <p:nvSpPr>
+          <p:cNvPr id="17" name="TextBox 16"/>
+          <p:cNvSpPr txBox="1"/>
+          <p:nvPr/>
+        </p:nvSpPr>
+        <p:spPr>
+          <a:xfrm>
+            <a:off x="8375904" y="2148840"/>
+            <a:ext cx="3200400" cy="4297680"/>
+          </a:xfrm>
+          <a:prstGeom prst="rect">
+            <a:avLst/>
+          </a:prstGeom>
+          <a:noFill/>
+        </p:spPr>
+        <p:txBody>
+          <a:bodyPr wrap="square" lIns="0" rIns="0">
+            <a:spAutoFit/>
+          </a:bodyPr>
+          <a:lstStyle/>
+          <a:p>
+            <a:pPr algn="l">
+              <a:spcAft>
+                <a:spcPts val="600"/>
+              </a:spcAft>
+            </a:pPr>
+            <a:r>
+              <a:rPr sz="1400" b="1">
+                <a:solidFill>
+                  <a:srgbClr val="C9D4E3"/>
+                </a:solidFill>
+                <a:latin typeface="Calibri"/>
+              </a:rPr>
+              <a:t>•  </a:t>
+            </a:r>
+            <a:r>
+              <a:rPr sz="1200">
+                <a:solidFill>
+                  <a:srgbClr val="FFFFFF"/>
+                </a:solidFill>
+                <a:latin typeface="Calibri"/>
+              </a:rPr>
+              <a:t>macOS · Linux · Windows</a:t>
+            </a:r>
+          </a:p>
+          <a:p>
+            <a:pPr algn="l">
+              <a:spcAft>
+                <a:spcPts val="600"/>
+              </a:spcAft>
+            </a:pPr>
+            <a:r>
+              <a:rPr sz="1400" b="1">
+                <a:solidFill>
+                  <a:srgbClr val="C9D4E3"/>
+                </a:solidFill>
+                <a:latin typeface="Calibri"/>
+              </a:rPr>
+              <a:t>•  </a:t>
+            </a:r>
+            <a:r>
+              <a:rPr sz="1200">
+                <a:solidFill>
+                  <a:srgbClr val="FFFFFF"/>
+                </a:solidFill>
+                <a:latin typeface="Calibri"/>
+              </a:rPr>
+              <a:t>Single command:  streamlit run src/dashboard.py</a:t>
+            </a:r>
+          </a:p>
+          <a:p>
+            <a:pPr algn="l">
+              <a:spcAft>
+                <a:spcPts val="600"/>
+              </a:spcAft>
+            </a:pPr>
+            <a:r>
+              <a:rPr sz="1400" b="1">
+                <a:solidFill>
+                  <a:srgbClr val="C9D4E3"/>
+                </a:solidFill>
+                <a:latin typeface="Calibri"/>
+              </a:rPr>
+              <a:t>•  </a:t>
+            </a:r>
+            <a:r>
+              <a:rPr sz="1200">
+                <a:solidFill>
+                  <a:srgbClr val="FFFFFF"/>
+                </a:solidFill>
+                <a:latin typeface="Calibri"/>
+              </a:rPr>
+              <a:t>No internet required at runtime</a:t>
+            </a:r>
+          </a:p>
+          <a:p>
+            <a:pPr algn="l">
+              <a:spcAft>
+                <a:spcPts val="600"/>
+              </a:spcAft>
+            </a:pPr>
+            <a:r>
+              <a:rPr sz="1400" b="1">
+                <a:solidFill>
+                  <a:srgbClr val="C9D4E3"/>
+                </a:solidFill>
+                <a:latin typeface="Calibri"/>
+              </a:rPr>
+              <a:t>•  </a:t>
+            </a:r>
+            <a:r>
+              <a:rPr sz="1200">
+                <a:solidFill>
+                  <a:srgbClr val="FFFFFF"/>
+                </a:solidFill>
+                <a:latin typeface="Calibri"/>
+              </a:rPr>
+              <a:t>Data + code self-contained in repo</a:t>
+            </a:r>
+          </a:p>
+          <a:p>
+            <a:pPr algn="l">
+              <a:spcAft>
+                <a:spcPts val="600"/>
+              </a:spcAft>
+            </a:pPr>
+            <a:r>
+              <a:rPr sz="1400" b="1">
+                <a:solidFill>
+                  <a:srgbClr val="C9D4E3"/>
+                </a:solidFill>
+                <a:latin typeface="Calibri"/>
+              </a:rPr>
+              <a:t>•  </a:t>
+            </a:r>
+            <a:r>
+              <a:rPr sz="1200">
+                <a:solidFill>
+                  <a:srgbClr val="FFFFFF"/>
+                </a:solidFill>
+                <a:latin typeface="Calibri"/>
+              </a:rPr>
+              <a:t>≤5 sec daily compute for 6,000 clients</a:t>
+            </a:r>
+          </a:p>
+        </p:txBody>
+      </p:sp>
+    </p:spTree>
+  </p:cSld>
+  <p:clrMapOvr>
+    <a:masterClrMapping/>
+  </p:clrMapOvr>
+</p:sld>
+</file>
+
+<file path=ppt/slides/slide7.xml><?xml version="1.0" encoding="utf-8"?>
+<p:sld xmlns:a="http://schemas.openxmlformats.org/drawingml/2006/main" xmlns:p="http://schemas.openxmlformats.org/presentationml/2006/main" xmlns:r="http://schemas.openxmlformats.org/officeDocument/2006/relationships">
+  <p:cSld>
+    <p:spTree>
+      <p:nvGrpSpPr>
+        <p:cNvPr id="1" name=""/>
+        <p:cNvGrpSpPr/>
+        <p:nvPr/>
+      </p:nvGrpSpPr>
+      <p:grpSpPr/>
+      <p:sp>
+        <p:nvSpPr>
+          <p:cNvPr id="2" name="Oval 1"/>
+          <p:cNvSpPr/>
+          <p:nvPr/>
+        </p:nvSpPr>
+        <p:spPr>
+          <a:xfrm>
+            <a:off x="548640" y="457200"/>
+            <a:ext cx="640080" cy="640080"/>
+          </a:xfrm>
+          <a:prstGeom prst="ellipse">
+            <a:avLst/>
+          </a:prstGeom>
+          <a:solidFill>
+            <a:srgbClr val="2E6FA8"/>
+          </a:solidFill>
+          <a:ln>
+            <a:noFill/>
+          </a:ln>
+        </p:spPr>
+        <p:style>
+          <a:lnRef idx="1">
+            <a:schemeClr val="accent1"/>
+          </a:lnRef>
+          <a:fillRef idx="3">
+            <a:schemeClr val="accent1"/>
+          </a:fillRef>
+          <a:effectRef idx="2">
+            <a:schemeClr val="accent1"/>
+          </a:effectRef>
+          <a:fontRef idx="minor">
+            <a:schemeClr val="lt1"/>
+          </a:fontRef>
+        </p:style>
+        <p:txBody>
+          <a:bodyPr rtlCol="0" anchor="ctr"/>
+          <a:lstStyle/>
+          <a:p>
+            <a:pPr algn="ctr"/>
+          </a:p>
+        </p:txBody>
+      </p:sp>
+      <p:sp>
+        <p:nvSpPr>
+          <p:cNvPr id="3" name="TextBox 2"/>
+          <p:cNvSpPr txBox="1"/>
+          <p:nvPr/>
+        </p:nvSpPr>
+        <p:spPr>
+          <a:xfrm>
+            <a:off x="548640" y="502920"/>
+            <a:ext cx="640080" cy="548640"/>
+          </a:xfrm>
+          <a:prstGeom prst="rect">
+            <a:avLst/>
+          </a:prstGeom>
+          <a:noFill/>
+        </p:spPr>
+        <p:txBody>
+          <a:bodyPr wrap="square" lIns="0" rIns="0" tIns="0" bIns="0" anchor="t">
+            <a:spAutoFit/>
+          </a:bodyPr>
+          <a:lstStyle/>
+          <a:p>
+            <a:pPr algn="ctr"/>
+            <a:r>
+              <a:rPr sz="2000" b="1">
+                <a:solidFill>
+                  <a:srgbClr val="FFFFFF"/>
+                </a:solidFill>
+                <a:latin typeface="Calibri"/>
+              </a:rPr>
+              <a:t>06</a:t>
+            </a:r>
+          </a:p>
+        </p:txBody>
+      </p:sp>
+      <p:sp>
+        <p:nvSpPr>
+          <p:cNvPr id="4" name="TextBox 3"/>
+          <p:cNvSpPr txBox="1"/>
+          <p:nvPr/>
+        </p:nvSpPr>
+        <p:spPr>
+          <a:xfrm>
+            <a:off x="1371600" y="411480"/>
+            <a:ext cx="10332720" cy="640080"/>
+          </a:xfrm>
+          <a:prstGeom prst="rect">
+            <a:avLst/>
+          </a:prstGeom>
+          <a:noFill/>
+        </p:spPr>
+        <p:txBody>
+          <a:bodyPr wrap="square" lIns="0" rIns="0" tIns="0" bIns="0" anchor="t">
+            <a:spAutoFit/>
+          </a:bodyPr>
+          <a:lstStyle/>
+          <a:p>
+            <a:pPr algn="l"/>
+            <a:r>
+              <a:rPr sz="2800" b="1">
+                <a:solidFill>
+                  <a:srgbClr val="1B2A4A"/>
+                </a:solidFill>
+                <a:latin typeface="Calibri"/>
+              </a:rPr>
+              <a:t>Day-to-day operation</a:t>
+            </a:r>
+          </a:p>
+        </p:txBody>
+      </p:sp>
+      <p:sp>
+        <p:nvSpPr>
+          <p:cNvPr id="5" name="TextBox 4"/>
+          <p:cNvSpPr txBox="1"/>
+          <p:nvPr/>
+        </p:nvSpPr>
+        <p:spPr>
+          <a:xfrm>
+            <a:off x="1371600" y="960120"/>
+            <a:ext cx="10332720" cy="365760"/>
+          </a:xfrm>
+          <a:prstGeom prst="rect">
+            <a:avLst/>
+          </a:prstGeom>
+          <a:noFill/>
+        </p:spPr>
+        <p:txBody>
+          <a:bodyPr wrap="square" lIns="0" rIns="0" tIns="0" bIns="0" anchor="t">
+            <a:spAutoFit/>
+          </a:bodyPr>
+          <a:lstStyle/>
+          <a:p>
+            <a:pPr algn="l"/>
+            <a:r>
+              <a:rPr sz="1400" b="0">
+                <a:solidFill>
+                  <a:srgbClr val="6B6B6B"/>
+                </a:solidFill>
+                <a:latin typeface="Calibri"/>
+              </a:rPr>
+              <a:t>Daily workflow · minimum architecture · live demo</a:t>
+            </a:r>
+          </a:p>
+        </p:txBody>
+      </p:sp>
+      <p:sp>
+        <p:nvSpPr>
+          <p:cNvPr id="6" name="TextBox 5"/>
+          <p:cNvSpPr txBox="1"/>
+          <p:nvPr/>
+        </p:nvSpPr>
+        <p:spPr>
+          <a:xfrm>
+            <a:off x="548640" y="1554480"/>
+            <a:ext cx="6400800" cy="365760"/>
+          </a:xfrm>
+          <a:prstGeom prst="rect">
+            <a:avLst/>
+          </a:prstGeom>
+          <a:noFill/>
+        </p:spPr>
+        <p:txBody>
+          <a:bodyPr wrap="square" lIns="0" rIns="0" tIns="0" bIns="0" anchor="t">
+            <a:spAutoFit/>
+          </a:bodyPr>
+          <a:lstStyle/>
+          <a:p>
+            <a:pPr algn="l"/>
+            <a:r>
+              <a:rPr sz="1100" b="1">
+                <a:solidFill>
+                  <a:srgbClr val="2E6FA8"/>
+                </a:solidFill>
+                <a:latin typeface="Calibri"/>
+              </a:rPr>
+              <a:t>DAILY WORKFLOW</a:t>
+            </a:r>
+          </a:p>
+        </p:txBody>
+      </p:sp>
+      <p:sp>
+        <p:nvSpPr>
+          <p:cNvPr id="7" name="Rounded Rectangle 6"/>
+          <p:cNvSpPr/>
+          <p:nvPr/>
+        </p:nvSpPr>
+        <p:spPr>
+          <a:xfrm>
+            <a:off x="548640" y="1965960"/>
+            <a:ext cx="777240" cy="457200"/>
+          </a:xfrm>
+          <a:prstGeom prst="roundRect">
+            <a:avLst/>
+          </a:prstGeom>
+          <a:solidFill>
+            <a:srgbClr val="1B2A4A"/>
+          </a:solidFill>
+          <a:ln>
+            <a:noFill/>
+          </a:ln>
+        </p:spPr>
+        <p:style>
+          <a:lnRef idx="1">
+            <a:schemeClr val="accent1"/>
+          </a:lnRef>
+          <a:fillRef idx="3">
+            <a:schemeClr val="accent1"/>
+          </a:fillRef>
+          <a:effectRef idx="2">
+            <a:schemeClr val="accent1"/>
+          </a:effectRef>
+          <a:fontRef idx="minor">
+            <a:schemeClr val="lt1"/>
+          </a:fontRef>
+        </p:style>
+        <p:txBody>
+          <a:bodyPr rtlCol="0" anchor="ctr"/>
+          <a:lstStyle/>
+          <a:p>
+            <a:pPr algn="ctr"/>
+          </a:p>
+        </p:txBody>
+      </p:sp>
+      <p:sp>
+        <p:nvSpPr>
+          <p:cNvPr id="8" name="TextBox 7"/>
+          <p:cNvSpPr txBox="1"/>
+          <p:nvPr/>
+        </p:nvSpPr>
+        <p:spPr>
+          <a:xfrm>
+            <a:off x="548640" y="2011680"/>
+            <a:ext cx="777240" cy="365760"/>
+          </a:xfrm>
+          <a:prstGeom prst="rect">
+            <a:avLst/>
+          </a:prstGeom>
+          <a:noFill/>
+        </p:spPr>
+        <p:txBody>
+          <a:bodyPr wrap="square" lIns="0" rIns="0" tIns="0" bIns="0" anchor="t">
+            <a:spAutoFit/>
+          </a:bodyPr>
+          <a:lstStyle/>
+          <a:p>
+            <a:pPr algn="ctr"/>
+            <a:r>
+              <a:rPr sz="1100" b="1">
+                <a:solidFill>
+                  <a:srgbClr val="FFFFFF"/>
+                </a:solidFill>
+                <a:latin typeface="Calibri"/>
+              </a:rPr>
+              <a:t>08:00</a:t>
+            </a:r>
+          </a:p>
+        </p:txBody>
+      </p:sp>
+      <p:sp>
+        <p:nvSpPr>
+          <p:cNvPr id="9" name="TextBox 8"/>
+          <p:cNvSpPr txBox="1"/>
+          <p:nvPr/>
+        </p:nvSpPr>
+        <p:spPr>
+          <a:xfrm>
+            <a:off x="1463040" y="2002536"/>
+            <a:ext cx="4937760" cy="274320"/>
+          </a:xfrm>
+          <a:prstGeom prst="rect">
+            <a:avLst/>
+          </a:prstGeom>
+          <a:noFill/>
+        </p:spPr>
+        <p:txBody>
+          <a:bodyPr wrap="square" lIns="0" rIns="0" tIns="0" bIns="0" anchor="t">
+            <a:spAutoFit/>
+          </a:bodyPr>
+          <a:lstStyle/>
+          <a:p>
+            <a:pPr algn="l"/>
+            <a:r>
+              <a:rPr sz="1300" b="1">
+                <a:solidFill>
+                  <a:srgbClr val="1B2A4A"/>
+                </a:solidFill>
+                <a:latin typeface="Calibri"/>
+              </a:rPr>
+              <a:t>Engine runs</a:t>
+            </a:r>
+          </a:p>
+        </p:txBody>
+      </p:sp>
+      <p:sp>
+        <p:nvSpPr>
+          <p:cNvPr id="10" name="TextBox 9"/>
+          <p:cNvSpPr txBox="1"/>
+          <p:nvPr/>
+        </p:nvSpPr>
+        <p:spPr>
+          <a:xfrm>
+            <a:off x="1463040" y="2258568"/>
+            <a:ext cx="4937760" cy="274320"/>
+          </a:xfrm>
+          <a:prstGeom prst="rect">
+            <a:avLst/>
+          </a:prstGeom>
+          <a:noFill/>
+        </p:spPr>
+        <p:txBody>
+          <a:bodyPr wrap="square" lIns="0" rIns="0" tIns="0" bIns="0" anchor="t">
+            <a:spAutoFit/>
+          </a:bodyPr>
+          <a:lstStyle/>
+          <a:p>
+            <a:pPr algn="l"/>
+            <a:r>
+              <a:rPr sz="1100" b="0">
+                <a:solidFill>
+                  <a:srgbClr val="6B6B6B"/>
+                </a:solidFill>
+                <a:latin typeface="Calibri"/>
+              </a:rPr>
+              <a:t>generate_alerts(today) — ~5 sec</a:t>
+            </a:r>
+          </a:p>
+        </p:txBody>
+      </p:sp>
+      <p:sp>
+        <p:nvSpPr>
+          <p:cNvPr id="11" name="Rounded Rectangle 10"/>
+          <p:cNvSpPr/>
+          <p:nvPr/>
+        </p:nvSpPr>
+        <p:spPr>
+          <a:xfrm>
+            <a:off x="548640" y="2532888"/>
+            <a:ext cx="777240" cy="457200"/>
+          </a:xfrm>
+          <a:prstGeom prst="roundRect">
+            <a:avLst/>
+          </a:prstGeom>
+          <a:solidFill>
+            <a:srgbClr val="1B2A4A"/>
+          </a:solidFill>
+          <a:ln>
+            <a:noFill/>
+          </a:ln>
+        </p:spPr>
+        <p:style>
+          <a:lnRef idx="1">
+            <a:schemeClr val="accent1"/>
+          </a:lnRef>
+          <a:fillRef idx="3">
+            <a:schemeClr val="accent1"/>
+          </a:fillRef>
+          <a:effectRef idx="2">
+            <a:schemeClr val="accent1"/>
+          </a:effectRef>
+          <a:fontRef idx="minor">
+            <a:schemeClr val="lt1"/>
+          </a:fontRef>
+        </p:style>
+        <p:txBody>
+          <a:bodyPr rtlCol="0" anchor="ctr"/>
+          <a:lstStyle/>
+          <a:p>
+            <a:pPr algn="ctr"/>
+          </a:p>
+        </p:txBody>
+      </p:sp>
+      <p:sp>
+        <p:nvSpPr>
+          <p:cNvPr id="12" name="TextBox 11"/>
+          <p:cNvSpPr txBox="1"/>
+          <p:nvPr/>
+        </p:nvSpPr>
+        <p:spPr>
+          <a:xfrm>
+            <a:off x="548640" y="2578608"/>
+            <a:ext cx="777240" cy="365760"/>
+          </a:xfrm>
+          <a:prstGeom prst="rect">
+            <a:avLst/>
+          </a:prstGeom>
+          <a:noFill/>
+        </p:spPr>
+        <p:txBody>
+          <a:bodyPr wrap="square" lIns="0" rIns="0" tIns="0" bIns="0" anchor="t">
+            <a:spAutoFit/>
+          </a:bodyPr>
+          <a:lstStyle/>
+          <a:p>
+            <a:pPr algn="ctr"/>
+            <a:r>
+              <a:rPr sz="1100" b="1">
+                <a:solidFill>
+                  <a:srgbClr val="FFFFFF"/>
+                </a:solidFill>
+                <a:latin typeface="Calibri"/>
+              </a:rPr>
+              <a:t>08:05</a:t>
+            </a:r>
+          </a:p>
+        </p:txBody>
+      </p:sp>
+      <p:sp>
+        <p:nvSpPr>
+          <p:cNvPr id="13" name="TextBox 12"/>
+          <p:cNvSpPr txBox="1"/>
+          <p:nvPr/>
+        </p:nvSpPr>
+        <p:spPr>
+          <a:xfrm>
+            <a:off x="1463040" y="2569464"/>
+            <a:ext cx="4937760" cy="274320"/>
+          </a:xfrm>
+          <a:prstGeom prst="rect">
+            <a:avLst/>
+          </a:prstGeom>
+          <a:noFill/>
+        </p:spPr>
+        <p:txBody>
+          <a:bodyPr wrap="square" lIns="0" rIns="0" tIns="0" bIns="0" anchor="t">
+            <a:spAutoFit/>
+          </a:bodyPr>
+          <a:lstStyle/>
+          <a:p>
+            <a:pPr algn="l"/>
+            <a:r>
+              <a:rPr sz="1300" b="1">
+                <a:solidFill>
+                  <a:srgbClr val="1B2A4A"/>
+                </a:solidFill>
+                <a:latin typeface="Calibri"/>
+              </a:rPr>
+              <a:t>Sales team opens dashboard</a:t>
+            </a:r>
+          </a:p>
+        </p:txBody>
+      </p:sp>
+      <p:sp>
+        <p:nvSpPr>
+          <p:cNvPr id="14" name="TextBox 13"/>
+          <p:cNvSpPr txBox="1"/>
+          <p:nvPr/>
+        </p:nvSpPr>
+        <p:spPr>
+          <a:xfrm>
+            <a:off x="1463040" y="2825496"/>
+            <a:ext cx="4937760" cy="274320"/>
+          </a:xfrm>
+          <a:prstGeom prst="rect">
+            <a:avLst/>
+          </a:prstGeom>
+          <a:noFill/>
+        </p:spPr>
+        <p:txBody>
+          <a:bodyPr wrap="square" lIns="0" rIns="0" tIns="0" bIns="0" anchor="t">
+            <a:spAutoFit/>
+          </a:bodyPr>
+          <a:lstStyle/>
+          <a:p>
+            <a:pPr algn="l"/>
+            <a:r>
+              <a:rPr sz="1100" b="0">
+                <a:solidFill>
+                  <a:srgbClr val="6B6B6B"/>
+                </a:solidFill>
+                <a:latin typeface="Calibri"/>
+              </a:rPr>
+              <a:t>Categories at a glance</a:t>
+            </a:r>
+          </a:p>
+        </p:txBody>
+      </p:sp>
+      <p:sp>
+        <p:nvSpPr>
+          <p:cNvPr id="15" name="Rounded Rectangle 14"/>
+          <p:cNvSpPr/>
+          <p:nvPr/>
+        </p:nvSpPr>
+        <p:spPr>
+          <a:xfrm>
+            <a:off x="548640" y="3099816"/>
+            <a:ext cx="777240" cy="457200"/>
+          </a:xfrm>
+          <a:prstGeom prst="roundRect">
+            <a:avLst/>
+          </a:prstGeom>
+          <a:solidFill>
+            <a:srgbClr val="1B2A4A"/>
+          </a:solidFill>
+          <a:ln>
+            <a:noFill/>
+          </a:ln>
+        </p:spPr>
+        <p:style>
+          <a:lnRef idx="1">
+            <a:schemeClr val="accent1"/>
+          </a:lnRef>
+          <a:fillRef idx="3">
+            <a:schemeClr val="accent1"/>
+          </a:fillRef>
+          <a:effectRef idx="2">
+            <a:schemeClr val="accent1"/>
+          </a:effectRef>
+          <a:fontRef idx="minor">
+            <a:schemeClr val="lt1"/>
+          </a:fontRef>
+        </p:style>
+        <p:txBody>
+          <a:bodyPr rtlCol="0" anchor="ctr"/>
+          <a:lstStyle/>
+          <a:p>
+            <a:pPr algn="ctr"/>
+          </a:p>
+        </p:txBody>
+      </p:sp>
+      <p:sp>
+        <p:nvSpPr>
+          <p:cNvPr id="16" name="TextBox 15"/>
+          <p:cNvSpPr txBox="1"/>
+          <p:nvPr/>
+        </p:nvSpPr>
+        <p:spPr>
+          <a:xfrm>
+            <a:off x="548640" y="3145536"/>
+            <a:ext cx="777240" cy="365760"/>
+          </a:xfrm>
+          <a:prstGeom prst="rect">
+            <a:avLst/>
+          </a:prstGeom>
+          <a:noFill/>
+        </p:spPr>
+        <p:txBody>
+          <a:bodyPr wrap="square" lIns="0" rIns="0" tIns="0" bIns="0" anchor="t">
+            <a:spAutoFit/>
+          </a:bodyPr>
+          <a:lstStyle/>
+          <a:p>
+            <a:pPr algn="ctr"/>
+            <a:r>
+              <a:rPr sz="1100" b="1">
+                <a:solidFill>
+                  <a:srgbClr val="FFFFFF"/>
+                </a:solidFill>
+                <a:latin typeface="Calibri"/>
+              </a:rPr>
+              <a:t>08:10</a:t>
+            </a:r>
+          </a:p>
+        </p:txBody>
+      </p:sp>
+      <p:sp>
+        <p:nvSpPr>
+          <p:cNvPr id="17" name="TextBox 16"/>
+          <p:cNvSpPr txBox="1"/>
+          <p:nvPr/>
+        </p:nvSpPr>
+        <p:spPr>
+          <a:xfrm>
+            <a:off x="1463040" y="3136392"/>
+            <a:ext cx="4937760" cy="274320"/>
+          </a:xfrm>
+          <a:prstGeom prst="rect">
+            <a:avLst/>
+          </a:prstGeom>
+          <a:noFill/>
+        </p:spPr>
+        <p:txBody>
+          <a:bodyPr wrap="square" lIns="0" rIns="0" tIns="0" bIns="0" anchor="t">
+            <a:spAutoFit/>
+          </a:bodyPr>
+          <a:lstStyle/>
+          <a:p>
+            <a:pPr algn="l"/>
+            <a:r>
+              <a:rPr sz="1300" b="1">
+                <a:solidFill>
+                  <a:srgbClr val="1B2A4A"/>
+                </a:solidFill>
+                <a:latin typeface="Calibri"/>
+              </a:rPr>
+              <a:t>Sales rep clicks a client</a:t>
+            </a:r>
+          </a:p>
+        </p:txBody>
+      </p:sp>
+      <p:sp>
+        <p:nvSpPr>
+          <p:cNvPr id="18" name="TextBox 17"/>
+          <p:cNvSpPr txBox="1"/>
+          <p:nvPr/>
+        </p:nvSpPr>
+        <p:spPr>
+          <a:xfrm>
+            <a:off x="1463040" y="3392424"/>
+            <a:ext cx="4937760" cy="274320"/>
+          </a:xfrm>
+          <a:prstGeom prst="rect">
+            <a:avLst/>
+          </a:prstGeom>
+          <a:noFill/>
+        </p:spPr>
+        <p:txBody>
+          <a:bodyPr wrap="square" lIns="0" rIns="0" tIns="0" bIns="0" anchor="t">
+            <a:spAutoFit/>
+          </a:bodyPr>
+          <a:lstStyle/>
+          <a:p>
+            <a:pPr algn="l"/>
+            <a:r>
+              <a:rPr sz="1100" b="0">
+                <a:solidFill>
+                  <a:srgbClr val="6B6B6B"/>
+                </a:solidFill>
+                <a:latin typeface="Calibri"/>
+              </a:rPr>
+              <a:t>Cycle status + reason + action</a:t>
+            </a:r>
+          </a:p>
+        </p:txBody>
+      </p:sp>
+      <p:sp>
+        <p:nvSpPr>
+          <p:cNvPr id="19" name="Rounded Rectangle 18"/>
+          <p:cNvSpPr/>
+          <p:nvPr/>
+        </p:nvSpPr>
+        <p:spPr>
+          <a:xfrm>
+            <a:off x="548640" y="3666744"/>
+            <a:ext cx="777240" cy="457200"/>
+          </a:xfrm>
+          <a:prstGeom prst="roundRect">
+            <a:avLst/>
+          </a:prstGeom>
+          <a:solidFill>
+            <a:srgbClr val="1B2A4A"/>
+          </a:solidFill>
+          <a:ln>
+            <a:noFill/>
+          </a:ln>
+        </p:spPr>
+        <p:style>
+          <a:lnRef idx="1">
+            <a:schemeClr val="accent1"/>
+          </a:lnRef>
+          <a:fillRef idx="3">
+            <a:schemeClr val="accent1"/>
+          </a:fillRef>
+          <a:effectRef idx="2">
+            <a:schemeClr val="accent1"/>
+          </a:effectRef>
+          <a:fontRef idx="minor">
+            <a:schemeClr val="lt1"/>
+          </a:fontRef>
+        </p:style>
+        <p:txBody>
+          <a:bodyPr rtlCol="0" anchor="ctr"/>
+          <a:lstStyle/>
+          <a:p>
+            <a:pPr algn="ctr"/>
+          </a:p>
+        </p:txBody>
+      </p:sp>
+      <p:sp>
+        <p:nvSpPr>
+          <p:cNvPr id="20" name="TextBox 19"/>
+          <p:cNvSpPr txBox="1"/>
+          <p:nvPr/>
+        </p:nvSpPr>
+        <p:spPr>
+          <a:xfrm>
+            <a:off x="548640" y="3712464"/>
+            <a:ext cx="777240" cy="365760"/>
+          </a:xfrm>
+          <a:prstGeom prst="rect">
+            <a:avLst/>
+          </a:prstGeom>
+          <a:noFill/>
+        </p:spPr>
+        <p:txBody>
+          <a:bodyPr wrap="square" lIns="0" rIns="0" tIns="0" bIns="0" anchor="t">
+            <a:spAutoFit/>
+          </a:bodyPr>
+          <a:lstStyle/>
+          <a:p>
+            <a:pPr algn="ctr"/>
+            <a:r>
+              <a:rPr sz="1100" b="1">
+                <a:solidFill>
+                  <a:srgbClr val="FFFFFF"/>
+                </a:solidFill>
+                <a:latin typeface="Calibri"/>
+              </a:rPr>
+              <a:t>Day</a:t>
+            </a:r>
+          </a:p>
+        </p:txBody>
+      </p:sp>
+      <p:sp>
+        <p:nvSpPr>
+          <p:cNvPr id="21" name="TextBox 20"/>
+          <p:cNvSpPr txBox="1"/>
+          <p:nvPr/>
+        </p:nvSpPr>
+        <p:spPr>
+          <a:xfrm>
+            <a:off x="1463040" y="3703320"/>
+            <a:ext cx="4937760" cy="274320"/>
+          </a:xfrm>
+          <a:prstGeom prst="rect">
+            <a:avLst/>
+          </a:prstGeom>
+          <a:noFill/>
+        </p:spPr>
+        <p:txBody>
+          <a:bodyPr wrap="square" lIns="0" rIns="0" tIns="0" bIns="0" anchor="t">
+            <a:spAutoFit/>
+          </a:bodyPr>
+          <a:lstStyle/>
+          <a:p>
+            <a:pPr algn="l"/>
+            <a:r>
+              <a:rPr sz="1300" b="1">
+                <a:solidFill>
+                  <a:srgbClr val="1B2A4A"/>
+                </a:solidFill>
+                <a:latin typeface="Calibri"/>
+              </a:rPr>
+              <a:t>Acts on alerts</a:t>
+            </a:r>
+          </a:p>
+        </p:txBody>
+      </p:sp>
+      <p:sp>
+        <p:nvSpPr>
+          <p:cNvPr id="22" name="TextBox 21"/>
+          <p:cNvSpPr txBox="1"/>
+          <p:nvPr/>
+        </p:nvSpPr>
+        <p:spPr>
+          <a:xfrm>
+            <a:off x="1463040" y="3959352"/>
+            <a:ext cx="4937760" cy="274320"/>
+          </a:xfrm>
+          <a:prstGeom prst="rect">
+            <a:avLst/>
+          </a:prstGeom>
+          <a:noFill/>
+        </p:spPr>
+        <p:txBody>
+          <a:bodyPr wrap="square" lIns="0" rIns="0" tIns="0" bIns="0" anchor="t">
+            <a:spAutoFit/>
+          </a:bodyPr>
+          <a:lstStyle/>
+          <a:p>
+            <a:pPr algn="l"/>
+            <a:r>
+              <a:rPr sz="1100" b="0">
+                <a:solidFill>
+                  <a:srgbClr val="6B6B6B"/>
+                </a:solidFill>
+                <a:latin typeface="Calibri"/>
+              </a:rPr>
+              <a:t>Phone / visit / email</a:t>
+            </a:r>
+          </a:p>
+        </p:txBody>
+      </p:sp>
+      <p:sp>
+        <p:nvSpPr>
+          <p:cNvPr id="23" name="Rounded Rectangle 22"/>
+          <p:cNvSpPr/>
+          <p:nvPr/>
+        </p:nvSpPr>
+        <p:spPr>
+          <a:xfrm>
+            <a:off x="548640" y="4233672"/>
+            <a:ext cx="777240" cy="457200"/>
+          </a:xfrm>
+          <a:prstGeom prst="roundRect">
+            <a:avLst/>
+          </a:prstGeom>
+          <a:solidFill>
+            <a:srgbClr val="1B2A4A"/>
+          </a:solidFill>
+          <a:ln>
+            <a:noFill/>
+          </a:ln>
+        </p:spPr>
+        <p:style>
+          <a:lnRef idx="1">
+            <a:schemeClr val="accent1"/>
+          </a:lnRef>
+          <a:fillRef idx="3">
+            <a:schemeClr val="accent1"/>
+          </a:fillRef>
+          <a:effectRef idx="2">
+            <a:schemeClr val="accent1"/>
+          </a:effectRef>
+          <a:fontRef idx="minor">
+            <a:schemeClr val="lt1"/>
+          </a:fontRef>
+        </p:style>
+        <p:txBody>
+          <a:bodyPr rtlCol="0" anchor="ctr"/>
+          <a:lstStyle/>
+          <a:p>
+            <a:pPr algn="ctr"/>
+          </a:p>
+        </p:txBody>
+      </p:sp>
+      <p:sp>
+        <p:nvSpPr>
+          <p:cNvPr id="24" name="TextBox 23"/>
+          <p:cNvSpPr txBox="1"/>
+          <p:nvPr/>
+        </p:nvSpPr>
+        <p:spPr>
+          <a:xfrm>
+            <a:off x="548640" y="4279392"/>
+            <a:ext cx="777240" cy="365760"/>
+          </a:xfrm>
+          <a:prstGeom prst="rect">
+            <a:avLst/>
+          </a:prstGeom>
+          <a:noFill/>
+        </p:spPr>
+        <p:txBody>
+          <a:bodyPr wrap="square" lIns="0" rIns="0" tIns="0" bIns="0" anchor="t">
+            <a:spAutoFit/>
+          </a:bodyPr>
+          <a:lstStyle/>
+          <a:p>
+            <a:pPr algn="ctr"/>
+            <a:r>
+              <a:rPr sz="1100" b="1">
+                <a:solidFill>
+                  <a:srgbClr val="FFFFFF"/>
+                </a:solidFill>
+                <a:latin typeface="Calibri"/>
+              </a:rPr>
+              <a:t>End</a:t>
+            </a:r>
+          </a:p>
+        </p:txBody>
+      </p:sp>
+      <p:sp>
+        <p:nvSpPr>
+          <p:cNvPr id="25" name="TextBox 24"/>
+          <p:cNvSpPr txBox="1"/>
+          <p:nvPr/>
+        </p:nvSpPr>
+        <p:spPr>
+          <a:xfrm>
+            <a:off x="1463040" y="4270248"/>
+            <a:ext cx="4937760" cy="274320"/>
+          </a:xfrm>
+          <a:prstGeom prst="rect">
+            <a:avLst/>
+          </a:prstGeom>
+          <a:noFill/>
+        </p:spPr>
+        <p:txBody>
+          <a:bodyPr wrap="square" lIns="0" rIns="0" tIns="0" bIns="0" anchor="t">
+            <a:spAutoFit/>
+          </a:bodyPr>
+          <a:lstStyle/>
+          <a:p>
+            <a:pPr algn="l"/>
+            <a:r>
+              <a:rPr sz="1300" b="1">
+                <a:solidFill>
+                  <a:srgbClr val="1B2A4A"/>
+                </a:solidFill>
+                <a:latin typeface="Calibri"/>
+              </a:rPr>
+              <a:t>Records outcome</a:t>
+            </a:r>
+          </a:p>
+        </p:txBody>
+      </p:sp>
+      <p:sp>
+        <p:nvSpPr>
+          <p:cNvPr id="26" name="TextBox 25"/>
+          <p:cNvSpPr txBox="1"/>
+          <p:nvPr/>
+        </p:nvSpPr>
+        <p:spPr>
+          <a:xfrm>
+            <a:off x="1463040" y="4526280"/>
+            <a:ext cx="4937760" cy="274320"/>
+          </a:xfrm>
+          <a:prstGeom prst="rect">
+            <a:avLst/>
+          </a:prstGeom>
+          <a:noFill/>
+        </p:spPr>
+        <p:txBody>
+          <a:bodyPr wrap="square" lIns="0" rIns="0" tIns="0" bIns="0" anchor="t">
+            <a:spAutoFit/>
+          </a:bodyPr>
+          <a:lstStyle/>
+          <a:p>
+            <a:pPr algn="l"/>
+            <a:r>
+              <a:rPr sz="1100" b="0">
+                <a:solidFill>
+                  <a:srgbClr val="6B6B6B"/>
+                </a:solidFill>
+                <a:latin typeface="Calibri"/>
+              </a:rPr>
+              <a:t>won / lost / pending / no_contact</a:t>
+            </a:r>
+          </a:p>
+        </p:txBody>
+      </p:sp>
+      <p:sp>
+        <p:nvSpPr>
+          <p:cNvPr id="27" name="TextBox 26"/>
+          <p:cNvSpPr txBox="1"/>
+          <p:nvPr/>
+        </p:nvSpPr>
+        <p:spPr>
+          <a:xfrm>
+            <a:off x="7315200" y="1554480"/>
+            <a:ext cx="4572000" cy="365760"/>
+          </a:xfrm>
+          <a:prstGeom prst="rect">
+            <a:avLst/>
+          </a:prstGeom>
+          <a:noFill/>
+        </p:spPr>
+        <p:txBody>
+          <a:bodyPr wrap="square" lIns="0" rIns="0" tIns="0" bIns="0" anchor="t">
+            <a:spAutoFit/>
+          </a:bodyPr>
+          <a:lstStyle/>
+          <a:p>
+            <a:pPr algn="l"/>
+            <a:r>
+              <a:rPr sz="1100" b="1">
+                <a:solidFill>
+                  <a:srgbClr val="2E6FA8"/>
+                </a:solidFill>
+                <a:latin typeface="Calibri"/>
+              </a:rPr>
+              <a:t>MINIMUM ARCHITECTURE</a:t>
+            </a:r>
+          </a:p>
+        </p:txBody>
+      </p:sp>
+      <p:sp>
+        <p:nvSpPr>
+          <p:cNvPr id="28" name="Rounded Rectangle 27"/>
+          <p:cNvSpPr/>
+          <p:nvPr/>
+        </p:nvSpPr>
+        <p:spPr>
+          <a:xfrm>
+            <a:off x="7315200" y="1965960"/>
+            <a:ext cx="4572000" cy="777240"/>
+          </a:xfrm>
+          <a:prstGeom prst="roundRect">
+            <a:avLst/>
+          </a:prstGeom>
+          <a:solidFill>
+            <a:srgbClr val="2E6FA8"/>
+          </a:solidFill>
+          <a:ln>
+            <a:noFill/>
+          </a:ln>
+        </p:spPr>
+        <p:style>
+          <a:lnRef idx="1">
+            <a:schemeClr val="accent1"/>
+          </a:lnRef>
+          <a:fillRef idx="3">
+            <a:schemeClr val="accent1"/>
+          </a:fillRef>
+          <a:effectRef idx="2">
+            <a:schemeClr val="accent1"/>
+          </a:effectRef>
+          <a:fontRef idx="minor">
+            <a:schemeClr val="lt1"/>
+          </a:fontRef>
+        </p:style>
+        <p:txBody>
+          <a:bodyPr rtlCol="0" anchor="ctr"/>
+          <a:lstStyle/>
+          <a:p>
+            <a:pPr algn="ctr"/>
+          </a:p>
+        </p:txBody>
+      </p:sp>
+      <p:sp>
+        <p:nvSpPr>
+          <p:cNvPr id="29" name="TextBox 28"/>
+          <p:cNvSpPr txBox="1"/>
+          <p:nvPr/>
+        </p:nvSpPr>
+        <p:spPr>
+          <a:xfrm>
+            <a:off x="7498079" y="2057400"/>
+            <a:ext cx="4206240" cy="365760"/>
+          </a:xfrm>
+          <a:prstGeom prst="rect">
+            <a:avLst/>
+          </a:prstGeom>
+          <a:noFill/>
+        </p:spPr>
+        <p:txBody>
+          <a:bodyPr wrap="square" lIns="0" rIns="0" tIns="0" bIns="0" anchor="t">
+            <a:spAutoFit/>
+          </a:bodyPr>
+          <a:lstStyle/>
+          <a:p>
+            <a:pPr algn="l"/>
+            <a:r>
+              <a:rPr sz="1400" b="1">
+                <a:solidFill>
+                  <a:srgbClr val="FFFFFF"/>
+                </a:solidFill>
+                <a:latin typeface="Calibri"/>
+              </a:rPr>
+              <a:t>Feedback layer</a:t>
+            </a:r>
+          </a:p>
+        </p:txBody>
+      </p:sp>
+      <p:sp>
+        <p:nvSpPr>
+          <p:cNvPr id="30" name="TextBox 29"/>
+          <p:cNvSpPr txBox="1"/>
+          <p:nvPr/>
+        </p:nvSpPr>
+        <p:spPr>
+          <a:xfrm>
+            <a:off x="7498079" y="2404872"/>
+            <a:ext cx="4206240" cy="365760"/>
+          </a:xfrm>
+          <a:prstGeom prst="rect">
+            <a:avLst/>
+          </a:prstGeom>
+          <a:noFill/>
+        </p:spPr>
+        <p:txBody>
+          <a:bodyPr wrap="square" lIns="0" rIns="0" tIns="0" bIns="0" anchor="t">
+            <a:spAutoFit/>
+          </a:bodyPr>
+          <a:lstStyle/>
+          <a:p>
+            <a:pPr algn="l"/>
+            <a:r>
+              <a:rPr sz="1000" b="0">
+                <a:solidFill>
+                  <a:srgbClr val="FFFFFF"/>
+                </a:solidFill>
+                <a:latin typeface="Calibri"/>
+              </a:rPr>
+              <a:t>alert_outcomes.csv → metrics → tuning</a:t>
+            </a:r>
+          </a:p>
+        </p:txBody>
+      </p:sp>
+      <p:sp>
+        <p:nvSpPr>
+          <p:cNvPr id="31" name="Up Arrow 30"/>
+          <p:cNvSpPr/>
+          <p:nvPr/>
+        </p:nvSpPr>
+        <p:spPr>
+          <a:xfrm>
+            <a:off x="9418320" y="2743200"/>
+            <a:ext cx="365760" cy="118872"/>
+          </a:xfrm>
+          <a:prstGeom prst="upArrow">
+            <a:avLst/>
+          </a:prstGeom>
+          <a:solidFill>
+            <a:srgbClr val="2E6FA8"/>
+          </a:solidFill>
+          <a:ln>
+            <a:noFill/>
+          </a:ln>
+        </p:spPr>
+        <p:style>
+          <a:lnRef idx="1">
+            <a:schemeClr val="accent1"/>
+          </a:lnRef>
+          <a:fillRef idx="3">
+            <a:schemeClr val="accent1"/>
+          </a:fillRef>
+          <a:effectRef idx="2">
+            <a:schemeClr val="accent1"/>
+          </a:effectRef>
+          <a:fontRef idx="minor">
+            <a:schemeClr val="lt1"/>
+          </a:fontRef>
+        </p:style>
+        <p:txBody>
+          <a:bodyPr rtlCol="0" anchor="ctr"/>
+          <a:lstStyle/>
+          <a:p>
+            <a:pPr algn="ctr"/>
+          </a:p>
+        </p:txBody>
+      </p:sp>
+      <p:sp>
+        <p:nvSpPr>
+          <p:cNvPr id="32" name="Rounded Rectangle 31"/>
+          <p:cNvSpPr/>
+          <p:nvPr/>
+        </p:nvSpPr>
+        <p:spPr>
+          <a:xfrm>
+            <a:off x="7315200" y="2834640"/>
+            <a:ext cx="4572000" cy="777240"/>
+          </a:xfrm>
+          <a:prstGeom prst="roundRect">
+            <a:avLst/>
+          </a:prstGeom>
+          <a:solidFill>
+            <a:srgbClr val="1B2A4A"/>
+          </a:solidFill>
+          <a:ln>
+            <a:noFill/>
+          </a:ln>
+        </p:spPr>
+        <p:style>
+          <a:lnRef idx="1">
+            <a:schemeClr val="accent1"/>
+          </a:lnRef>
+          <a:fillRef idx="3">
+            <a:schemeClr val="accent1"/>
+          </a:fillRef>
+          <a:effectRef idx="2">
+            <a:schemeClr val="accent1"/>
+          </a:effectRef>
+          <a:fontRef idx="minor">
+            <a:schemeClr val="lt1"/>
+          </a:fontRef>
+        </p:style>
+        <p:txBody>
+          <a:bodyPr rtlCol="0" anchor="ctr"/>
+          <a:lstStyle/>
+          <a:p>
+            <a:pPr algn="ctr"/>
+          </a:p>
+        </p:txBody>
+      </p:sp>
+      <p:sp>
+        <p:nvSpPr>
+          <p:cNvPr id="33" name="TextBox 32"/>
+          <p:cNvSpPr txBox="1"/>
+          <p:nvPr/>
+        </p:nvSpPr>
+        <p:spPr>
+          <a:xfrm>
+            <a:off x="7498079" y="2926080"/>
+            <a:ext cx="4206240" cy="365760"/>
+          </a:xfrm>
+          <a:prstGeom prst="rect">
+            <a:avLst/>
+          </a:prstGeom>
+          <a:noFill/>
+        </p:spPr>
+        <p:txBody>
+          <a:bodyPr wrap="square" lIns="0" rIns="0" tIns="0" bIns="0" anchor="t">
+            <a:spAutoFit/>
+          </a:bodyPr>
+          <a:lstStyle/>
+          <a:p>
+            <a:pPr algn="l"/>
+            <a:r>
+              <a:rPr sz="1400" b="1">
+                <a:solidFill>
+                  <a:srgbClr val="FFFFFF"/>
+                </a:solidFill>
+                <a:latin typeface="Calibri"/>
+              </a:rPr>
+              <a:t>Activation layer</a:t>
+            </a:r>
+          </a:p>
+        </p:txBody>
+      </p:sp>
+      <p:sp>
+        <p:nvSpPr>
+          <p:cNvPr id="34" name="TextBox 33"/>
+          <p:cNvSpPr txBox="1"/>
+          <p:nvPr/>
+        </p:nvSpPr>
+        <p:spPr>
+          <a:xfrm>
+            <a:off x="7498079" y="3273552"/>
+            <a:ext cx="4206240" cy="365760"/>
+          </a:xfrm>
+          <a:prstGeom prst="rect">
+            <a:avLst/>
+          </a:prstGeom>
+          <a:noFill/>
+        </p:spPr>
+        <p:txBody>
+          <a:bodyPr wrap="square" lIns="0" rIns="0" tIns="0" bIns="0" anchor="t">
+            <a:spAutoFit/>
+          </a:bodyPr>
+          <a:lstStyle/>
+          <a:p>
+            <a:pPr algn="l"/>
+            <a:r>
+              <a:rPr sz="1000" b="0">
+                <a:solidFill>
+                  <a:srgbClr val="FFFFFF"/>
+                </a:solidFill>
+                <a:latin typeface="Calibri"/>
+              </a:rPr>
+              <a:t>build_alerts → ranked, traceable</a:t>
+            </a:r>
+          </a:p>
+        </p:txBody>
+      </p:sp>
+      <p:sp>
+        <p:nvSpPr>
+          <p:cNvPr id="35" name="Up Arrow 34"/>
+          <p:cNvSpPr/>
+          <p:nvPr/>
+        </p:nvSpPr>
+        <p:spPr>
+          <a:xfrm>
+            <a:off x="9418320" y="3611880"/>
+            <a:ext cx="365760" cy="118872"/>
+          </a:xfrm>
+          <a:prstGeom prst="upArrow">
+            <a:avLst/>
+          </a:prstGeom>
+          <a:solidFill>
+            <a:srgbClr val="2E6FA8"/>
+          </a:solidFill>
+          <a:ln>
+            <a:noFill/>
+          </a:ln>
+        </p:spPr>
+        <p:style>
+          <a:lnRef idx="1">
+            <a:schemeClr val="accent1"/>
+          </a:lnRef>
+          <a:fillRef idx="3">
+            <a:schemeClr val="accent1"/>
+          </a:fillRef>
+          <a:effectRef idx="2">
+            <a:schemeClr val="accent1"/>
+          </a:effectRef>
+          <a:fontRef idx="minor">
+            <a:schemeClr val="lt1"/>
+          </a:fontRef>
+        </p:style>
+        <p:txBody>
+          <a:bodyPr rtlCol="0" anchor="ctr"/>
+          <a:lstStyle/>
+          <a:p>
+            <a:pPr algn="ctr"/>
+          </a:p>
+        </p:txBody>
+      </p:sp>
+      <p:sp>
+        <p:nvSpPr>
+          <p:cNvPr id="36" name="Rounded Rectangle 35"/>
+          <p:cNvSpPr/>
+          <p:nvPr/>
+        </p:nvSpPr>
+        <p:spPr>
+          <a:xfrm>
+            <a:off x="7315200" y="3703320"/>
+            <a:ext cx="4572000" cy="777240"/>
+          </a:xfrm>
+          <a:prstGeom prst="roundRect">
+            <a:avLst/>
+          </a:prstGeom>
+          <a:solidFill>
+            <a:srgbClr val="5A7A9A"/>
+          </a:solidFill>
+          <a:ln>
+            <a:noFill/>
+          </a:ln>
+        </p:spPr>
+        <p:style>
+          <a:lnRef idx="1">
+            <a:schemeClr val="accent1"/>
+          </a:lnRef>
+          <a:fillRef idx="3">
+            <a:schemeClr val="accent1"/>
+          </a:fillRef>
+          <a:effectRef idx="2">
+            <a:schemeClr val="accent1"/>
+          </a:effectRef>
+          <a:fontRef idx="minor">
+            <a:schemeClr val="lt1"/>
+          </a:fontRef>
+        </p:style>
+        <p:txBody>
+          <a:bodyPr rtlCol="0" anchor="ctr"/>
+          <a:lstStyle/>
+          <a:p>
+            <a:pPr algn="ctr"/>
+          </a:p>
+        </p:txBody>
+      </p:sp>
+      <p:sp>
+        <p:nvSpPr>
+          <p:cNvPr id="37" name="TextBox 36"/>
+          <p:cNvSpPr txBox="1"/>
+          <p:nvPr/>
+        </p:nvSpPr>
+        <p:spPr>
+          <a:xfrm>
+            <a:off x="7498079" y="3794760"/>
+            <a:ext cx="4206240" cy="365760"/>
+          </a:xfrm>
+          <a:prstGeom prst="rect">
+            <a:avLst/>
+          </a:prstGeom>
+          <a:noFill/>
+        </p:spPr>
+        <p:txBody>
+          <a:bodyPr wrap="square" lIns="0" rIns="0" tIns="0" bIns="0" anchor="t">
+            <a:spAutoFit/>
+          </a:bodyPr>
+          <a:lstStyle/>
+          <a:p>
+            <a:pPr algn="l"/>
+            <a:r>
+              <a:rPr sz="1400" b="1">
+                <a:solidFill>
+                  <a:srgbClr val="FFFFFF"/>
+                </a:solidFill>
+                <a:latin typeface="Calibri"/>
+              </a:rPr>
+              <a:t>Analytical layer</a:t>
+            </a:r>
+          </a:p>
+        </p:txBody>
+      </p:sp>
+      <p:sp>
+        <p:nvSpPr>
+          <p:cNvPr id="38" name="TextBox 37"/>
+          <p:cNvSpPr txBox="1"/>
+          <p:nvPr/>
+        </p:nvSpPr>
+        <p:spPr>
+          <a:xfrm>
+            <a:off x="7498079" y="4142232"/>
+            <a:ext cx="4206240" cy="365760"/>
+          </a:xfrm>
+          <a:prstGeom prst="rect">
+            <a:avLst/>
+          </a:prstGeom>
+          <a:noFill/>
+        </p:spPr>
+        <p:txBody>
+          <a:bodyPr wrap="square" lIns="0" rIns="0" tIns="0" bIns="0" anchor="t">
+            <a:spAutoFit/>
+          </a:bodyPr>
+          <a:lstStyle/>
+          <a:p>
+            <a:pPr algn="l"/>
+            <a:r>
+              <a:rPr sz="1000" b="0">
+                <a:solidFill>
+                  <a:srgbClr val="FFFFFF"/>
+                </a:solidFill>
+                <a:latin typeface="Calibri"/>
+              </a:rPr>
+              <a:t>commodity_segments / technical_patterns</a:t>
+            </a:r>
+          </a:p>
+        </p:txBody>
+      </p:sp>
+      <p:sp>
+        <p:nvSpPr>
+          <p:cNvPr id="39" name="Up Arrow 38"/>
+          <p:cNvSpPr/>
+          <p:nvPr/>
+        </p:nvSpPr>
+        <p:spPr>
+          <a:xfrm>
+            <a:off x="9418320" y="4480560"/>
+            <a:ext cx="365760" cy="118872"/>
+          </a:xfrm>
+          <a:prstGeom prst="upArrow">
+            <a:avLst/>
+          </a:prstGeom>
+          <a:solidFill>
+            <a:srgbClr val="2E6FA8"/>
+          </a:solidFill>
+          <a:ln>
+            <a:noFill/>
+          </a:ln>
+        </p:spPr>
+        <p:style>
+          <a:lnRef idx="1">
+            <a:schemeClr val="accent1"/>
+          </a:lnRef>
+          <a:fillRef idx="3">
+            <a:schemeClr val="accent1"/>
+          </a:fillRef>
+          <a:effectRef idx="2">
+            <a:schemeClr val="accent1"/>
+          </a:effectRef>
+          <a:fontRef idx="minor">
+            <a:schemeClr val="lt1"/>
+          </a:fontRef>
+        </p:style>
+        <p:txBody>
+          <a:bodyPr rtlCol="0" anchor="ctr"/>
+          <a:lstStyle/>
+          <a:p>
+            <a:pPr algn="ctr"/>
+          </a:p>
+        </p:txBody>
+      </p:sp>
+      <p:sp>
+        <p:nvSpPr>
+          <p:cNvPr id="40" name="Rounded Rectangle 39"/>
+          <p:cNvSpPr/>
+          <p:nvPr/>
+        </p:nvSpPr>
+        <p:spPr>
+          <a:xfrm>
+            <a:off x="7315200" y="4572000"/>
+            <a:ext cx="4572000" cy="777240"/>
+          </a:xfrm>
+          <a:prstGeom prst="roundRect">
+            <a:avLst/>
+          </a:prstGeom>
+          <a:solidFill>
+            <a:srgbClr val="6B6B6B"/>
+          </a:solidFill>
+          <a:ln>
+            <a:noFill/>
+          </a:ln>
+        </p:spPr>
+        <p:style>
+          <a:lnRef idx="1">
+            <a:schemeClr val="accent1"/>
+          </a:lnRef>
+          <a:fillRef idx="3">
+            <a:schemeClr val="accent1"/>
+          </a:fillRef>
+          <a:effectRef idx="2">
+            <a:schemeClr val="accent1"/>
+          </a:effectRef>
+          <a:fontRef idx="minor">
+            <a:schemeClr val="lt1"/>
+          </a:fontRef>
+        </p:style>
+        <p:txBody>
+          <a:bodyPr rtlCol="0" anchor="ctr"/>
+          <a:lstStyle/>
+          <a:p>
+            <a:pPr algn="ctr"/>
+          </a:p>
+        </p:txBody>
+      </p:sp>
+      <p:sp>
+        <p:nvSpPr>
+          <p:cNvPr id="41" name="TextBox 40"/>
+          <p:cNvSpPr txBox="1"/>
+          <p:nvPr/>
+        </p:nvSpPr>
+        <p:spPr>
+          <a:xfrm>
+            <a:off x="7498079" y="4663440"/>
+            <a:ext cx="4206240" cy="365760"/>
+          </a:xfrm>
+          <a:prstGeom prst="rect">
+            <a:avLst/>
+          </a:prstGeom>
+          <a:noFill/>
+        </p:spPr>
+        <p:txBody>
+          <a:bodyPr wrap="square" lIns="0" rIns="0" tIns="0" bIns="0" anchor="t">
+            <a:spAutoFit/>
+          </a:bodyPr>
+          <a:lstStyle/>
+          <a:p>
+            <a:pPr algn="l"/>
+            <a:r>
+              <a:rPr sz="1400" b="1">
+                <a:solidFill>
+                  <a:srgbClr val="FFFFFF"/>
+                </a:solidFill>
+                <a:latin typeface="Calibri"/>
+              </a:rPr>
+              <a:t>Data layer</a:t>
+            </a:r>
+          </a:p>
+        </p:txBody>
+      </p:sp>
+      <p:sp>
+        <p:nvSpPr>
+          <p:cNvPr id="42" name="TextBox 41"/>
+          <p:cNvSpPr txBox="1"/>
+          <p:nvPr/>
+        </p:nvSpPr>
+        <p:spPr>
+          <a:xfrm>
+            <a:off x="7498079" y="5010912"/>
+            <a:ext cx="4206240" cy="365760"/>
+          </a:xfrm>
+          <a:prstGeom prst="rect">
+            <a:avLst/>
+          </a:prstGeom>
+          <a:noFill/>
+        </p:spPr>
+        <p:txBody>
+          <a:bodyPr wrap="square" lIns="0" rIns="0" tIns="0" bIns="0" anchor="t">
+            <a:spAutoFit/>
+          </a:bodyPr>
+          <a:lstStyle/>
+          <a:p>
+            <a:pPr algn="l"/>
+            <a:r>
+              <a:rPr sz="1000" b="0">
+                <a:solidFill>
+                  <a:srgbClr val="FFFFFF"/>
+                </a:solidFill>
+                <a:latin typeface="Calibri"/>
+              </a:rPr>
+              <a:t>cleaned CSVs (5 sheets)</a:t>
+            </a:r>
+          </a:p>
+        </p:txBody>
+      </p:sp>
+      <p:sp>
+        <p:nvSpPr>
+          <p:cNvPr id="43" name="TextBox 42"/>
+          <p:cNvSpPr txBox="1"/>
+          <p:nvPr/>
+        </p:nvSpPr>
+        <p:spPr>
+          <a:xfrm>
+            <a:off x="548640" y="5989320"/>
+            <a:ext cx="11091672" cy="365760"/>
+          </a:xfrm>
+          <a:prstGeom prst="rect">
+            <a:avLst/>
+          </a:prstGeom>
+          <a:noFill/>
+        </p:spPr>
+        <p:txBody>
+          <a:bodyPr wrap="square" lIns="0" rIns="0" tIns="0" bIns="0" anchor="t">
+            <a:spAutoFit/>
+          </a:bodyPr>
+          <a:lstStyle/>
+          <a:p>
+            <a:pPr algn="ctr"/>
+            <a:r>
+              <a:rPr sz="1400" b="1">
+                <a:solidFill>
+                  <a:srgbClr val="1B2A4A"/>
+                </a:solidFill>
+                <a:latin typeface="Calibri"/>
+              </a:rPr>
+              <a:t>🎬 Live demo: 3 minutes · pitch/demo_walkthrough_3min.md</a:t>
+            </a:r>
+          </a:p>
+        </p:txBody>
+      </p:sp>
+      <p:sp>
+        <p:nvSpPr>
+          <p:cNvPr id="44" name="TextBox 43"/>
+          <p:cNvSpPr txBox="1"/>
+          <p:nvPr/>
+        </p:nvSpPr>
+        <p:spPr>
+          <a:xfrm>
+            <a:off x="548640" y="6355080"/>
+            <a:ext cx="11091672" cy="320040"/>
+          </a:xfrm>
+          <a:prstGeom prst="rect">
+            <a:avLst/>
+          </a:prstGeom>
+          <a:noFill/>
+        </p:spPr>
+        <p:txBody>
+          <a:bodyPr wrap="square" lIns="0" rIns="0" tIns="0" bIns="0" anchor="t">
+            <a:spAutoFit/>
+          </a:bodyPr>
+          <a:lstStyle/>
+          <a:p>
+            <a:pPr algn="ctr"/>
+            <a:r>
+              <a:rPr sz="1100" b="0">
+                <a:solidFill>
+                  <a:srgbClr val="6B6B6B"/>
+                </a:solidFill>
+                <a:latin typeface="Calibri"/>
+              </a:rPr>
+              <a:t>AI-narrated demo video also available · pitch/video/Inibsa_Alert_Marker_demo.mp4</a:t>
+            </a:r>
+          </a:p>
+        </p:txBody>
+      </p:sp>
+    </p:spTree>
+  </p:cSld>
+  <p:clrMapOvr>
+    <a:masterClrMapping/>
+  </p:clrMapOvr>
+</p:sld>
+</file>
+
+<file path=ppt/slides/slide8.xml><?xml version="1.0" encoding="utf-8"?>
 <p:sld xmlns:a="http://schemas.openxmlformats.org/drawingml/2006/main" xmlns:p="http://schemas.openxmlformats.org/presentationml/2006/main" xmlns:r="http://schemas.openxmlformats.org/officeDocument/2006/relationships">
   <p:cSld>
     <p:spTree>
